--- a/Vue_vs_React_PoC (2).pptx
+++ b/Vue_vs_React_PoC (2).pptx
@@ -647,6 +647,12 @@
             <c:idx val="0"/>
             <c:invertIfNegative val="0"/>
             <c:bubble3D val="0"/>
+            <c:spPr>
+              <a:solidFill>
+                <a:srgbClr val="61DAFB"/>
+              </a:solidFill>
+              <a:effectLst/>
+            </c:spPr>
             <c:extLst>
               <c:ext xmlns:c16="http://schemas.microsoft.com/office/drawing/2014/chart" uri="{C3380CC4-5D6E-409C-BE32-E72D297353CC}">
                 <c16:uniqueId val="{00000001-D2A0-4BB3-81FB-72B5A5F2607C}"/>
@@ -657,6 +663,12 @@
             <c:idx val="1"/>
             <c:invertIfNegative val="0"/>
             <c:bubble3D val="0"/>
+            <c:spPr>
+              <a:solidFill>
+                <a:srgbClr val="61DAFB"/>
+              </a:solidFill>
+              <a:effectLst/>
+            </c:spPr>
             <c:extLst>
               <c:ext xmlns:c16="http://schemas.microsoft.com/office/drawing/2014/chart" uri="{C3380CC4-5D6E-409C-BE32-E72D297353CC}">
                 <c16:uniqueId val="{00000003-D2A0-4BB3-81FB-72B5A5F2607C}"/>
@@ -4704,7 +4716,7 @@
         </p:nvSpPr>
         <p:spPr>
           <a:xfrm>
-            <a:off x="548640" y="2103120"/>
+            <a:off x="708660" y="1490472"/>
             <a:ext cx="9144000" cy="1371600"/>
           </a:xfrm>
           <a:prstGeom prst="rect">
@@ -4743,24 +4755,24 @@
         </p:nvSpPr>
         <p:spPr>
           <a:xfrm>
-            <a:off x="548640" y="3337560"/>
-            <a:ext cx="9692640" cy="640080"/>
-          </a:xfrm>
-          <a:prstGeom prst="rect">
-            <a:avLst/>
-          </a:prstGeom>
-          <a:noFill/>
-          <a:ln/>
-        </p:spPr>
-        <p:txBody>
-          <a:bodyPr wrap="square" lIns="0" tIns="0" rIns="0" bIns="0" rtlCol="0" anchor="ctr"/>
-          <a:lstStyle/>
-          <a:p>
-            <a:pPr marL="0" indent="0">
-              <a:buNone/>
-            </a:pPr>
-            <a:r>
-              <a:rPr lang="en-US" sz="1900" dirty="0">
+            <a:off x="369055" y="2957507"/>
+            <a:ext cx="11453890" cy="640080"/>
+          </a:xfrm>
+          <a:prstGeom prst="rect">
+            <a:avLst/>
+          </a:prstGeom>
+          <a:noFill/>
+          <a:ln/>
+        </p:spPr>
+        <p:txBody>
+          <a:bodyPr wrap="square" lIns="0" tIns="0" rIns="0" bIns="0" rtlCol="0" anchor="ctr"/>
+          <a:lstStyle/>
+          <a:p>
+            <a:pPr marL="0" indent="0">
+              <a:buNone/>
+            </a:pPr>
+            <a:r>
+              <a:rPr lang="en-US" sz="2400" dirty="0">
                 <a:solidFill>
                   <a:srgbClr val="C9D6D3"/>
                 </a:solidFill>
@@ -4770,7 +4782,7 @@
               </a:rPr>
               <a:t>Un framework progresivo para interfaces modernas — evaluado en comparación con React</a:t>
             </a:r>
-            <a:endParaRPr lang="en-US" sz="1900" dirty="0"/>
+            <a:endParaRPr lang="en-US" sz="2400" dirty="0"/>
           </a:p>
         </p:txBody>
       </p:sp>
@@ -4790,8 +4802,8 @@
         </p:blipFill>
         <p:spPr>
           <a:xfrm>
-            <a:off x="548640" y="4160520"/>
-            <a:ext cx="365760" cy="365760"/>
+            <a:off x="548640" y="3847482"/>
+            <a:ext cx="678798" cy="678798"/>
           </a:xfrm>
           <a:prstGeom prst="rect">
             <a:avLst/>
@@ -4806,24 +4818,24 @@
         </p:nvSpPr>
         <p:spPr>
           <a:xfrm>
-            <a:off x="1051560" y="4160520"/>
-            <a:ext cx="7315200" cy="365760"/>
-          </a:xfrm>
-          <a:prstGeom prst="rect">
-            <a:avLst/>
-          </a:prstGeom>
-          <a:noFill/>
-          <a:ln/>
-        </p:spPr>
-        <p:txBody>
-          <a:bodyPr wrap="square" lIns="0" tIns="0" rIns="0" bIns="0" rtlCol="0" anchor="ctr"/>
-          <a:lstStyle/>
-          <a:p>
-            <a:pPr marL="0" indent="0">
-              <a:buNone/>
-            </a:pPr>
-            <a:r>
-              <a:rPr lang="en-US" sz="1400" dirty="0">
+            <a:off x="1383545" y="4000500"/>
+            <a:ext cx="2076347" cy="365760"/>
+          </a:xfrm>
+          <a:prstGeom prst="rect">
+            <a:avLst/>
+          </a:prstGeom>
+          <a:noFill/>
+          <a:ln/>
+        </p:spPr>
+        <p:txBody>
+          <a:bodyPr wrap="square" lIns="0" tIns="0" rIns="0" bIns="0" rtlCol="0" anchor="ctr"/>
+          <a:lstStyle/>
+          <a:p>
+            <a:pPr marL="0" indent="0">
+              <a:buNone/>
+            </a:pPr>
+            <a:r>
+              <a:rPr lang="en-US" dirty="0">
                 <a:solidFill>
                   <a:srgbClr val="8FA3A0"/>
                 </a:solidFill>
@@ -4831,9 +4843,9 @@
                 <a:ea typeface="Calibri" pitchFamily="34" charset="-122"/>
                 <a:cs typeface="Calibri" pitchFamily="34" charset="-120"/>
               </a:rPr>
-              <a:t>Vue.js  vs  React  ·  PoC conjunta con el grupo de React</a:t>
-            </a:r>
-            <a:endParaRPr lang="en-US" sz="1400" dirty="0"/>
+              <a:t>Vue.js  vs  React</a:t>
+            </a:r>
+            <a:endParaRPr lang="en-US" dirty="0"/>
           </a:p>
         </p:txBody>
       </p:sp>
@@ -5297,7 +5309,7 @@
         </p:nvSpPr>
         <p:spPr>
           <a:xfrm>
-            <a:off x="2926080" y="2194560"/>
+            <a:off x="3017520" y="2286000"/>
             <a:ext cx="8412480" cy="457200"/>
           </a:xfrm>
           <a:prstGeom prst="rect">
@@ -5322,7 +5334,7 @@
                 <a:ea typeface="Calibri" pitchFamily="34" charset="-122"/>
                 <a:cs typeface="Calibri" pitchFamily="34" charset="-120"/>
               </a:rPr>
-              <a:t>BLOQUE 2 · MANUEL</a:t>
+              <a:t>BLOQUE 2 ·</a:t>
             </a:r>
             <a:endParaRPr lang="en-US" sz="1500" dirty="0"/>
           </a:p>
@@ -5392,7 +5404,7 @@
               <a:buNone/>
             </a:pPr>
             <a:r>
-              <a:rPr lang="en-US" sz="1600" dirty="0">
+              <a:rPr lang="en-US" sz="2000" dirty="0">
                 <a:solidFill>
                   <a:srgbClr val="C9D6D3"/>
                 </a:solidFill>
@@ -5402,7 +5414,7 @@
               </a:rPr>
               <a:t>Cómo se construye una aplicación real: reactividad en profundidad, componentes y las dos formas de escribir Vue.</a:t>
             </a:r>
-            <a:endParaRPr lang="en-US" sz="1600" dirty="0"/>
+            <a:endParaRPr lang="en-US" sz="2000" dirty="0"/>
           </a:p>
         </p:txBody>
       </p:sp>
@@ -5672,23 +5684,23 @@
         <p:spPr>
           <a:xfrm>
             <a:off x="2468880" y="1764792"/>
-            <a:ext cx="3200400" cy="685800"/>
-          </a:xfrm>
-          <a:prstGeom prst="rect">
-            <a:avLst/>
-          </a:prstGeom>
-          <a:noFill/>
-          <a:ln/>
-        </p:spPr>
-        <p:txBody>
-          <a:bodyPr wrap="square" lIns="0" tIns="0" rIns="0" bIns="0" rtlCol="0" anchor="ctr"/>
-          <a:lstStyle/>
-          <a:p>
-            <a:pPr marL="0" indent="0">
-              <a:buNone/>
-            </a:pPr>
-            <a:r>
-              <a:rPr lang="en-US" sz="1050" dirty="0">
+            <a:ext cx="3291840" cy="685800"/>
+          </a:xfrm>
+          <a:prstGeom prst="rect">
+            <a:avLst/>
+          </a:prstGeom>
+          <a:noFill/>
+          <a:ln/>
+        </p:spPr>
+        <p:txBody>
+          <a:bodyPr wrap="square" lIns="0" tIns="0" rIns="0" bIns="0" rtlCol="0" anchor="ctr"/>
+          <a:lstStyle/>
+          <a:p>
+            <a:pPr marL="0" indent="0">
+              <a:buNone/>
+            </a:pPr>
+            <a:r>
+              <a:rPr lang="en-US" sz="1600" dirty="0">
                 <a:solidFill>
                   <a:srgbClr val="1E2A33"/>
                 </a:solidFill>
@@ -5698,7 +5710,7 @@
               </a:rPr>
               <a:t>Envuelve un valor primitivo en un objeto reactivo. Se accede/modifica con .value.</a:t>
             </a:r>
-            <a:endParaRPr lang="en-US" sz="1050" dirty="0"/>
+            <a:endParaRPr lang="en-US" sz="1600" dirty="0"/>
           </a:p>
         </p:txBody>
       </p:sp>
@@ -5795,7 +5807,7 @@
               <a:buNone/>
             </a:pPr>
             <a:r>
-              <a:rPr lang="en-US" sz="1050" dirty="0">
+              <a:rPr lang="en-US" sz="1600" dirty="0">
                 <a:solidFill>
                   <a:srgbClr val="1E2A33"/>
                 </a:solidFill>
@@ -5805,7 +5817,7 @@
               </a:rPr>
               <a:t>Convierte un objeto completo en reactivo (proxy de JavaScript).</a:t>
             </a:r>
-            <a:endParaRPr lang="en-US" sz="1050" dirty="0"/>
+            <a:endParaRPr lang="en-US" sz="1600" dirty="0"/>
           </a:p>
         </p:txBody>
       </p:sp>
@@ -5902,7 +5914,7 @@
               <a:buNone/>
             </a:pPr>
             <a:r>
-              <a:rPr lang="en-US" sz="1050" dirty="0">
+              <a:rPr lang="en-US" sz="1600" dirty="0">
                 <a:solidFill>
                   <a:srgbClr val="1E2A33"/>
                 </a:solidFill>
@@ -5912,7 +5924,7 @@
               </a:rPr>
               <a:t>Valor derivado que se recalcula solo cuando cambian sus dependencias.</a:t>
             </a:r>
-            <a:endParaRPr lang="en-US" sz="1050" dirty="0"/>
+            <a:endParaRPr lang="en-US" sz="1600" dirty="0"/>
           </a:p>
         </p:txBody>
       </p:sp>
@@ -6009,7 +6021,7 @@
               <a:buNone/>
             </a:pPr>
             <a:r>
-              <a:rPr lang="en-US" sz="1050" dirty="0">
+              <a:rPr lang="en-US" sz="1600" dirty="0">
                 <a:solidFill>
                   <a:srgbClr val="1E2A33"/>
                 </a:solidFill>
@@ -6019,7 +6031,7 @@
               </a:rPr>
               <a:t>Ejecuta una función cuando una fuente reactiva específica cambia.</a:t>
             </a:r>
-            <a:endParaRPr lang="en-US" sz="1050" dirty="0"/>
+            <a:endParaRPr lang="en-US" sz="1600" dirty="0"/>
           </a:p>
         </p:txBody>
       </p:sp>
@@ -6060,8 +6072,8 @@
         </p:nvSpPr>
         <p:spPr>
           <a:xfrm>
-            <a:off x="6583680" y="1874520"/>
-            <a:ext cx="4526280" cy="3657600"/>
+            <a:off x="6568442" y="1612232"/>
+            <a:ext cx="5364478" cy="3977640"/>
           </a:xfrm>
           <a:prstGeom prst="rect">
             <a:avLst/>
@@ -6459,7 +6471,7 @@
               <a:buNone/>
             </a:pPr>
             <a:r>
-              <a:rPr lang="en-US" sz="1350" dirty="0">
+              <a:rPr lang="en-US" sz="2000" dirty="0">
                 <a:solidFill>
                   <a:srgbClr val="1E2A33"/>
                 </a:solidFill>
@@ -6469,7 +6481,7 @@
               </a:rPr>
               <a:t>Vue extiende HTML con atributos especiales ("directivas") que conectan el template con el estado:</a:t>
             </a:r>
-            <a:endParaRPr lang="en-US" sz="1350" dirty="0"/>
+            <a:endParaRPr lang="en-US" sz="2000" dirty="0"/>
           </a:p>
         </p:txBody>
       </p:sp>
@@ -6481,7 +6493,7 @@
         </p:nvSpPr>
         <p:spPr>
           <a:xfrm>
-            <a:off x="548640" y="2103120"/>
+            <a:off x="548640" y="2383436"/>
             <a:ext cx="1920240" cy="457200"/>
           </a:xfrm>
           <a:prstGeom prst="rect">
@@ -6520,24 +6532,24 @@
         </p:nvSpPr>
         <p:spPr>
           <a:xfrm>
-            <a:off x="2468880" y="2103120"/>
-            <a:ext cx="3291840" cy="457200"/>
-          </a:xfrm>
-          <a:prstGeom prst="rect">
-            <a:avLst/>
-          </a:prstGeom>
-          <a:noFill/>
-          <a:ln/>
-        </p:spPr>
-        <p:txBody>
-          <a:bodyPr wrap="square" lIns="0" tIns="0" rIns="0" bIns="0" rtlCol="0" anchor="ctr"/>
-          <a:lstStyle/>
-          <a:p>
-            <a:pPr marL="0" indent="0">
-              <a:buNone/>
-            </a:pPr>
-            <a:r>
-              <a:rPr lang="en-US" sz="1100" dirty="0">
+            <a:off x="2011528" y="2382936"/>
+            <a:ext cx="4606491" cy="457200"/>
+          </a:xfrm>
+          <a:prstGeom prst="rect">
+            <a:avLst/>
+          </a:prstGeom>
+          <a:noFill/>
+          <a:ln/>
+        </p:spPr>
+        <p:txBody>
+          <a:bodyPr wrap="square" lIns="0" tIns="0" rIns="0" bIns="0" rtlCol="0" anchor="ctr"/>
+          <a:lstStyle/>
+          <a:p>
+            <a:pPr marL="0" indent="0">
+              <a:buNone/>
+            </a:pPr>
+            <a:r>
+              <a:rPr lang="en-US" sz="1600" dirty="0">
                 <a:solidFill>
                   <a:srgbClr val="5B6B73"/>
                 </a:solidFill>
@@ -6545,9 +6557,31 @@
                 <a:ea typeface="Calibri" pitchFamily="34" charset="-122"/>
                 <a:cs typeface="Calibri" pitchFamily="34" charset="-120"/>
               </a:rPr>
-              <a:t>Enlaza un atributo HTML a una expresión — :src="imgUrl"</a:t>
-            </a:r>
-            <a:endParaRPr lang="en-US" sz="1100" dirty="0"/>
+              <a:t>Enlaza un atributo HTML a una </a:t>
+            </a:r>
+            <a:r>
+              <a:rPr lang="en-US" sz="1600" dirty="0" err="1">
+                <a:solidFill>
+                  <a:srgbClr val="5B6B73"/>
+                </a:solidFill>
+                <a:latin typeface="Calibri" pitchFamily="34" charset="0"/>
+                <a:ea typeface="Calibri" pitchFamily="34" charset="-122"/>
+                <a:cs typeface="Calibri" pitchFamily="34" charset="-120"/>
+              </a:rPr>
+              <a:t>expresión</a:t>
+            </a:r>
+            <a:r>
+              <a:rPr lang="en-US" sz="1600" dirty="0">
+                <a:solidFill>
+                  <a:srgbClr val="5B6B73"/>
+                </a:solidFill>
+                <a:latin typeface="Calibri" pitchFamily="34" charset="0"/>
+                <a:ea typeface="Calibri" pitchFamily="34" charset="-122"/>
+                <a:cs typeface="Calibri" pitchFamily="34" charset="-120"/>
+              </a:rPr>
+              <a:t> :src="imgUrl"</a:t>
+            </a:r>
+            <a:endParaRPr lang="en-US" sz="1600" dirty="0"/>
           </a:p>
         </p:txBody>
       </p:sp>
@@ -6559,7 +6593,7 @@
         </p:nvSpPr>
         <p:spPr>
           <a:xfrm>
-            <a:off x="548640" y="2670048"/>
+            <a:off x="535980" y="3023466"/>
             <a:ext cx="1920240" cy="457200"/>
           </a:xfrm>
           <a:prstGeom prst="rect">
@@ -6598,24 +6632,24 @@
         </p:nvSpPr>
         <p:spPr>
           <a:xfrm>
-            <a:off x="2468880" y="2670048"/>
-            <a:ext cx="3291840" cy="457200"/>
-          </a:xfrm>
-          <a:prstGeom prst="rect">
-            <a:avLst/>
-          </a:prstGeom>
-          <a:noFill/>
-          <a:ln/>
-        </p:spPr>
-        <p:txBody>
-          <a:bodyPr wrap="square" lIns="0" tIns="0" rIns="0" bIns="0" rtlCol="0" anchor="ctr"/>
-          <a:lstStyle/>
-          <a:p>
-            <a:pPr marL="0" indent="0">
-              <a:buNone/>
-            </a:pPr>
-            <a:r>
-              <a:rPr lang="en-US" sz="1100" dirty="0">
+            <a:off x="2011528" y="3023916"/>
+            <a:ext cx="4480560" cy="457200"/>
+          </a:xfrm>
+          <a:prstGeom prst="rect">
+            <a:avLst/>
+          </a:prstGeom>
+          <a:noFill/>
+          <a:ln/>
+        </p:spPr>
+        <p:txBody>
+          <a:bodyPr wrap="square" lIns="0" tIns="0" rIns="0" bIns="0" rtlCol="0" anchor="ctr"/>
+          <a:lstStyle/>
+          <a:p>
+            <a:pPr marL="0" indent="0">
+              <a:buNone/>
+            </a:pPr>
+            <a:r>
+              <a:rPr lang="en-US" sz="1600" dirty="0">
                 <a:solidFill>
                   <a:srgbClr val="5B6B73"/>
                 </a:solidFill>
@@ -6625,7 +6659,7 @@
               </a:rPr>
               <a:t>Escucha un evento del DOM — @click="guardar"</a:t>
             </a:r>
-            <a:endParaRPr lang="en-US" sz="1100" dirty="0"/>
+            <a:endParaRPr lang="en-US" sz="1600" dirty="0"/>
           </a:p>
         </p:txBody>
       </p:sp>
@@ -6637,7 +6671,7 @@
         </p:nvSpPr>
         <p:spPr>
           <a:xfrm>
-            <a:off x="548640" y="3236976"/>
+            <a:off x="535980" y="3700092"/>
             <a:ext cx="1920240" cy="457200"/>
           </a:xfrm>
           <a:prstGeom prst="rect">
@@ -6676,24 +6710,24 @@
         </p:nvSpPr>
         <p:spPr>
           <a:xfrm>
-            <a:off x="2468880" y="3236976"/>
-            <a:ext cx="3291840" cy="457200"/>
-          </a:xfrm>
-          <a:prstGeom prst="rect">
-            <a:avLst/>
-          </a:prstGeom>
-          <a:noFill/>
-          <a:ln/>
-        </p:spPr>
-        <p:txBody>
-          <a:bodyPr wrap="square" lIns="0" tIns="0" rIns="0" bIns="0" rtlCol="0" anchor="ctr"/>
-          <a:lstStyle/>
-          <a:p>
-            <a:pPr marL="0" indent="0">
-              <a:buNone/>
-            </a:pPr>
-            <a:r>
-              <a:rPr lang="en-US" sz="1100" dirty="0">
+            <a:off x="2011528" y="3695519"/>
+            <a:ext cx="4114800" cy="457200"/>
+          </a:xfrm>
+          <a:prstGeom prst="rect">
+            <a:avLst/>
+          </a:prstGeom>
+          <a:noFill/>
+          <a:ln/>
+        </p:spPr>
+        <p:txBody>
+          <a:bodyPr wrap="square" lIns="0" tIns="0" rIns="0" bIns="0" rtlCol="0" anchor="ctr"/>
+          <a:lstStyle/>
+          <a:p>
+            <a:pPr marL="0" indent="0">
+              <a:buNone/>
+            </a:pPr>
+            <a:r>
+              <a:rPr lang="en-US" sz="1600" dirty="0">
                 <a:solidFill>
                   <a:srgbClr val="5B6B73"/>
                 </a:solidFill>
@@ -6703,7 +6737,7 @@
               </a:rPr>
               <a:t>Renderiza condicionalmente un bloque completo</a:t>
             </a:r>
-            <a:endParaRPr lang="en-US" sz="1100" dirty="0"/>
+            <a:endParaRPr lang="en-US" sz="1600" dirty="0"/>
           </a:p>
         </p:txBody>
       </p:sp>
@@ -6715,7 +6749,7 @@
         </p:nvSpPr>
         <p:spPr>
           <a:xfrm>
-            <a:off x="548640" y="3803904"/>
+            <a:off x="548640" y="4529649"/>
             <a:ext cx="1920240" cy="457200"/>
           </a:xfrm>
           <a:prstGeom prst="rect">
@@ -6754,24 +6788,24 @@
         </p:nvSpPr>
         <p:spPr>
           <a:xfrm>
-            <a:off x="2468880" y="3803904"/>
-            <a:ext cx="3291840" cy="457200"/>
-          </a:xfrm>
-          <a:prstGeom prst="rect">
-            <a:avLst/>
-          </a:prstGeom>
-          <a:noFill/>
-          <a:ln/>
-        </p:spPr>
-        <p:txBody>
-          <a:bodyPr wrap="square" lIns="0" tIns="0" rIns="0" bIns="0" rtlCol="0" anchor="ctr"/>
-          <a:lstStyle/>
-          <a:p>
-            <a:pPr marL="0" indent="0">
-              <a:buNone/>
-            </a:pPr>
-            <a:r>
-              <a:rPr lang="en-US" sz="1100" dirty="0">
+            <a:off x="2011528" y="4478795"/>
+            <a:ext cx="3886200" cy="457200"/>
+          </a:xfrm>
+          <a:prstGeom prst="rect">
+            <a:avLst/>
+          </a:prstGeom>
+          <a:noFill/>
+          <a:ln/>
+        </p:spPr>
+        <p:txBody>
+          <a:bodyPr wrap="square" lIns="0" tIns="0" rIns="0" bIns="0" rtlCol="0" anchor="ctr"/>
+          <a:lstStyle/>
+          <a:p>
+            <a:pPr marL="0" indent="0">
+              <a:buNone/>
+            </a:pPr>
+            <a:r>
+              <a:rPr lang="en-US" sz="1600" dirty="0">
                 <a:solidFill>
                   <a:srgbClr val="5B6B73"/>
                 </a:solidFill>
@@ -6781,7 +6815,7 @@
               </a:rPr>
               <a:t>Repite un elemento por cada ítem de una lista</a:t>
             </a:r>
-            <a:endParaRPr lang="en-US" sz="1100" dirty="0"/>
+            <a:endParaRPr lang="en-US" sz="1600" dirty="0"/>
           </a:p>
         </p:txBody>
       </p:sp>
@@ -6793,7 +6827,7 @@
         </p:nvSpPr>
         <p:spPr>
           <a:xfrm>
-            <a:off x="548640" y="4370832"/>
+            <a:off x="548640" y="5267266"/>
             <a:ext cx="1920240" cy="457200"/>
           </a:xfrm>
           <a:prstGeom prst="rect">
@@ -6832,24 +6866,24 @@
         </p:nvSpPr>
         <p:spPr>
           <a:xfrm>
-            <a:off x="2468880" y="4370832"/>
-            <a:ext cx="3291840" cy="457200"/>
-          </a:xfrm>
-          <a:prstGeom prst="rect">
-            <a:avLst/>
-          </a:prstGeom>
-          <a:noFill/>
-          <a:ln/>
-        </p:spPr>
-        <p:txBody>
-          <a:bodyPr wrap="square" lIns="0" tIns="0" rIns="0" bIns="0" rtlCol="0" anchor="ctr"/>
-          <a:lstStyle/>
-          <a:p>
-            <a:pPr marL="0" indent="0">
-              <a:buNone/>
-            </a:pPr>
-            <a:r>
-              <a:rPr lang="en-US" sz="1100" dirty="0">
+            <a:off x="2011528" y="5216412"/>
+            <a:ext cx="3627120" cy="457200"/>
+          </a:xfrm>
+          <a:prstGeom prst="rect">
+            <a:avLst/>
+          </a:prstGeom>
+          <a:noFill/>
+          <a:ln/>
+        </p:spPr>
+        <p:txBody>
+          <a:bodyPr wrap="square" lIns="0" tIns="0" rIns="0" bIns="0" rtlCol="0" anchor="ctr"/>
+          <a:lstStyle/>
+          <a:p>
+            <a:pPr marL="0" indent="0">
+              <a:buNone/>
+            </a:pPr>
+            <a:r>
+              <a:rPr lang="en-US" sz="1600" dirty="0">
                 <a:solidFill>
                   <a:srgbClr val="5B6B73"/>
                 </a:solidFill>
@@ -6859,7 +6893,7 @@
               </a:rPr>
               <a:t>Data binding bidireccional en formularios</a:t>
             </a:r>
-            <a:endParaRPr lang="en-US" sz="1100" dirty="0"/>
+            <a:endParaRPr lang="en-US" sz="1600" dirty="0"/>
           </a:p>
         </p:txBody>
       </p:sp>
@@ -6871,7 +6905,7 @@
         </p:nvSpPr>
         <p:spPr>
           <a:xfrm>
-            <a:off x="6355080" y="2103120"/>
+            <a:off x="6928585" y="2271562"/>
             <a:ext cx="4983480" cy="3840480"/>
           </a:xfrm>
           <a:prstGeom prst="roundRect">
@@ -6900,7 +6934,7 @@
         </p:nvSpPr>
         <p:spPr>
           <a:xfrm>
-            <a:off x="6583680" y="2286000"/>
+            <a:off x="7326430" y="2331720"/>
             <a:ext cx="4526280" cy="3520440"/>
           </a:xfrm>
           <a:prstGeom prst="rect">
@@ -7332,7 +7366,7 @@
               <a:buNone/>
             </a:pPr>
             <a:r>
-              <a:rPr lang="en-US" sz="1400" dirty="0">
+              <a:rPr lang="en-US" sz="2000" dirty="0">
                 <a:solidFill>
                   <a:srgbClr val="1E2A33"/>
                 </a:solidFill>
@@ -7342,7 +7376,7 @@
               </a:rPr>
               <a:t>Cada componente vive en un solo archivo .vue con tres bloques bien separados:</a:t>
             </a:r>
-            <a:endParaRPr lang="en-US" sz="1400" dirty="0"/>
+            <a:endParaRPr lang="en-US" sz="2000" dirty="0"/>
           </a:p>
         </p:txBody>
       </p:sp>
@@ -7383,8 +7417,8 @@
         </p:nvSpPr>
         <p:spPr>
           <a:xfrm>
-            <a:off x="822960" y="2240280"/>
-            <a:ext cx="6035040" cy="3657600"/>
+            <a:off x="822960" y="2075688"/>
+            <a:ext cx="6708808" cy="3822192"/>
           </a:xfrm>
           <a:prstGeom prst="rect">
             <a:avLst/>
@@ -7689,7 +7723,7 @@
               <a:buNone/>
             </a:pPr>
             <a:r>
-              <a:rPr lang="en-US" sz="1250" b="1" dirty="0">
+              <a:rPr lang="en-US" b="1" dirty="0">
                 <a:solidFill>
                   <a:srgbClr val="1E2A33"/>
                 </a:solidFill>
@@ -7699,7 +7733,7 @@
               </a:rPr>
               <a:t>&lt;script&gt;</a:t>
             </a:r>
-            <a:endParaRPr lang="en-US" sz="1250" dirty="0"/>
+            <a:endParaRPr lang="en-US" dirty="0"/>
           </a:p>
         </p:txBody>
       </p:sp>
@@ -7728,7 +7762,7 @@
               <a:buNone/>
             </a:pPr>
             <a:r>
-              <a:rPr lang="en-US" sz="1050" dirty="0">
+              <a:rPr lang="en-US" sz="1600" dirty="0">
                 <a:solidFill>
                   <a:srgbClr val="5B6B73"/>
                 </a:solidFill>
@@ -7738,7 +7772,7 @@
               </a:rPr>
               <a:t>Lógica del componente en JavaScript / TypeScript</a:t>
             </a:r>
-            <a:endParaRPr lang="en-US" sz="1050" dirty="0"/>
+            <a:endParaRPr lang="en-US" sz="1600" dirty="0"/>
           </a:p>
         </p:txBody>
       </p:sp>
@@ -7818,7 +7852,7 @@
               <a:buNone/>
             </a:pPr>
             <a:r>
-              <a:rPr lang="en-US" sz="1250" b="1" dirty="0">
+              <a:rPr lang="en-US" b="1" dirty="0">
                 <a:solidFill>
                   <a:srgbClr val="1E2A33"/>
                 </a:solidFill>
@@ -7828,7 +7862,7 @@
               </a:rPr>
               <a:t>&lt;template&gt;</a:t>
             </a:r>
-            <a:endParaRPr lang="en-US" sz="1250" dirty="0"/>
+            <a:endParaRPr lang="en-US" dirty="0"/>
           </a:p>
         </p:txBody>
       </p:sp>
@@ -7840,7 +7874,7 @@
         </p:nvSpPr>
         <p:spPr>
           <a:xfrm>
-            <a:off x="8961120" y="3648456"/>
+            <a:off x="8961120" y="3639312"/>
             <a:ext cx="2788920" cy="640080"/>
           </a:xfrm>
           <a:prstGeom prst="rect">
@@ -7857,7 +7891,7 @@
               <a:buNone/>
             </a:pPr>
             <a:r>
-              <a:rPr lang="en-US" sz="1050" dirty="0">
+              <a:rPr lang="en-US" sz="1600" dirty="0">
                 <a:solidFill>
                   <a:srgbClr val="5B6B73"/>
                 </a:solidFill>
@@ -7867,7 +7901,7 @@
               </a:rPr>
               <a:t>Estructura HTML declarativa, con directivas</a:t>
             </a:r>
-            <a:endParaRPr lang="en-US" sz="1050" dirty="0"/>
+            <a:endParaRPr lang="en-US" sz="1600" dirty="0"/>
           </a:p>
         </p:txBody>
       </p:sp>
@@ -7947,7 +7981,7 @@
               <a:buNone/>
             </a:pPr>
             <a:r>
-              <a:rPr lang="en-US" sz="1250" b="1" dirty="0">
+              <a:rPr lang="en-US" b="1" dirty="0">
                 <a:solidFill>
                   <a:srgbClr val="1E2A33"/>
                 </a:solidFill>
@@ -7957,7 +7991,7 @@
               </a:rPr>
               <a:t>&lt;style scoped&gt;</a:t>
             </a:r>
-            <a:endParaRPr lang="en-US" sz="1250" dirty="0"/>
+            <a:endParaRPr lang="en-US" dirty="0"/>
           </a:p>
         </p:txBody>
       </p:sp>
@@ -7969,7 +8003,7 @@
         </p:nvSpPr>
         <p:spPr>
           <a:xfrm>
-            <a:off x="8961120" y="4837176"/>
+            <a:off x="8961120" y="4818888"/>
             <a:ext cx="2788920" cy="640080"/>
           </a:xfrm>
           <a:prstGeom prst="rect">
@@ -7986,7 +8020,7 @@
               <a:buNone/>
             </a:pPr>
             <a:r>
-              <a:rPr lang="en-US" sz="1050" dirty="0">
+              <a:rPr lang="en-US" sz="1600" dirty="0">
                 <a:solidFill>
                   <a:srgbClr val="5B6B73"/>
                 </a:solidFill>
@@ -7996,7 +8030,7 @@
               </a:rPr>
               <a:t>CSS que aplica solo a este componente</a:t>
             </a:r>
-            <a:endParaRPr lang="en-US" sz="1050" dirty="0"/>
+            <a:endParaRPr lang="en-US" sz="1600" dirty="0"/>
           </a:p>
         </p:txBody>
       </p:sp>
@@ -8158,7 +8192,7 @@
         </p:nvSpPr>
         <p:spPr>
           <a:xfrm>
-            <a:off x="548640" y="658368"/>
+            <a:off x="548640" y="772026"/>
             <a:ext cx="11064240" cy="777240"/>
           </a:xfrm>
           <a:prstGeom prst="rect">
@@ -8214,7 +8248,7 @@
               <a:buNone/>
             </a:pPr>
             <a:r>
-              <a:rPr lang="en-US" sz="1600" b="1" dirty="0">
+              <a:rPr lang="en-US" sz="2000" b="1" dirty="0">
                 <a:solidFill>
                   <a:srgbClr val="6C7A82"/>
                 </a:solidFill>
@@ -8224,7 +8258,7 @@
               </a:rPr>
               <a:t>Options API</a:t>
             </a:r>
-            <a:endParaRPr lang="en-US" sz="1600" dirty="0"/>
+            <a:endParaRPr lang="en-US" sz="2000" dirty="0"/>
           </a:p>
         </p:txBody>
       </p:sp>
@@ -8236,7 +8270,7 @@
         </p:nvSpPr>
         <p:spPr>
           <a:xfrm>
-            <a:off x="548640" y="2029968"/>
+            <a:off x="548640" y="2020824"/>
             <a:ext cx="5212080" cy="274320"/>
           </a:xfrm>
           <a:prstGeom prst="rect">
@@ -8253,7 +8287,7 @@
               <a:buNone/>
             </a:pPr>
             <a:r>
-              <a:rPr lang="en-US" sz="1050" i="1" dirty="0">
+              <a:rPr lang="en-US" sz="1400" i="1" dirty="0">
                 <a:solidFill>
                   <a:srgbClr val="5B6B73"/>
                 </a:solidFill>
@@ -8263,7 +8297,7 @@
               </a:rPr>
               <a:t>Clásico · más simple para empezar</a:t>
             </a:r>
-            <a:endParaRPr lang="en-US" sz="1050" dirty="0"/>
+            <a:endParaRPr lang="en-US" sz="1400" dirty="0"/>
           </a:p>
         </p:txBody>
       </p:sp>
@@ -8479,7 +8513,7 @@
               <a:buNone/>
             </a:pPr>
             <a:r>
-              <a:rPr lang="en-US" sz="1600" b="1" dirty="0">
+              <a:rPr lang="en-US" sz="2000" b="1" dirty="0">
                 <a:solidFill>
                   <a:srgbClr val="2E8B63"/>
                 </a:solidFill>
@@ -8489,7 +8523,7 @@
               </a:rPr>
               <a:t>Composition API</a:t>
             </a:r>
-            <a:endParaRPr lang="en-US" sz="1600" dirty="0"/>
+            <a:endParaRPr lang="en-US" sz="2000" dirty="0"/>
           </a:p>
         </p:txBody>
       </p:sp>
@@ -8518,7 +8552,7 @@
               <a:buNone/>
             </a:pPr>
             <a:r>
-              <a:rPr lang="en-US" sz="1050" i="1" dirty="0">
+              <a:rPr lang="en-US" sz="1400" i="1" dirty="0">
                 <a:solidFill>
                   <a:srgbClr val="5B6B73"/>
                 </a:solidFill>
@@ -8528,7 +8562,7 @@
               </a:rPr>
               <a:t>Moderno · recomendado para apps grandes</a:t>
             </a:r>
-            <a:endParaRPr lang="en-US" sz="1050" dirty="0"/>
+            <a:endParaRPr lang="en-US" sz="1400" dirty="0"/>
           </a:p>
         </p:txBody>
       </p:sp>
@@ -8709,7 +8743,7 @@
               <a:buChar char="•"/>
             </a:pPr>
             <a:r>
-              <a:rPr lang="en-US" sz="1150" dirty="0">
+              <a:rPr lang="en-US" dirty="0">
                 <a:solidFill>
                   <a:srgbClr val="1E2A33"/>
                 </a:solidFill>
@@ -8719,7 +8753,7 @@
               </a:rPr>
               <a:t>Options: agrupa por tipo (data, methods, computed) — más guiado, ideal para equipos nuevos en Vue.</a:t>
             </a:r>
-            <a:endParaRPr lang="en-US" sz="1150" dirty="0"/>
+            <a:endParaRPr lang="en-US" dirty="0"/>
           </a:p>
           <a:p>
             <a:pPr marL="342900" indent="-342900">
@@ -8730,7 +8764,7 @@
               <a:buChar char="•"/>
             </a:pPr>
             <a:r>
-              <a:rPr lang="en-US" sz="1150" dirty="0">
+              <a:rPr lang="en-US" dirty="0">
                 <a:solidFill>
                   <a:srgbClr val="1E2A33"/>
                 </a:solidFill>
@@ -8740,7 +8774,7 @@
               </a:rPr>
               <a:t>Composition: agrupa por lógica relacionada — más flexible, mejor para reutilizar lógica entre componentes (composables) y para TypeScript.</a:t>
             </a:r>
-            <a:endParaRPr lang="en-US" sz="1150" dirty="0"/>
+            <a:endParaRPr lang="en-US" dirty="0"/>
           </a:p>
           <a:p>
             <a:pPr marL="342900" indent="-342900">
@@ -8751,7 +8785,7 @@
               <a:buChar char="•"/>
             </a:pPr>
             <a:r>
-              <a:rPr lang="en-US" sz="1150" dirty="0">
+              <a:rPr lang="en-US" dirty="0">
                 <a:solidFill>
                   <a:srgbClr val="1E2A33"/>
                 </a:solidFill>
@@ -8761,7 +8795,7 @@
               </a:rPr>
               <a:t>Ambas coexisten en Vue 3 y son 100% interoperables en el mismo proyecto.</a:t>
             </a:r>
-            <a:endParaRPr lang="en-US" sz="1150" dirty="0"/>
+            <a:endParaRPr lang="en-US" dirty="0"/>
           </a:p>
         </p:txBody>
       </p:sp>
@@ -9042,7 +9076,7 @@
         </p:nvSpPr>
         <p:spPr>
           <a:xfrm>
-            <a:off x="731520" y="2880360"/>
+            <a:off x="723098" y="2774755"/>
             <a:ext cx="3200400" cy="365760"/>
           </a:xfrm>
           <a:prstGeom prst="rect">
@@ -9059,7 +9093,7 @@
               <a:buNone/>
             </a:pPr>
             <a:r>
-              <a:rPr lang="en-US" sz="1400" b="1" dirty="0">
+              <a:rPr lang="en-US" sz="2000" b="1" dirty="0">
                 <a:solidFill>
                   <a:srgbClr val="1E2A33"/>
                 </a:solidFill>
@@ -9069,7 +9103,7 @@
               </a:rPr>
               <a:t>Props</a:t>
             </a:r>
-            <a:endParaRPr lang="en-US" sz="1400" dirty="0"/>
+            <a:endParaRPr lang="en-US" sz="2000" dirty="0"/>
           </a:p>
         </p:txBody>
       </p:sp>
@@ -9098,7 +9132,7 @@
               <a:buNone/>
             </a:pPr>
             <a:r>
-              <a:rPr lang="en-US" sz="1050" dirty="0">
+              <a:rPr lang="en-US" sz="1600" dirty="0">
                 <a:solidFill>
                   <a:srgbClr val="5B6B73"/>
                 </a:solidFill>
@@ -9108,7 +9142,7 @@
               </a:rPr>
               <a:t>Datos que un componente padre pasa a un hijo. Fluyen en una sola dirección (top-down).</a:t>
             </a:r>
-            <a:endParaRPr lang="en-US" sz="1050" dirty="0"/>
+            <a:endParaRPr lang="en-US" sz="1600" dirty="0"/>
           </a:p>
         </p:txBody>
       </p:sp>
@@ -9200,7 +9234,7 @@
         </p:nvSpPr>
         <p:spPr>
           <a:xfrm>
-            <a:off x="4480560" y="2880360"/>
+            <a:off x="4480560" y="2820331"/>
             <a:ext cx="3200400" cy="365760"/>
           </a:xfrm>
           <a:prstGeom prst="rect">
@@ -9217,7 +9251,7 @@
               <a:buNone/>
             </a:pPr>
             <a:r>
-              <a:rPr lang="en-US" sz="1400" b="1" dirty="0">
+              <a:rPr lang="en-US" sz="2000" b="1" dirty="0" err="1">
                 <a:solidFill>
                   <a:srgbClr val="1E2A33"/>
                 </a:solidFill>
@@ -9225,9 +9259,20 @@
                 <a:ea typeface="Calibri" pitchFamily="34" charset="-122"/>
                 <a:cs typeface="Calibri" pitchFamily="34" charset="-120"/>
               </a:rPr>
-              <a:t>Eventos ($emit)</a:t>
-            </a:r>
-            <a:endParaRPr lang="en-US" sz="1400" dirty="0"/>
+              <a:t>Eventos</a:t>
+            </a:r>
+            <a:r>
+              <a:rPr lang="en-US" sz="2000" b="1" dirty="0">
+                <a:solidFill>
+                  <a:srgbClr val="1E2A33"/>
+                </a:solidFill>
+                <a:latin typeface="Calibri" pitchFamily="34" charset="0"/>
+                <a:ea typeface="Calibri" pitchFamily="34" charset="-122"/>
+                <a:cs typeface="Calibri" pitchFamily="34" charset="-120"/>
+              </a:rPr>
+              <a:t> (emit)</a:t>
+            </a:r>
+            <a:endParaRPr lang="en-US" sz="2000" dirty="0"/>
           </a:p>
         </p:txBody>
       </p:sp>
@@ -9256,7 +9301,7 @@
               <a:buNone/>
             </a:pPr>
             <a:r>
-              <a:rPr lang="en-US" sz="1050" dirty="0">
+              <a:rPr lang="en-US" sz="1600" dirty="0">
                 <a:solidFill>
                   <a:srgbClr val="5B6B73"/>
                 </a:solidFill>
@@ -9266,7 +9311,7 @@
               </a:rPr>
               <a:t>El hijo notifica al padre mediante eventos personalizados — comunicación de abajo hacia arriba.</a:t>
             </a:r>
-            <a:endParaRPr lang="en-US" sz="1050" dirty="0"/>
+            <a:endParaRPr lang="en-US" sz="1600" dirty="0"/>
           </a:p>
         </p:txBody>
       </p:sp>
@@ -9358,7 +9403,7 @@
         </p:nvSpPr>
         <p:spPr>
           <a:xfrm>
-            <a:off x="8229600" y="2880360"/>
+            <a:off x="8229600" y="2834640"/>
             <a:ext cx="3200400" cy="365760"/>
           </a:xfrm>
           <a:prstGeom prst="rect">
@@ -9375,7 +9420,7 @@
               <a:buNone/>
             </a:pPr>
             <a:r>
-              <a:rPr lang="en-US" sz="1400" b="1" dirty="0">
+              <a:rPr lang="en-US" sz="2000" b="1" dirty="0">
                 <a:solidFill>
                   <a:srgbClr val="1E2A33"/>
                 </a:solidFill>
@@ -9385,7 +9430,7 @@
               </a:rPr>
               <a:t>Slots</a:t>
             </a:r>
-            <a:endParaRPr lang="en-US" sz="1400" dirty="0"/>
+            <a:endParaRPr lang="en-US" sz="2000" dirty="0"/>
           </a:p>
         </p:txBody>
       </p:sp>
@@ -9414,7 +9459,7 @@
               <a:buNone/>
             </a:pPr>
             <a:r>
-              <a:rPr lang="en-US" sz="1050" dirty="0">
+              <a:rPr lang="en-US" sz="1600" dirty="0">
                 <a:solidFill>
                   <a:srgbClr val="5B6B73"/>
                 </a:solidFill>
@@ -9424,7 +9469,7 @@
               </a:rPr>
               <a:t>Huecos de contenido que el padre puede rellenar, para componentes reutilizables y flexibles.</a:t>
             </a:r>
-            <a:endParaRPr lang="en-US" sz="1050" dirty="0"/>
+            <a:endParaRPr lang="en-US" sz="1600" dirty="0"/>
           </a:p>
         </p:txBody>
       </p:sp>
@@ -9898,7 +9943,7 @@
               <a:buNone/>
             </a:pPr>
             <a:r>
-              <a:rPr lang="en-US" sz="1350" b="1" dirty="0">
+              <a:rPr lang="en-US" sz="2000" b="1" dirty="0">
                 <a:solidFill>
                   <a:srgbClr val="FFFFFF"/>
                 </a:solidFill>
@@ -9908,7 +9953,7 @@
               </a:rPr>
               <a:t>onMounted</a:t>
             </a:r>
-            <a:endParaRPr lang="en-US" sz="1350" dirty="0"/>
+            <a:endParaRPr lang="en-US" sz="2000" dirty="0"/>
           </a:p>
         </p:txBody>
       </p:sp>
@@ -9937,7 +9982,7 @@
               <a:buNone/>
             </a:pPr>
             <a:r>
-              <a:rPr lang="en-US" sz="1050" dirty="0">
+              <a:rPr lang="en-US" dirty="0">
                 <a:solidFill>
                   <a:srgbClr val="EAF5F0"/>
                 </a:solidFill>
@@ -9947,7 +9992,7 @@
               </a:rPr>
               <a:t>El componente ya está en el DOM. Ideal para pedir datos a una API.</a:t>
             </a:r>
-            <a:endParaRPr lang="en-US" sz="1050" dirty="0"/>
+            <a:endParaRPr lang="en-US" dirty="0"/>
           </a:p>
         </p:txBody>
       </p:sp>
@@ -10056,7 +10101,7 @@
               <a:buNone/>
             </a:pPr>
             <a:r>
-              <a:rPr lang="en-US" sz="1350" b="1" dirty="0">
+              <a:rPr lang="en-US" sz="2000" b="1" dirty="0">
                 <a:solidFill>
                   <a:srgbClr val="1E2A33"/>
                 </a:solidFill>
@@ -10066,7 +10111,7 @@
               </a:rPr>
               <a:t>onUpdated</a:t>
             </a:r>
-            <a:endParaRPr lang="en-US" sz="1350" dirty="0"/>
+            <a:endParaRPr lang="en-US" sz="2000" dirty="0"/>
           </a:p>
         </p:txBody>
       </p:sp>
@@ -10095,7 +10140,7 @@
               <a:buNone/>
             </a:pPr>
             <a:r>
-              <a:rPr lang="en-US" sz="1050" dirty="0">
+              <a:rPr lang="en-US" dirty="0">
                 <a:solidFill>
                   <a:srgbClr val="5B6B73"/>
                 </a:solidFill>
@@ -10105,7 +10150,7 @@
               </a:rPr>
               <a:t>Se ejecuta después de que el DOM se actualiza por un cambio reactivo.</a:t>
             </a:r>
-            <a:endParaRPr lang="en-US" sz="1050" dirty="0"/>
+            <a:endParaRPr lang="en-US" dirty="0"/>
           </a:p>
         </p:txBody>
       </p:sp>
@@ -10197,7 +10242,7 @@
         </p:nvSpPr>
         <p:spPr>
           <a:xfrm>
-            <a:off x="7909560" y="3154680"/>
+            <a:off x="7955280" y="3148938"/>
             <a:ext cx="3108960" cy="365760"/>
           </a:xfrm>
           <a:prstGeom prst="rect">
@@ -10214,7 +10259,7 @@
               <a:buNone/>
             </a:pPr>
             <a:r>
-              <a:rPr lang="en-US" sz="1350" b="1" dirty="0">
+              <a:rPr lang="en-US" sz="2000" b="1" dirty="0">
                 <a:solidFill>
                   <a:srgbClr val="1E2A33"/>
                 </a:solidFill>
@@ -10224,7 +10269,7 @@
               </a:rPr>
               <a:t>onUnmounted</a:t>
             </a:r>
-            <a:endParaRPr lang="en-US" sz="1350" dirty="0"/>
+            <a:endParaRPr lang="en-US" sz="2000" dirty="0"/>
           </a:p>
         </p:txBody>
       </p:sp>
@@ -10253,7 +10298,7 @@
               <a:buNone/>
             </a:pPr>
             <a:r>
-              <a:rPr lang="en-US" sz="1050" dirty="0">
+              <a:rPr lang="en-US" dirty="0">
                 <a:solidFill>
                   <a:srgbClr val="5B6B73"/>
                 </a:solidFill>
@@ -10263,7 +10308,7 @@
               </a:rPr>
               <a:t>El componente se elimina del DOM. Momento de limpiar listeners o timers.</a:t>
             </a:r>
-            <a:endParaRPr lang="en-US" sz="1050" dirty="0"/>
+            <a:endParaRPr lang="en-US" dirty="0"/>
           </a:p>
         </p:txBody>
       </p:sp>
@@ -10323,8 +10368,8 @@
         </p:nvSpPr>
         <p:spPr>
           <a:xfrm>
-            <a:off x="548640" y="4892040"/>
-            <a:ext cx="11064240" cy="1325880"/>
+            <a:off x="429127" y="4892040"/>
+            <a:ext cx="11634536" cy="1325880"/>
           </a:xfrm>
           <a:prstGeom prst="roundRect">
             <a:avLst>
@@ -10352,24 +10397,24 @@
         </p:nvSpPr>
         <p:spPr>
           <a:xfrm>
-            <a:off x="822960" y="5074920"/>
-            <a:ext cx="10515600" cy="914400"/>
-          </a:xfrm>
-          <a:prstGeom prst="rect">
-            <a:avLst/>
-          </a:prstGeom>
-          <a:noFill/>
-          <a:ln/>
-        </p:spPr>
-        <p:txBody>
-          <a:bodyPr wrap="square" lIns="0" tIns="0" rIns="0" bIns="0" rtlCol="0" anchor="ctr"/>
-          <a:lstStyle/>
-          <a:p>
-            <a:pPr marL="0" indent="0">
-              <a:buNone/>
-            </a:pPr>
-            <a:r>
-              <a:rPr lang="en-US" sz="1250" dirty="0">
+            <a:off x="484071" y="5074920"/>
+            <a:ext cx="11634536" cy="914400"/>
+          </a:xfrm>
+          <a:prstGeom prst="rect">
+            <a:avLst/>
+          </a:prstGeom>
+          <a:noFill/>
+          <a:ln/>
+        </p:spPr>
+        <p:txBody>
+          <a:bodyPr wrap="square" lIns="0" tIns="0" rIns="0" bIns="0" rtlCol="0" anchor="ctr"/>
+          <a:lstStyle/>
+          <a:p>
+            <a:pPr marL="0" indent="0">
+              <a:buNone/>
+            </a:pPr>
+            <a:r>
+              <a:rPr lang="en-US" sz="1600" dirty="0">
                 <a:solidFill>
                   <a:srgbClr val="42B883"/>
                 </a:solidFill>
@@ -10377,9 +10422,9 @@
                 <a:ea typeface="Courier New" pitchFamily="34" charset="-122"/>
                 <a:cs typeface="Courier New" pitchFamily="34" charset="-120"/>
               </a:rPr>
-              <a:t>onMounted(() =&gt; { fetch('/api/productos').then(r =&gt; r.json()).then(d =&gt; productos.value = d) })</a:t>
-            </a:r>
-            <a:endParaRPr lang="en-US" sz="1250" dirty="0"/>
+              <a:t>onMounted(() =&gt; { fetch('/api/productos').then(r =&gt; r.json()).then(d =&gt; productos.value = d)})</a:t>
+            </a:r>
+            <a:endParaRPr lang="en-US" sz="1600" dirty="0"/>
           </a:p>
         </p:txBody>
       </p:sp>
@@ -10648,7 +10693,7 @@
               <a:buNone/>
             </a:pPr>
             <a:r>
-              <a:rPr lang="en-US" sz="1550" dirty="0">
+              <a:rPr lang="en-US" dirty="0">
                 <a:solidFill>
                   <a:srgbClr val="1E2A33"/>
                 </a:solidFill>
@@ -10658,7 +10703,7 @@
               </a:rPr>
               <a:t>Vue 3 fue reescrito íntegramente en TypeScript. Esto habilita:</a:t>
             </a:r>
-            <a:endParaRPr lang="en-US" sz="1550" dirty="0"/>
+            <a:endParaRPr lang="en-US" dirty="0"/>
           </a:p>
         </p:txBody>
       </p:sp>
@@ -10691,7 +10736,7 @@
               <a:buChar char="•"/>
             </a:pPr>
             <a:r>
-              <a:rPr lang="en-US" sz="1350" dirty="0">
+              <a:rPr lang="en-US" dirty="0">
                 <a:solidFill>
                   <a:srgbClr val="1E2A33"/>
                 </a:solidFill>
@@ -10701,7 +10746,7 @@
               </a:rPr>
               <a:t>Autocompletado e inferencia de tipos en templates y props.</a:t>
             </a:r>
-            <a:endParaRPr lang="en-US" sz="1350" dirty="0"/>
+            <a:endParaRPr lang="en-US" dirty="0"/>
           </a:p>
           <a:p>
             <a:pPr marL="342900" indent="-342900">
@@ -10712,7 +10757,7 @@
               <a:buChar char="•"/>
             </a:pPr>
             <a:r>
-              <a:rPr lang="en-US" sz="1350" dirty="0">
+              <a:rPr lang="en-US" dirty="0">
                 <a:solidFill>
                   <a:srgbClr val="1E2A33"/>
                 </a:solidFill>
@@ -10722,7 +10767,7 @@
               </a:rPr>
               <a:t>Errores detectados en tiempo de compilación, no en producción.</a:t>
             </a:r>
-            <a:endParaRPr lang="en-US" sz="1350" dirty="0"/>
+            <a:endParaRPr lang="en-US" dirty="0"/>
           </a:p>
           <a:p>
             <a:pPr marL="342900" indent="-342900">
@@ -10733,7 +10778,7 @@
               <a:buChar char="•"/>
             </a:pPr>
             <a:r>
-              <a:rPr lang="en-US" sz="1350" dirty="0">
+              <a:rPr lang="en-US" dirty="0">
                 <a:solidFill>
                   <a:srgbClr val="1E2A33"/>
                 </a:solidFill>
@@ -10743,7 +10788,7 @@
               </a:rPr>
               <a:t>defineProps&lt;{ nombre: string }&gt;() con tipado genérico en &lt;script setup&gt;.</a:t>
             </a:r>
-            <a:endParaRPr lang="en-US" sz="1350" dirty="0"/>
+            <a:endParaRPr lang="en-US" dirty="0"/>
           </a:p>
           <a:p>
             <a:pPr marL="342900" indent="-342900">
@@ -10754,7 +10799,7 @@
               <a:buChar char="•"/>
             </a:pPr>
             <a:r>
-              <a:rPr lang="en-US" sz="1350" dirty="0">
+              <a:rPr lang="en-US" dirty="0">
                 <a:solidFill>
                   <a:srgbClr val="1E2A33"/>
                 </a:solidFill>
@@ -10764,7 +10809,7 @@
               </a:rPr>
               <a:t>Integración oficial vía Volar (extensión de VS Code).</a:t>
             </a:r>
-            <a:endParaRPr lang="en-US" sz="1350" dirty="0"/>
+            <a:endParaRPr lang="en-US" dirty="0"/>
           </a:p>
         </p:txBody>
       </p:sp>
@@ -10805,7 +10850,7 @@
         </p:nvSpPr>
         <p:spPr>
           <a:xfrm>
-            <a:off x="822960" y="5074920"/>
+            <a:off x="734728" y="5097780"/>
             <a:ext cx="10515600" cy="914400"/>
           </a:xfrm>
           <a:prstGeom prst="rect">
@@ -10822,7 +10867,7 @@
               <a:buNone/>
             </a:pPr>
             <a:r>
-              <a:rPr lang="en-US" sz="1300" dirty="0">
+              <a:rPr lang="en-US" dirty="0">
                 <a:solidFill>
                   <a:srgbClr val="D7E4E1"/>
                 </a:solidFill>
@@ -10832,7 +10877,7 @@
               </a:rPr>
               <a:t>const props = defineProps&lt;{ nombre: string; precio: number }&gt;()</a:t>
             </a:r>
-            <a:endParaRPr lang="en-US" sz="1300" dirty="0"/>
+            <a:endParaRPr lang="en-US" dirty="0"/>
           </a:p>
         </p:txBody>
       </p:sp>
@@ -11031,7 +11076,7 @@
                 <a:ea typeface="Calibri" pitchFamily="34" charset="-122"/>
                 <a:cs typeface="Calibri" pitchFamily="34" charset="-120"/>
               </a:rPr>
-              <a:t>BLOQUE 3 · MARCO</a:t>
+              <a:t>BLOQUE 3 ·</a:t>
             </a:r>
             <a:endParaRPr lang="en-US" sz="1500" dirty="0"/>
           </a:p>
@@ -11101,7 +11146,7 @@
               <a:buNone/>
             </a:pPr>
             <a:r>
-              <a:rPr lang="en-US" sz="1600" dirty="0">
+              <a:rPr lang="en-US" dirty="0">
                 <a:solidFill>
                   <a:srgbClr val="C9D6D3"/>
                 </a:solidFill>
@@ -11111,7 +11156,7 @@
               </a:rPr>
               <a:t>Las herramientas oficiales que rodean a Vue, y las novedades de rendimiento de Vue 3.6 en 2026.</a:t>
             </a:r>
-            <a:endParaRPr lang="en-US" sz="1600" dirty="0"/>
+            <a:endParaRPr lang="en-US" dirty="0"/>
           </a:p>
         </p:txBody>
       </p:sp>
@@ -11329,7 +11374,7 @@
               <a:buNone/>
             </a:pPr>
             <a:r>
-              <a:rPr lang="en-US" sz="1350" dirty="0">
+              <a:rPr lang="en-US" sz="2000" dirty="0">
                 <a:solidFill>
                   <a:srgbClr val="1E2A33"/>
                 </a:solidFill>
@@ -11339,7 +11384,7 @@
               </a:rPr>
               <a:t>A diferencia de React, Vue mantiene librerías oficiales para las necesidades más comunes — menos decisiones, menos fatiga:</a:t>
             </a:r>
-            <a:endParaRPr lang="en-US" sz="1350" dirty="0"/>
+            <a:endParaRPr lang="en-US" sz="2000" dirty="0"/>
           </a:p>
         </p:txBody>
       </p:sp>
@@ -11436,7 +11481,7 @@
         </p:nvSpPr>
         <p:spPr>
           <a:xfrm>
-            <a:off x="640080" y="3566160"/>
+            <a:off x="594360" y="3514905"/>
             <a:ext cx="2331720" cy="365760"/>
           </a:xfrm>
           <a:prstGeom prst="rect">
@@ -11453,7 +11498,7 @@
               <a:buNone/>
             </a:pPr>
             <a:r>
-              <a:rPr lang="en-US" sz="1350" b="1" dirty="0">
+              <a:rPr lang="en-US" sz="2000" b="1" dirty="0">
                 <a:solidFill>
                   <a:srgbClr val="1E2A33"/>
                 </a:solidFill>
@@ -11463,7 +11508,7 @@
               </a:rPr>
               <a:t>Vite</a:t>
             </a:r>
-            <a:endParaRPr lang="en-US" sz="1350" dirty="0"/>
+            <a:endParaRPr lang="en-US" sz="2000" dirty="0"/>
           </a:p>
         </p:txBody>
       </p:sp>
@@ -11492,7 +11537,7 @@
               <a:buNone/>
             </a:pPr>
             <a:r>
-              <a:rPr lang="en-US" sz="1050" dirty="0">
+              <a:rPr lang="en-US" dirty="0">
                 <a:solidFill>
                   <a:srgbClr val="5B6B73"/>
                 </a:solidFill>
@@ -11502,7 +11547,7 @@
               </a:rPr>
               <a:t>Build tool y dev server ultrarrápido (HMR casi instantáneo).</a:t>
             </a:r>
-            <a:endParaRPr lang="en-US" sz="1050" dirty="0"/>
+            <a:endParaRPr lang="en-US" dirty="0"/>
           </a:p>
         </p:txBody>
       </p:sp>
@@ -11616,7 +11661,7 @@
               <a:buNone/>
             </a:pPr>
             <a:r>
-              <a:rPr lang="en-US" sz="1350" b="1" dirty="0">
+              <a:rPr lang="en-US" sz="2000" b="1" dirty="0">
                 <a:solidFill>
                   <a:srgbClr val="1E2A33"/>
                 </a:solidFill>
@@ -11626,7 +11671,7 @@
               </a:rPr>
               <a:t>Pinia</a:t>
             </a:r>
-            <a:endParaRPr lang="en-US" sz="1350" dirty="0"/>
+            <a:endParaRPr lang="en-US" sz="2000" dirty="0"/>
           </a:p>
         </p:txBody>
       </p:sp>
@@ -11655,7 +11700,7 @@
               <a:buNone/>
             </a:pPr>
             <a:r>
-              <a:rPr lang="en-US" sz="1050" dirty="0">
+              <a:rPr lang="en-US" dirty="0">
                 <a:solidFill>
                   <a:srgbClr val="5B6B73"/>
                 </a:solidFill>
@@ -11665,7 +11710,7 @@
               </a:rPr>
               <a:t>Manejo de estado global, oficial desde Vue 3 (sucesor de Vuex).</a:t>
             </a:r>
-            <a:endParaRPr lang="en-US" sz="1050" dirty="0"/>
+            <a:endParaRPr lang="en-US" dirty="0"/>
           </a:p>
         </p:txBody>
       </p:sp>
@@ -11779,7 +11824,7 @@
               <a:buNone/>
             </a:pPr>
             <a:r>
-              <a:rPr lang="en-US" sz="1350" b="1" dirty="0">
+              <a:rPr lang="en-US" sz="2000" b="1" dirty="0">
                 <a:solidFill>
                   <a:srgbClr val="1E2A33"/>
                 </a:solidFill>
@@ -11789,7 +11834,7 @@
               </a:rPr>
               <a:t>Nuxt.js</a:t>
             </a:r>
-            <a:endParaRPr lang="en-US" sz="1350" dirty="0"/>
+            <a:endParaRPr lang="en-US" sz="2000" dirty="0"/>
           </a:p>
         </p:txBody>
       </p:sp>
@@ -11818,7 +11863,7 @@
               <a:buNone/>
             </a:pPr>
             <a:r>
-              <a:rPr lang="en-US" sz="1050" dirty="0">
+              <a:rPr lang="en-US" dirty="0">
                 <a:solidFill>
                   <a:srgbClr val="5B6B73"/>
                 </a:solidFill>
@@ -11828,7 +11873,7 @@
               </a:rPr>
               <a:t>Meta-framework: SSR, SSG y generación de rutas automática.</a:t>
             </a:r>
-            <a:endParaRPr lang="en-US" sz="1050" dirty="0"/>
+            <a:endParaRPr lang="en-US" dirty="0"/>
           </a:p>
         </p:txBody>
       </p:sp>
@@ -11925,7 +11970,7 @@
         </p:nvSpPr>
         <p:spPr>
           <a:xfrm>
-            <a:off x="8732520" y="3566160"/>
+            <a:off x="8732520" y="3601693"/>
             <a:ext cx="2331720" cy="365760"/>
           </a:xfrm>
           <a:prstGeom prst="rect">
@@ -11942,7 +11987,7 @@
               <a:buNone/>
             </a:pPr>
             <a:r>
-              <a:rPr lang="en-US" sz="1350" b="1" dirty="0">
+              <a:rPr lang="en-US" sz="2000" b="1" dirty="0">
                 <a:solidFill>
                   <a:srgbClr val="1E2A33"/>
                 </a:solidFill>
@@ -11952,7 +11997,7 @@
               </a:rPr>
               <a:t>Vue Router</a:t>
             </a:r>
-            <a:endParaRPr lang="en-US" sz="1350" dirty="0"/>
+            <a:endParaRPr lang="en-US" sz="2000" dirty="0"/>
           </a:p>
         </p:txBody>
       </p:sp>
@@ -11981,7 +12026,7 @@
               <a:buNone/>
             </a:pPr>
             <a:r>
-              <a:rPr lang="en-US" sz="1050" dirty="0">
+              <a:rPr lang="en-US" dirty="0">
                 <a:solidFill>
                   <a:srgbClr val="5B6B73"/>
                 </a:solidFill>
@@ -11991,7 +12036,7 @@
               </a:rPr>
               <a:t>Ruteo oficial para aplicaciones de una sola página (SPA).</a:t>
             </a:r>
-            <a:endParaRPr lang="en-US" sz="1050" dirty="0"/>
+            <a:endParaRPr lang="en-US" dirty="0"/>
           </a:p>
         </p:txBody>
       </p:sp>
@@ -12299,7 +12344,7 @@
               <a:buNone/>
             </a:pPr>
             <a:r>
-              <a:rPr lang="en-US" sz="1700" b="1" dirty="0">
+              <a:rPr lang="en-US" sz="2000" b="1" dirty="0">
                 <a:solidFill>
                   <a:srgbClr val="1E2A33"/>
                 </a:solidFill>
@@ -12309,7 +12354,7 @@
               </a:rPr>
               <a:t>Fundamentos y contexto</a:t>
             </a:r>
-            <a:endParaRPr lang="en-US" sz="1700" dirty="0"/>
+            <a:endParaRPr lang="en-US" sz="2000" dirty="0"/>
           </a:p>
         </p:txBody>
       </p:sp>
@@ -12322,23 +12367,23 @@
         <p:spPr>
           <a:xfrm>
             <a:off x="2423160" y="2075688"/>
-            <a:ext cx="5943600" cy="594360"/>
-          </a:xfrm>
-          <a:prstGeom prst="rect">
-            <a:avLst/>
-          </a:prstGeom>
-          <a:noFill/>
-          <a:ln/>
-        </p:spPr>
-        <p:txBody>
-          <a:bodyPr wrap="square" lIns="0" tIns="0" rIns="0" bIns="0" rtlCol="0" anchor="ctr"/>
-          <a:lstStyle/>
-          <a:p>
-            <a:pPr marL="0" indent="0">
-              <a:buNone/>
-            </a:pPr>
-            <a:r>
-              <a:rPr lang="en-US" sz="1150" dirty="0">
+            <a:ext cx="7988166" cy="594360"/>
+          </a:xfrm>
+          <a:prstGeom prst="rect">
+            <a:avLst/>
+          </a:prstGeom>
+          <a:noFill/>
+          <a:ln/>
+        </p:spPr>
+        <p:txBody>
+          <a:bodyPr wrap="square" lIns="0" tIns="0" rIns="0" bIns="0" rtlCol="0" anchor="ctr"/>
+          <a:lstStyle/>
+          <a:p>
+            <a:pPr marL="0" indent="0">
+              <a:buNone/>
+            </a:pPr>
+            <a:r>
+              <a:rPr lang="en-US" dirty="0">
                 <a:solidFill>
                   <a:srgbClr val="5B6B73"/>
                 </a:solidFill>
@@ -12348,7 +12393,7 @@
               </a:rPr>
               <a:t>Qué es Vue, historia, filosofía "progressive framework" y objetivo de la PoC.</a:t>
             </a:r>
-            <a:endParaRPr lang="en-US" sz="1150" dirty="0"/>
+            <a:endParaRPr lang="en-US" dirty="0"/>
           </a:p>
         </p:txBody>
       </p:sp>
@@ -12467,7 +12512,7 @@
               <a:buNone/>
             </a:pPr>
             <a:r>
-              <a:rPr lang="en-US" sz="1700" b="1" dirty="0">
+              <a:rPr lang="en-US" sz="2000" b="1" dirty="0">
                 <a:solidFill>
                   <a:srgbClr val="1E2A33"/>
                 </a:solidFill>
@@ -12477,7 +12522,7 @@
               </a:rPr>
               <a:t>Arquitectura técnica</a:t>
             </a:r>
-            <a:endParaRPr lang="en-US" sz="1700" dirty="0"/>
+            <a:endParaRPr lang="en-US" sz="2000" dirty="0"/>
           </a:p>
         </p:txBody>
       </p:sp>
@@ -12490,23 +12535,23 @@
         <p:spPr>
           <a:xfrm>
             <a:off x="2423160" y="3246120"/>
-            <a:ext cx="5943600" cy="594360"/>
-          </a:xfrm>
-          <a:prstGeom prst="rect">
-            <a:avLst/>
-          </a:prstGeom>
-          <a:noFill/>
-          <a:ln/>
-        </p:spPr>
-        <p:txBody>
-          <a:bodyPr wrap="square" lIns="0" tIns="0" rIns="0" bIns="0" rtlCol="0" anchor="ctr"/>
-          <a:lstStyle/>
-          <a:p>
-            <a:pPr marL="0" indent="0">
-              <a:buNone/>
-            </a:pPr>
-            <a:r>
-              <a:rPr lang="en-US" sz="1150" dirty="0">
+            <a:ext cx="8549640" cy="594360"/>
+          </a:xfrm>
+          <a:prstGeom prst="rect">
+            <a:avLst/>
+          </a:prstGeom>
+          <a:noFill/>
+          <a:ln/>
+        </p:spPr>
+        <p:txBody>
+          <a:bodyPr wrap="square" lIns="0" tIns="0" rIns="0" bIns="0" rtlCol="0" anchor="ctr"/>
+          <a:lstStyle/>
+          <a:p>
+            <a:pPr marL="0" indent="0">
+              <a:buNone/>
+            </a:pPr>
+            <a:r>
+              <a:rPr lang="en-US" dirty="0">
                 <a:solidFill>
                   <a:srgbClr val="5B6B73"/>
                 </a:solidFill>
@@ -12514,9 +12559,20 @@
                 <a:ea typeface="Calibri" pitchFamily="34" charset="-122"/>
                 <a:cs typeface="Calibri" pitchFamily="34" charset="-120"/>
               </a:rPr>
-              <a:t>Reactividad, sintaxis de templates, componentes, Options vs Composition API.</a:t>
-            </a:r>
-            <a:endParaRPr lang="en-US" sz="1150" dirty="0"/>
+              <a:t>Reactividad, sintaxis de templates, componentes, Options vs Composition API</a:t>
+            </a:r>
+            <a:r>
+              <a:rPr lang="en-US" sz="2000" dirty="0">
+                <a:solidFill>
+                  <a:srgbClr val="5B6B73"/>
+                </a:solidFill>
+                <a:latin typeface="Calibri" pitchFamily="34" charset="0"/>
+                <a:ea typeface="Calibri" pitchFamily="34" charset="-122"/>
+                <a:cs typeface="Calibri" pitchFamily="34" charset="-120"/>
+              </a:rPr>
+              <a:t>.</a:t>
+            </a:r>
+            <a:endParaRPr lang="en-US" sz="2000" dirty="0"/>
           </a:p>
         </p:txBody>
       </p:sp>
@@ -12635,7 +12691,7 @@
               <a:buNone/>
             </a:pPr>
             <a:r>
-              <a:rPr lang="en-US" sz="1700" b="1" dirty="0">
+              <a:rPr lang="en-US" sz="2000" b="1" dirty="0">
                 <a:solidFill>
                   <a:srgbClr val="1E2A33"/>
                 </a:solidFill>
@@ -12645,7 +12701,7 @@
               </a:rPr>
               <a:t>Ecosistema y rendimiento</a:t>
             </a:r>
-            <a:endParaRPr lang="en-US" sz="1700" dirty="0"/>
+            <a:endParaRPr lang="en-US" sz="2000" dirty="0"/>
           </a:p>
         </p:txBody>
       </p:sp>
@@ -12657,24 +12713,24 @@
         </p:nvSpPr>
         <p:spPr>
           <a:xfrm>
-            <a:off x="2423160" y="4416552"/>
-            <a:ext cx="5943600" cy="594360"/>
-          </a:xfrm>
-          <a:prstGeom prst="rect">
-            <a:avLst/>
-          </a:prstGeom>
-          <a:noFill/>
-          <a:ln/>
-        </p:spPr>
-        <p:txBody>
-          <a:bodyPr wrap="square" lIns="0" tIns="0" rIns="0" bIns="0" rtlCol="0" anchor="ctr"/>
-          <a:lstStyle/>
-          <a:p>
-            <a:pPr marL="0" indent="0">
-              <a:buNone/>
-            </a:pPr>
-            <a:r>
-              <a:rPr lang="en-US" sz="1150" dirty="0">
+            <a:off x="2423159" y="4416552"/>
+            <a:ext cx="7153977" cy="594360"/>
+          </a:xfrm>
+          <a:prstGeom prst="rect">
+            <a:avLst/>
+          </a:prstGeom>
+          <a:noFill/>
+          <a:ln/>
+        </p:spPr>
+        <p:txBody>
+          <a:bodyPr wrap="square" lIns="0" tIns="0" rIns="0" bIns="0" rtlCol="0" anchor="ctr"/>
+          <a:lstStyle/>
+          <a:p>
+            <a:pPr marL="0" indent="0">
+              <a:buNone/>
+            </a:pPr>
+            <a:r>
+              <a:rPr lang="en-US" dirty="0">
                 <a:solidFill>
                   <a:srgbClr val="5B6B73"/>
                 </a:solidFill>
@@ -12684,7 +12740,7 @@
               </a:rPr>
               <a:t>Vite, Pinia, Nuxt, y las novedades de rendimiento de Vue 3.6 (Vapor Mode).</a:t>
             </a:r>
-            <a:endParaRPr lang="en-US" sz="1150" dirty="0"/>
+            <a:endParaRPr lang="en-US" dirty="0"/>
           </a:p>
         </p:txBody>
       </p:sp>
@@ -12803,7 +12859,7 @@
               <a:buNone/>
             </a:pPr>
             <a:r>
-              <a:rPr lang="en-US" sz="1700" b="1" dirty="0">
+              <a:rPr lang="en-US" sz="2000" b="1" dirty="0">
                 <a:solidFill>
                   <a:srgbClr val="1E2A33"/>
                 </a:solidFill>
@@ -12813,7 +12869,7 @@
               </a:rPr>
               <a:t>Vue vs React, adopción y demo</a:t>
             </a:r>
-            <a:endParaRPr lang="en-US" sz="1700" dirty="0"/>
+            <a:endParaRPr lang="en-US" sz="2000" dirty="0"/>
           </a:p>
         </p:txBody>
       </p:sp>
@@ -12826,23 +12882,23 @@
         <p:spPr>
           <a:xfrm>
             <a:off x="2423160" y="5586984"/>
-            <a:ext cx="5943600" cy="594360"/>
-          </a:xfrm>
-          <a:prstGeom prst="rect">
-            <a:avLst/>
-          </a:prstGeom>
-          <a:noFill/>
-          <a:ln/>
-        </p:spPr>
-        <p:txBody>
-          <a:bodyPr wrap="square" lIns="0" tIns="0" rIns="0" bIns="0" rtlCol="0" anchor="ctr"/>
-          <a:lstStyle/>
-          <a:p>
-            <a:pPr marL="0" indent="0">
-              <a:buNone/>
-            </a:pPr>
-            <a:r>
-              <a:rPr lang="en-US" sz="1150" dirty="0">
+            <a:ext cx="7226166" cy="594360"/>
+          </a:xfrm>
+          <a:prstGeom prst="rect">
+            <a:avLst/>
+          </a:prstGeom>
+          <a:noFill/>
+          <a:ln/>
+        </p:spPr>
+        <p:txBody>
+          <a:bodyPr wrap="square" lIns="0" tIns="0" rIns="0" bIns="0" rtlCol="0" anchor="ctr"/>
+          <a:lstStyle/>
+          <a:p>
+            <a:pPr marL="0" indent="0">
+              <a:buNone/>
+            </a:pPr>
+            <a:r>
+              <a:rPr lang="en-US" dirty="0">
                 <a:solidFill>
                   <a:srgbClr val="5B6B73"/>
                 </a:solidFill>
@@ -12852,7 +12908,7 @@
               </a:rPr>
               <a:t>Comparación directa, casos reales, mercado laboral, demo y conclusiones.</a:t>
             </a:r>
-            <a:endParaRPr lang="en-US" sz="1150" dirty="0"/>
+            <a:endParaRPr lang="en-US" dirty="0"/>
           </a:p>
         </p:txBody>
       </p:sp>
@@ -13081,8 +13137,8 @@
         </p:nvSpPr>
         <p:spPr>
           <a:xfrm>
-            <a:off x="1188720" y="2286000"/>
-            <a:ext cx="1463040" cy="1463040"/>
+            <a:off x="907983" y="2894076"/>
+            <a:ext cx="1738963" cy="1769364"/>
           </a:xfrm>
           <a:prstGeom prst="ellipse">
             <a:avLst/>
@@ -13116,8 +13172,8 @@
         </p:blipFill>
         <p:spPr>
           <a:xfrm>
-            <a:off x="1393546" y="2490826"/>
-            <a:ext cx="1053389" cy="1053389"/>
+            <a:off x="1199980" y="3246120"/>
+            <a:ext cx="1149129" cy="1149129"/>
           </a:xfrm>
           <a:prstGeom prst="rect">
             <a:avLst/>
@@ -13149,7 +13205,7 @@
               <a:buNone/>
             </a:pPr>
             <a:r>
-              <a:rPr lang="en-US" sz="1350" b="1" dirty="0">
+              <a:rPr lang="en-US" sz="2000" b="1" dirty="0">
                 <a:solidFill>
                   <a:srgbClr val="2E8B63"/>
                 </a:solidFill>
@@ -13159,7 +13215,7 @@
               </a:rPr>
               <a:t>Arranque instantáneo</a:t>
             </a:r>
-            <a:endParaRPr lang="en-US" sz="1350" dirty="0"/>
+            <a:endParaRPr lang="en-US" sz="2000" dirty="0"/>
           </a:p>
         </p:txBody>
       </p:sp>
@@ -13188,7 +13244,7 @@
               <a:buNone/>
             </a:pPr>
             <a:r>
-              <a:rPr lang="en-US" sz="1100" dirty="0">
+              <a:rPr lang="en-US" dirty="0">
                 <a:solidFill>
                   <a:srgbClr val="5B6B73"/>
                 </a:solidFill>
@@ -13198,7 +13254,7 @@
               </a:rPr>
               <a:t>Sirve los módulos nativos ES del navegador — no empaqueta todo antes de arrancar.</a:t>
             </a:r>
-            <a:endParaRPr lang="en-US" sz="1100" dirty="0"/>
+            <a:endParaRPr lang="en-US" dirty="0"/>
           </a:p>
         </p:txBody>
       </p:sp>
@@ -13210,7 +13266,7 @@
         </p:nvSpPr>
         <p:spPr>
           <a:xfrm>
-            <a:off x="3200400" y="2880360"/>
+            <a:off x="3200400" y="2926080"/>
             <a:ext cx="7955280" cy="320040"/>
           </a:xfrm>
           <a:prstGeom prst="rect">
@@ -13227,7 +13283,7 @@
               <a:buNone/>
             </a:pPr>
             <a:r>
-              <a:rPr lang="en-US" sz="1350" b="1" dirty="0">
+              <a:rPr lang="en-US" sz="2000" b="1" dirty="0">
                 <a:solidFill>
                   <a:srgbClr val="2E8B63"/>
                 </a:solidFill>
@@ -13237,7 +13293,7 @@
               </a:rPr>
               <a:t>Hot Module Replacement</a:t>
             </a:r>
-            <a:endParaRPr lang="en-US" sz="1350" dirty="0"/>
+            <a:endParaRPr lang="en-US" sz="2000" dirty="0"/>
           </a:p>
         </p:txBody>
       </p:sp>
@@ -13266,6 +13322,17 @@
               <a:buNone/>
             </a:pPr>
             <a:r>
+              <a:rPr lang="en-US" dirty="0">
+                <a:solidFill>
+                  <a:srgbClr val="5B6B73"/>
+                </a:solidFill>
+                <a:latin typeface="Calibri" pitchFamily="34" charset="0"/>
+                <a:ea typeface="Calibri" pitchFamily="34" charset="-122"/>
+                <a:cs typeface="Calibri" pitchFamily="34" charset="-120"/>
+              </a:rPr>
+              <a:t>Los cambios se reflejan en el navegador en milisegundos, sin perder el estado</a:t>
+            </a:r>
+            <a:r>
               <a:rPr lang="en-US" sz="1100" dirty="0">
                 <a:solidFill>
                   <a:srgbClr val="5B6B73"/>
@@ -13274,7 +13341,7 @@
                 <a:ea typeface="Calibri" pitchFamily="34" charset="-122"/>
                 <a:cs typeface="Calibri" pitchFamily="34" charset="-120"/>
               </a:rPr>
-              <a:t>Los cambios se reflejan en el navegador en milisegundos, sin perder el estado.</a:t>
+              <a:t>.</a:t>
             </a:r>
             <a:endParaRPr lang="en-US" sz="1100" dirty="0"/>
           </a:p>
@@ -13305,7 +13372,7 @@
               <a:buNone/>
             </a:pPr>
             <a:r>
-              <a:rPr lang="en-US" sz="1350" b="1" dirty="0">
+              <a:rPr lang="en-US" sz="2000" b="1" dirty="0">
                 <a:solidFill>
                   <a:srgbClr val="2E8B63"/>
                 </a:solidFill>
@@ -13315,7 +13382,7 @@
               </a:rPr>
               <a:t>Build de producción con Rollup</a:t>
             </a:r>
-            <a:endParaRPr lang="en-US" sz="1350" dirty="0"/>
+            <a:endParaRPr lang="en-US" sz="2000" dirty="0"/>
           </a:p>
         </p:txBody>
       </p:sp>
@@ -13344,7 +13411,7 @@
               <a:buNone/>
             </a:pPr>
             <a:r>
-              <a:rPr lang="en-US" sz="1100" dirty="0">
+              <a:rPr lang="en-US" dirty="0">
                 <a:solidFill>
                   <a:srgbClr val="5B6B73"/>
                 </a:solidFill>
@@ -13354,7 +13421,7 @@
               </a:rPr>
               <a:t>Empaquetado optimizado y con tree-shaking para el deploy final.</a:t>
             </a:r>
-            <a:endParaRPr lang="en-US" sz="1100" dirty="0"/>
+            <a:endParaRPr lang="en-US" dirty="0"/>
           </a:p>
         </p:txBody>
       </p:sp>
@@ -13366,7 +13433,7 @@
         </p:nvSpPr>
         <p:spPr>
           <a:xfrm>
-            <a:off x="3200400" y="4800600"/>
+            <a:off x="3200400" y="4805172"/>
             <a:ext cx="7955280" cy="320040"/>
           </a:xfrm>
           <a:prstGeom prst="rect">
@@ -13383,7 +13450,7 @@
               <a:buNone/>
             </a:pPr>
             <a:r>
-              <a:rPr lang="en-US" sz="1350" b="1" dirty="0">
+              <a:rPr lang="en-US" sz="2000" b="1" dirty="0">
                 <a:solidFill>
                   <a:srgbClr val="2E8B63"/>
                 </a:solidFill>
@@ -13393,7 +13460,7 @@
               </a:rPr>
               <a:t>No es exclusivo de Vue</a:t>
             </a:r>
-            <a:endParaRPr lang="en-US" sz="1350" dirty="0"/>
+            <a:endParaRPr lang="en-US" sz="2000" dirty="0"/>
           </a:p>
         </p:txBody>
       </p:sp>
@@ -13422,6 +13489,17 @@
               <a:buNone/>
             </a:pPr>
             <a:r>
+              <a:rPr lang="en-US" dirty="0">
+                <a:solidFill>
+                  <a:srgbClr val="5B6B73"/>
+                </a:solidFill>
+                <a:latin typeface="Calibri" pitchFamily="34" charset="0"/>
+                <a:ea typeface="Calibri" pitchFamily="34" charset="-122"/>
+                <a:cs typeface="Calibri" pitchFamily="34" charset="-120"/>
+              </a:rPr>
+              <a:t>También sirve para React, Svelte y proyectos vanilla — creado por Evan You</a:t>
+            </a:r>
+            <a:r>
               <a:rPr lang="en-US" sz="1100" dirty="0">
                 <a:solidFill>
                   <a:srgbClr val="5B6B73"/>
@@ -13430,7 +13508,7 @@
                 <a:ea typeface="Calibri" pitchFamily="34" charset="-122"/>
                 <a:cs typeface="Calibri" pitchFamily="34" charset="-120"/>
               </a:rPr>
-              <a:t>También sirve para React, Svelte y proyectos vanilla — creado por Evan You.</a:t>
+              <a:t>.</a:t>
             </a:r>
             <a:endParaRPr lang="en-US" sz="1100" dirty="0"/>
           </a:p>
@@ -13650,7 +13728,7 @@
               <a:buNone/>
             </a:pPr>
             <a:r>
-              <a:rPr lang="en-US" sz="1400" dirty="0">
+              <a:rPr lang="en-US" sz="2000" dirty="0">
                 <a:solidFill>
                   <a:srgbClr val="1E2A33"/>
                 </a:solidFill>
@@ -13660,7 +13738,7 @@
               </a:rPr>
               <a:t>El equivalente de Vue a Next.js (React): un meta-framework que agrega renderizado en servidor, rutas automáticas y estructura de proyecto.</a:t>
             </a:r>
-            <a:endParaRPr lang="en-US" sz="1400" dirty="0"/>
+            <a:endParaRPr lang="en-US" sz="2000" dirty="0"/>
           </a:p>
         </p:txBody>
       </p:sp>
@@ -13769,7 +13847,7 @@
               <a:buNone/>
             </a:pPr>
             <a:r>
-              <a:rPr lang="en-US" sz="1300" b="1" dirty="0">
+              <a:rPr lang="en-US" sz="2000" b="1" dirty="0">
                 <a:solidFill>
                   <a:srgbClr val="1E2A33"/>
                 </a:solidFill>
@@ -13779,7 +13857,7 @@
               </a:rPr>
               <a:t>SSR</a:t>
             </a:r>
-            <a:endParaRPr lang="en-US" sz="1300" dirty="0"/>
+            <a:endParaRPr lang="en-US" sz="2000" dirty="0"/>
           </a:p>
         </p:txBody>
       </p:sp>
@@ -13808,7 +13886,7 @@
               <a:buNone/>
             </a:pPr>
             <a:r>
-              <a:rPr lang="en-US" sz="1000" dirty="0">
+              <a:rPr lang="en-US" dirty="0">
                 <a:solidFill>
                   <a:srgbClr val="5B6B73"/>
                 </a:solidFill>
@@ -13818,7 +13896,7 @@
               </a:rPr>
               <a:t>Renderiza en el servidor en cada request: mejor SEO y carga inicial percibida.</a:t>
             </a:r>
-            <a:endParaRPr lang="en-US" sz="1000" dirty="0"/>
+            <a:endParaRPr lang="en-US" dirty="0"/>
           </a:p>
         </p:txBody>
       </p:sp>
@@ -13927,7 +14005,7 @@
               <a:buNone/>
             </a:pPr>
             <a:r>
-              <a:rPr lang="en-US" sz="1300" b="1" dirty="0">
+              <a:rPr lang="en-US" sz="2000" b="1" dirty="0">
                 <a:solidFill>
                   <a:srgbClr val="1E2A33"/>
                 </a:solidFill>
@@ -13937,7 +14015,7 @@
               </a:rPr>
               <a:t>SSG</a:t>
             </a:r>
-            <a:endParaRPr lang="en-US" sz="1300" dirty="0"/>
+            <a:endParaRPr lang="en-US" sz="2000" dirty="0"/>
           </a:p>
         </p:txBody>
       </p:sp>
@@ -13966,7 +14044,7 @@
               <a:buNone/>
             </a:pPr>
             <a:r>
-              <a:rPr lang="en-US" sz="1000" dirty="0">
+              <a:rPr lang="en-US" dirty="0">
                 <a:solidFill>
                   <a:srgbClr val="5B6B73"/>
                 </a:solidFill>
@@ -13976,7 +14054,7 @@
               </a:rPr>
               <a:t>Genera HTML estático en build time para sitios de contenido.</a:t>
             </a:r>
-            <a:endParaRPr lang="en-US" sz="1000" dirty="0"/>
+            <a:endParaRPr lang="en-US" dirty="0"/>
           </a:p>
         </p:txBody>
       </p:sp>
@@ -14085,6 +14163,17 @@
               <a:buNone/>
             </a:pPr>
             <a:r>
+              <a:rPr lang="en-US" sz="2000" b="1" dirty="0">
+                <a:solidFill>
+                  <a:srgbClr val="1E2A33"/>
+                </a:solidFill>
+                <a:latin typeface="Calibri" pitchFamily="34" charset="0"/>
+                <a:ea typeface="Calibri" pitchFamily="34" charset="-122"/>
+                <a:cs typeface="Calibri" pitchFamily="34" charset="-120"/>
+              </a:rPr>
+              <a:t>File-based</a:t>
+            </a:r>
+            <a:r>
               <a:rPr lang="en-US" sz="1300" b="1" dirty="0">
                 <a:solidFill>
                   <a:srgbClr val="1E2A33"/>
@@ -14093,7 +14182,7 @@
                 <a:ea typeface="Calibri" pitchFamily="34" charset="-122"/>
                 <a:cs typeface="Calibri" pitchFamily="34" charset="-120"/>
               </a:rPr>
-              <a:t>File-based routing</a:t>
+              <a:t> routing</a:t>
             </a:r>
             <a:endParaRPr lang="en-US" sz="1300" dirty="0"/>
           </a:p>
@@ -14124,6 +14213,17 @@
               <a:buNone/>
             </a:pPr>
             <a:r>
+              <a:rPr lang="en-US" dirty="0">
+                <a:solidFill>
+                  <a:srgbClr val="5B6B73"/>
+                </a:solidFill>
+                <a:latin typeface="Calibri" pitchFamily="34" charset="0"/>
+                <a:ea typeface="Calibri" pitchFamily="34" charset="-122"/>
+                <a:cs typeface="Calibri" pitchFamily="34" charset="-120"/>
+              </a:rPr>
+              <a:t>La estructura de carpetas define las rutas automáticamente</a:t>
+            </a:r>
+            <a:r>
               <a:rPr lang="en-US" sz="1000" dirty="0">
                 <a:solidFill>
                   <a:srgbClr val="5B6B73"/>
@@ -14132,7 +14232,7 @@
                 <a:ea typeface="Calibri" pitchFamily="34" charset="-122"/>
                 <a:cs typeface="Calibri" pitchFamily="34" charset="-120"/>
               </a:rPr>
-              <a:t>La estructura de carpetas define las rutas automáticamente.</a:t>
+              <a:t>.</a:t>
             </a:r>
             <a:endParaRPr lang="en-US" sz="1000" dirty="0"/>
           </a:p>
@@ -14216,7 +14316,7 @@
               <a:buNone/>
             </a:pPr>
             <a:r>
-              <a:rPr lang="en-US" sz="1200" dirty="0">
+              <a:rPr lang="en-US" dirty="0">
                 <a:solidFill>
                   <a:srgbClr val="D7E4E1"/>
                 </a:solidFill>
@@ -14226,7 +14326,7 @@
               </a:rPr>
               <a:t>Next.js (React) y Nuxt.js (Vue) resuelven el mismo problema con filosofías de configuración muy similares — es la comparación más directa entre ambos ecosistemas.</a:t>
             </a:r>
-            <a:endParaRPr lang="en-US" sz="1200" dirty="0"/>
+            <a:endParaRPr lang="en-US" dirty="0"/>
           </a:p>
         </p:txBody>
       </p:sp>
@@ -14524,7 +14624,7 @@
               <a:buNone/>
             </a:pPr>
             <a:r>
-              <a:rPr lang="en-US" sz="1200" b="1" dirty="0">
+              <a:rPr lang="en-US" sz="2000" b="1" dirty="0">
                 <a:solidFill>
                   <a:srgbClr val="1E2A33"/>
                 </a:solidFill>
@@ -14534,7 +14634,7 @@
               </a:rPr>
               <a:t>1. Cambia el estado</a:t>
             </a:r>
-            <a:endParaRPr lang="en-US" sz="1200" dirty="0"/>
+            <a:endParaRPr lang="en-US" sz="2000" dirty="0"/>
           </a:p>
         </p:txBody>
       </p:sp>
@@ -14563,7 +14663,7 @@
               <a:buNone/>
             </a:pPr>
             <a:r>
-              <a:rPr lang="en-US" sz="1000" dirty="0">
+              <a:rPr lang="en-US" dirty="0">
                 <a:solidFill>
                   <a:srgbClr val="5B6B73"/>
                 </a:solidFill>
@@ -14573,7 +14673,7 @@
               </a:rPr>
               <a:t>Un ref o reactive es modificado por el código de la app.</a:t>
             </a:r>
-            <a:endParaRPr lang="en-US" sz="1000" dirty="0"/>
+            <a:endParaRPr lang="en-US" dirty="0"/>
           </a:p>
         </p:txBody>
       </p:sp>
@@ -14665,8 +14765,8 @@
         </p:nvSpPr>
         <p:spPr>
           <a:xfrm>
-            <a:off x="3337560" y="3200400"/>
-            <a:ext cx="2286000" cy="502920"/>
+            <a:off x="3337560" y="3291840"/>
+            <a:ext cx="2286000" cy="411480"/>
           </a:xfrm>
           <a:prstGeom prst="rect">
             <a:avLst/>
@@ -14682,7 +14782,7 @@
               <a:buNone/>
             </a:pPr>
             <a:r>
-              <a:rPr lang="en-US" sz="1200" b="1" dirty="0">
+              <a:rPr lang="en-US" sz="2000" b="1" dirty="0">
                 <a:solidFill>
                   <a:srgbClr val="1E2A33"/>
                 </a:solidFill>
@@ -14692,7 +14792,7 @@
               </a:rPr>
               <a:t>2. Se genera un Virtual DOM</a:t>
             </a:r>
-            <a:endParaRPr lang="en-US" sz="1200" dirty="0"/>
+            <a:endParaRPr lang="en-US" sz="2000" dirty="0"/>
           </a:p>
         </p:txBody>
       </p:sp>
@@ -14721,7 +14821,7 @@
               <a:buNone/>
             </a:pPr>
             <a:r>
-              <a:rPr lang="en-US" sz="1000" dirty="0">
+              <a:rPr lang="en-US" dirty="0">
                 <a:solidFill>
                   <a:srgbClr val="5B6B73"/>
                 </a:solidFill>
@@ -14731,7 +14831,7 @@
               </a:rPr>
               <a:t>Una representación en memoria, liviana, del nuevo árbol de UI.</a:t>
             </a:r>
-            <a:endParaRPr lang="en-US" sz="1000" dirty="0"/>
+            <a:endParaRPr lang="en-US" dirty="0"/>
           </a:p>
         </p:txBody>
       </p:sp>
@@ -14840,7 +14940,7 @@
               <a:buNone/>
             </a:pPr>
             <a:r>
-              <a:rPr lang="en-US" sz="1200" b="1" dirty="0">
+              <a:rPr lang="en-US" sz="2000" b="1" dirty="0">
                 <a:solidFill>
                   <a:srgbClr val="1E2A33"/>
                 </a:solidFill>
@@ -14850,7 +14950,7 @@
               </a:rPr>
               <a:t>3. Diffing</a:t>
             </a:r>
-            <a:endParaRPr lang="en-US" sz="1200" dirty="0"/>
+            <a:endParaRPr lang="en-US" sz="2000" dirty="0"/>
           </a:p>
         </p:txBody>
       </p:sp>
@@ -14879,7 +14979,7 @@
               <a:buNone/>
             </a:pPr>
             <a:r>
-              <a:rPr lang="en-US" sz="1000" dirty="0">
+              <a:rPr lang="en-US" dirty="0">
                 <a:solidFill>
                   <a:srgbClr val="5B6B73"/>
                 </a:solidFill>
@@ -14889,7 +14989,7 @@
               </a:rPr>
               <a:t>Vue compara el nuevo Virtual DOM contra el anterior para encontrar diferencias.</a:t>
             </a:r>
-            <a:endParaRPr lang="en-US" sz="1000" dirty="0"/>
+            <a:endParaRPr lang="en-US" dirty="0"/>
           </a:p>
         </p:txBody>
       </p:sp>
@@ -14981,7 +15081,7 @@
         </p:nvSpPr>
         <p:spPr>
           <a:xfrm>
-            <a:off x="8732520" y="3200400"/>
+            <a:off x="8732520" y="3264825"/>
             <a:ext cx="2286000" cy="502920"/>
           </a:xfrm>
           <a:prstGeom prst="rect">
@@ -14998,7 +15098,7 @@
               <a:buNone/>
             </a:pPr>
             <a:r>
-              <a:rPr lang="en-US" sz="1200" b="1" dirty="0">
+              <a:rPr lang="en-US" sz="2000" b="1" dirty="0">
                 <a:solidFill>
                   <a:srgbClr val="1E2A33"/>
                 </a:solidFill>
@@ -15008,7 +15108,7 @@
               </a:rPr>
               <a:t>4. Patch al DOM real</a:t>
             </a:r>
-            <a:endParaRPr lang="en-US" sz="1200" dirty="0"/>
+            <a:endParaRPr lang="en-US" sz="2000" dirty="0"/>
           </a:p>
         </p:txBody>
       </p:sp>
@@ -15037,7 +15137,7 @@
               <a:buNone/>
             </a:pPr>
             <a:r>
-              <a:rPr lang="en-US" sz="1000" dirty="0">
+              <a:rPr lang="en-US" dirty="0">
                 <a:solidFill>
                   <a:srgbClr val="5B6B73"/>
                 </a:solidFill>
@@ -15047,7 +15147,7 @@
               </a:rPr>
               <a:t>Solo se aplican al DOM real los cambios mínimos necesarios.</a:t>
             </a:r>
-            <a:endParaRPr lang="en-US" sz="1000" dirty="0"/>
+            <a:endParaRPr lang="en-US" dirty="0"/>
           </a:p>
         </p:txBody>
       </p:sp>
@@ -15131,24 +15231,24 @@
         </p:nvSpPr>
         <p:spPr>
           <a:xfrm>
-            <a:off x="548640" y="5257800"/>
-            <a:ext cx="11064240" cy="548640"/>
-          </a:xfrm>
-          <a:prstGeom prst="rect">
-            <a:avLst/>
-          </a:prstGeom>
-          <a:noFill/>
-          <a:ln/>
-        </p:spPr>
-        <p:txBody>
-          <a:bodyPr wrap="square" lIns="0" tIns="0" rIns="0" bIns="0" rtlCol="0" anchor="ctr"/>
-          <a:lstStyle/>
-          <a:p>
-            <a:pPr marL="0" indent="0">
-              <a:buNone/>
-            </a:pPr>
-            <a:r>
-              <a:rPr lang="en-US" sz="1200" i="1" dirty="0">
+            <a:off x="374431" y="5283884"/>
+            <a:ext cx="11442834" cy="548640"/>
+          </a:xfrm>
+          <a:prstGeom prst="rect">
+            <a:avLst/>
+          </a:prstGeom>
+          <a:noFill/>
+          <a:ln/>
+        </p:spPr>
+        <p:txBody>
+          <a:bodyPr wrap="square" lIns="0" tIns="0" rIns="0" bIns="0" rtlCol="0" anchor="ctr"/>
+          <a:lstStyle/>
+          <a:p>
+            <a:pPr marL="0" indent="0">
+              <a:buNone/>
+            </a:pPr>
+            <a:r>
+              <a:rPr lang="en-US" sz="1600" i="1" dirty="0">
                 <a:solidFill>
                   <a:srgbClr val="5B6B73"/>
                 </a:solidFill>
@@ -15158,7 +15258,7 @@
               </a:rPr>
               <a:t>Vue optimiza este proceso con "compiler hints": en tiempo de build, marca qué partes del template son estáticas para saltarlas en el diffing.</a:t>
             </a:r>
-            <a:endParaRPr lang="en-US" sz="1200" dirty="0"/>
+            <a:endParaRPr lang="en-US" sz="1600" dirty="0"/>
           </a:p>
         </p:txBody>
       </p:sp>
@@ -15405,7 +15505,7 @@
               <a:buNone/>
             </a:pPr>
             <a:r>
-              <a:rPr lang="en-US" sz="1400" dirty="0">
+              <a:rPr lang="en-US" dirty="0">
                 <a:solidFill>
                   <a:srgbClr val="C9D6D3"/>
                 </a:solidFill>
@@ -15415,7 +15515,7 @@
               </a:rPr>
               <a:t>Un modo de compilación opcional que elimina por completo el Virtual DOM: el compilador genera código que crea y actualiza el DOM real de forma directa.</a:t>
             </a:r>
-            <a:endParaRPr lang="en-US" sz="1400" dirty="0"/>
+            <a:endParaRPr lang="en-US" dirty="0"/>
           </a:p>
         </p:txBody>
       </p:sp>
@@ -15517,7 +15617,7 @@
               <a:buNone/>
             </a:pPr>
             <a:r>
-              <a:rPr lang="en-US" sz="1100" dirty="0">
+              <a:rPr lang="en-US" dirty="0">
                 <a:solidFill>
                   <a:srgbClr val="D7E4E1"/>
                 </a:solidFill>
@@ -15527,7 +15627,7 @@
               </a:rPr>
               <a:t>3x más rápido en montar componentes vs Vue 3.5</a:t>
             </a:r>
-            <a:endParaRPr lang="en-US" sz="1100" dirty="0"/>
+            <a:endParaRPr lang="en-US" dirty="0"/>
           </a:p>
         </p:txBody>
       </p:sp>
@@ -15629,7 +15729,7 @@
               <a:buNone/>
             </a:pPr>
             <a:r>
-              <a:rPr lang="en-US" sz="1100" dirty="0">
+              <a:rPr lang="en-US" dirty="0">
                 <a:solidFill>
                   <a:srgbClr val="D7E4E1"/>
                 </a:solidFill>
@@ -15639,7 +15739,7 @@
               </a:rPr>
               <a:t>de bundle base — 37% más liviano</a:t>
             </a:r>
-            <a:endParaRPr lang="en-US" sz="1100" dirty="0"/>
+            <a:endParaRPr lang="en-US" dirty="0"/>
           </a:p>
         </p:txBody>
       </p:sp>
@@ -15741,7 +15841,7 @@
               <a:buNone/>
             </a:pPr>
             <a:r>
-              <a:rPr lang="en-US" sz="1100" dirty="0">
+              <a:rPr lang="en-US" dirty="0">
                 <a:solidFill>
                   <a:srgbClr val="D7E4E1"/>
                 </a:solidFill>
@@ -15751,7 +15851,7 @@
               </a:rPr>
               <a:t>de memoria usada por cada ref reactiva</a:t>
             </a:r>
-            <a:endParaRPr lang="en-US" sz="1100" dirty="0"/>
+            <a:endParaRPr lang="en-US" dirty="0"/>
           </a:p>
         </p:txBody>
       </p:sp>
@@ -15780,7 +15880,7 @@
               <a:buNone/>
             </a:pPr>
             <a:r>
-              <a:rPr lang="en-US" sz="1300" i="1" dirty="0">
+              <a:rPr lang="en-US" sz="2000" i="1" dirty="0">
                 <a:solidFill>
                   <a:srgbClr val="E8B339"/>
                 </a:solidFill>
@@ -15790,7 +15890,7 @@
               </a:rPr>
               <a:t>"Sin creación de VDOM, sin diffing, sin patching: el cambio de estado dispara exactamente una mutación del DOM."</a:t>
             </a:r>
-            <a:endParaRPr lang="en-US" sz="1300" dirty="0"/>
+            <a:endParaRPr lang="en-US" sz="2000" dirty="0"/>
           </a:p>
         </p:txBody>
       </p:sp>
@@ -15819,7 +15919,7 @@
               <a:buNone/>
             </a:pPr>
             <a:r>
-              <a:rPr lang="en-US" sz="1150" dirty="0">
+              <a:rPr lang="en-US" sz="1600" dirty="0">
                 <a:solidFill>
                   <a:srgbClr val="8FA3A0"/>
                 </a:solidFill>
@@ -15829,7 +15929,7 @@
               </a:rPr>
               <a:t>Estado: en beta durante 2026 — el equipo de Vue recomienda experimentar mientras se estabiliza para producción. Alcanza paridad de rendimiento con Solid.js y Svelte 5.</a:t>
             </a:r>
-            <a:endParaRPr lang="en-US" sz="1150" dirty="0"/>
+            <a:endParaRPr lang="en-US" sz="1600" dirty="0"/>
           </a:p>
         </p:txBody>
       </p:sp>
@@ -16030,7 +16130,7 @@
         </p:nvSpPr>
         <p:spPr>
           <a:xfrm>
-            <a:off x="548640" y="1600200"/>
+            <a:off x="548640" y="1517904"/>
             <a:ext cx="10972800" cy="548640"/>
           </a:xfrm>
           <a:prstGeom prst="rect">
@@ -16047,7 +16147,7 @@
               <a:buNone/>
             </a:pPr>
             <a:r>
-              <a:rPr lang="en-US" sz="1500" dirty="0">
+              <a:rPr lang="en-US" sz="2000" dirty="0">
                 <a:solidFill>
                   <a:srgbClr val="1E2A33"/>
                 </a:solidFill>
@@ -16057,7 +16157,7 @@
               </a:rPr>
               <a:t>Vue 3.6 introduce un algoritmo de reactividad "push-pull" que reduce el trabajo de recomputar valores derivados.</a:t>
             </a:r>
-            <a:endParaRPr lang="en-US" sz="1500" dirty="0"/>
+            <a:endParaRPr lang="en-US" sz="2000" dirty="0"/>
           </a:p>
         </p:txBody>
       </p:sp>
@@ -16166,7 +16266,7 @@
               <a:buNone/>
             </a:pPr>
             <a:r>
-              <a:rPr lang="en-US" sz="1450" b="1" dirty="0">
+              <a:rPr lang="en-US" sz="2000" b="1" dirty="0">
                 <a:solidFill>
                   <a:srgbClr val="1E2A33"/>
                 </a:solidFill>
@@ -16176,7 +16276,7 @@
               </a:rPr>
               <a:t>Fase Push</a:t>
             </a:r>
-            <a:endParaRPr lang="en-US" sz="1450" dirty="0"/>
+            <a:endParaRPr lang="en-US" sz="2000" dirty="0"/>
           </a:p>
         </p:txBody>
       </p:sp>
@@ -16205,7 +16305,7 @@
               <a:buNone/>
             </a:pPr>
             <a:r>
-              <a:rPr lang="en-US" sz="1100" dirty="0">
+              <a:rPr lang="en-US" dirty="0">
                 <a:solidFill>
                   <a:srgbClr val="5B6B73"/>
                 </a:solidFill>
@@ -16215,7 +16315,7 @@
               </a:rPr>
               <a:t>Cuando el estado cambia, Vue solo propaga una marca de "sucio" (dirty flag) — barato, sin recalcular nada todavía.</a:t>
             </a:r>
-            <a:endParaRPr lang="en-US" sz="1100" dirty="0"/>
+            <a:endParaRPr lang="en-US" dirty="0"/>
           </a:p>
         </p:txBody>
       </p:sp>
@@ -16324,7 +16424,7 @@
               <a:buNone/>
             </a:pPr>
             <a:r>
-              <a:rPr lang="en-US" sz="1450" b="1" dirty="0">
+              <a:rPr lang="en-US" sz="2000" b="1" dirty="0">
                 <a:solidFill>
                   <a:srgbClr val="1E2A33"/>
                 </a:solidFill>
@@ -16334,7 +16434,7 @@
               </a:rPr>
               <a:t>Fase Pull</a:t>
             </a:r>
-            <a:endParaRPr lang="en-US" sz="1450" dirty="0"/>
+            <a:endParaRPr lang="en-US" sz="2000" dirty="0"/>
           </a:p>
         </p:txBody>
       </p:sp>
@@ -16346,7 +16446,7 @@
         </p:nvSpPr>
         <p:spPr>
           <a:xfrm>
-            <a:off x="7680960" y="2907792"/>
+            <a:off x="7681562" y="2807208"/>
             <a:ext cx="3749040" cy="1325880"/>
           </a:xfrm>
           <a:prstGeom prst="rect">
@@ -16363,7 +16463,7 @@
               <a:buNone/>
             </a:pPr>
             <a:r>
-              <a:rPr lang="en-US" sz="1100" dirty="0">
+              <a:rPr lang="en-US" dirty="0">
                 <a:solidFill>
                   <a:srgbClr val="5B6B73"/>
                 </a:solidFill>
@@ -16373,7 +16473,7 @@
               </a:rPr>
               <a:t>El valor recién se recalcula cuando efectivamente se lee, evitando recomputar cosas que nadie usó.</a:t>
             </a:r>
-            <a:endParaRPr lang="en-US" sz="1100" dirty="0"/>
+            <a:endParaRPr lang="en-US" dirty="0"/>
           </a:p>
         </p:txBody>
       </p:sp>
@@ -16431,6 +16531,17 @@
               <a:buNone/>
             </a:pPr>
             <a:r>
+              <a:rPr lang="en-US" sz="1600" dirty="0">
+                <a:solidFill>
+                  <a:srgbClr val="42B883"/>
+                </a:solidFill>
+                <a:latin typeface="Calibri" pitchFamily="34" charset="0"/>
+                <a:ea typeface="Calibri" pitchFamily="34" charset="-122"/>
+                <a:cs typeface="Calibri" pitchFamily="34" charset="-120"/>
+              </a:rPr>
+              <a:t>Resultado medido: aproximadamente 20% de mejora en el rendimiento de propiedades computed frente al motor de reactividad anterior</a:t>
+            </a:r>
+            <a:r>
               <a:rPr lang="en-US" sz="1350" dirty="0">
                 <a:solidFill>
                   <a:srgbClr val="42B883"/>
@@ -16439,7 +16550,7 @@
                 <a:ea typeface="Calibri" pitchFamily="34" charset="-122"/>
                 <a:cs typeface="Calibri" pitchFamily="34" charset="-120"/>
               </a:rPr>
-              <a:t>Resultado medido: aproximadamente 20% de mejora en el rendimiento de propiedades computed frente al motor de reactividad anterior.</a:t>
+              <a:t>.</a:t>
             </a:r>
             <a:endParaRPr lang="en-US" sz="1350" dirty="0"/>
           </a:p>
@@ -16659,7 +16770,7 @@
               <a:buNone/>
             </a:pPr>
             <a:r>
-              <a:rPr lang="en-US" sz="1350" dirty="0">
+              <a:rPr lang="en-US" sz="2000" dirty="0">
                 <a:solidFill>
                   <a:srgbClr val="1E2A33"/>
                 </a:solidFill>
@@ -16669,7 +16780,7 @@
               </a:rPr>
               <a:t>Un framework más liviano reduce el tiempo de carga inicial, clave en conexiones lentas o dispositivos de gama baja.</a:t>
             </a:r>
-            <a:endParaRPr lang="en-US" sz="1350" dirty="0"/>
+            <a:endParaRPr lang="en-US" sz="2000" dirty="0"/>
           </a:p>
         </p:txBody>
       </p:sp>
@@ -16677,11 +16788,17 @@
         <p:nvGraphicFramePr>
           <p:cNvPr id="5" name="Chart 0"/>
           <p:cNvGraphicFramePr/>
-          <p:nvPr/>
+          <p:nvPr>
+            <p:extLst>
+              <p:ext uri="{D42A27DB-BD31-4B8C-83A1-F6EECF244321}">
+                <p14:modId xmlns:p14="http://schemas.microsoft.com/office/powerpoint/2010/main" val="4013446073"/>
+              </p:ext>
+            </p:extLst>
+          </p:nvPr>
         </p:nvGraphicFramePr>
         <p:xfrm>
           <a:off x="548640" y="2148840"/>
-          <a:ext cx="6766560" cy="3931920"/>
+          <a:ext cx="7159592" cy="4219876"/>
         </p:xfrm>
         <a:graphic>
           <a:graphicData uri="http://schemas.openxmlformats.org/drawingml/2006/chart">
@@ -16743,7 +16860,7 @@
               <a:buNone/>
             </a:pPr>
             <a:r>
-              <a:rPr lang="en-US" sz="1200" dirty="0">
+              <a:rPr lang="en-US" sz="1600" dirty="0">
                 <a:solidFill>
                   <a:srgbClr val="1E2A33"/>
                 </a:solidFill>
@@ -16753,7 +16870,7 @@
               </a:rPr>
               <a:t>Con tree-shaking agresivo y buenas prácticas, React reduce esta diferencia en producción — pero Vue parte con ventaja "out of the box".</a:t>
             </a:r>
-            <a:endParaRPr lang="en-US" sz="1200" dirty="0"/>
+            <a:endParaRPr lang="en-US" sz="1600" dirty="0"/>
           </a:p>
         </p:txBody>
       </p:sp>
@@ -16782,7 +16899,7 @@
               <a:buNone/>
             </a:pPr>
             <a:r>
-              <a:rPr lang="en-US" sz="950" i="1" dirty="0">
+              <a:rPr lang="en-US" sz="1600" i="1" dirty="0">
                 <a:solidFill>
                   <a:srgbClr val="5B6B73"/>
                 </a:solidFill>
@@ -16792,7 +16909,7 @@
               </a:rPr>
               <a:t>Cifras aproximadas y orientativas, según cobertura técnica de la beta de Vue 3.6 (2026). No sustituyen una medición propia.</a:t>
             </a:r>
-            <a:endParaRPr lang="en-US" sz="950" dirty="0"/>
+            <a:endParaRPr lang="en-US" sz="1600" dirty="0"/>
           </a:p>
         </p:txBody>
       </p:sp>
@@ -16991,7 +17108,7 @@
                 <a:ea typeface="Calibri" pitchFamily="34" charset="-122"/>
                 <a:cs typeface="Calibri" pitchFamily="34" charset="-120"/>
               </a:rPr>
-              <a:t>BLOQUE 4 · VICTORIA</a:t>
+              <a:t>BLOQUE 4 · </a:t>
             </a:r>
             <a:endParaRPr lang="en-US" sz="1500" dirty="0"/>
           </a:p>
@@ -17061,7 +17178,7 @@
               <a:buNone/>
             </a:pPr>
             <a:r>
-              <a:rPr lang="en-US" sz="1600" dirty="0">
+              <a:rPr lang="en-US" dirty="0">
                 <a:solidFill>
                   <a:srgbClr val="C9D6D3"/>
                 </a:solidFill>
@@ -17071,7 +17188,7 @@
               </a:rPr>
               <a:t>Adopción real, mercado laboral, nuestra demostración técnica y las conclusiones de la PoC.</a:t>
             </a:r>
-            <a:endParaRPr lang="en-US" sz="1600" dirty="0"/>
+            <a:endParaRPr lang="en-US" dirty="0"/>
           </a:p>
         </p:txBody>
       </p:sp>
@@ -17292,7 +17409,7 @@
           <a:bodyPr/>
           <a:lstStyle/>
           <a:p>
-            <a:endParaRPr lang="es-AR"/>
+            <a:endParaRPr lang="es-AR" sz="2000"/>
           </a:p>
         </p:txBody>
       </p:sp>
@@ -17321,7 +17438,7 @@
               <a:buNone/>
             </a:pPr>
             <a:r>
-              <a:rPr lang="en-US" sz="1300" b="1" dirty="0">
+              <a:rPr lang="en-US" sz="2000" b="1" dirty="0">
                 <a:solidFill>
                   <a:srgbClr val="FFFFFF"/>
                 </a:solidFill>
@@ -17331,7 +17448,7 @@
               </a:rPr>
               <a:t>Criterio</a:t>
             </a:r>
-            <a:endParaRPr lang="en-US" sz="1300" dirty="0"/>
+            <a:endParaRPr lang="en-US" sz="2000" dirty="0"/>
           </a:p>
         </p:txBody>
       </p:sp>
@@ -17363,7 +17480,7 @@
           <a:bodyPr/>
           <a:lstStyle/>
           <a:p>
-            <a:endParaRPr lang="es-AR"/>
+            <a:endParaRPr lang="es-AR" sz="2000"/>
           </a:p>
         </p:txBody>
       </p:sp>
@@ -17392,7 +17509,7 @@
               <a:buNone/>
             </a:pPr>
             <a:r>
-              <a:rPr lang="en-US" sz="1300" b="1" dirty="0">
+              <a:rPr lang="en-US" sz="2000" b="1" dirty="0">
                 <a:solidFill>
                   <a:srgbClr val="FFFFFF"/>
                 </a:solidFill>
@@ -17402,7 +17519,7 @@
               </a:rPr>
               <a:t>Vue.js</a:t>
             </a:r>
-            <a:endParaRPr lang="en-US" sz="1300" dirty="0"/>
+            <a:endParaRPr lang="en-US" sz="2000" dirty="0"/>
           </a:p>
         </p:txBody>
       </p:sp>
@@ -17434,7 +17551,7 @@
           <a:bodyPr/>
           <a:lstStyle/>
           <a:p>
-            <a:endParaRPr lang="es-AR"/>
+            <a:endParaRPr lang="es-AR" sz="2000"/>
           </a:p>
         </p:txBody>
       </p:sp>
@@ -17463,7 +17580,7 @@
               <a:buNone/>
             </a:pPr>
             <a:r>
-              <a:rPr lang="en-US" sz="1300" b="1" dirty="0">
+              <a:rPr lang="en-US" sz="2000" b="1" dirty="0">
                 <a:solidFill>
                   <a:srgbClr val="FFFFFF"/>
                 </a:solidFill>
@@ -17473,7 +17590,7 @@
               </a:rPr>
               <a:t>React</a:t>
             </a:r>
-            <a:endParaRPr lang="en-US" sz="1300" dirty="0"/>
+            <a:endParaRPr lang="en-US" sz="2000" dirty="0"/>
           </a:p>
         </p:txBody>
       </p:sp>
@@ -17505,7 +17622,7 @@
           <a:bodyPr/>
           <a:lstStyle/>
           <a:p>
-            <a:endParaRPr lang="es-AR"/>
+            <a:endParaRPr lang="es-AR" sz="1600"/>
           </a:p>
         </p:txBody>
       </p:sp>
@@ -17534,7 +17651,7 @@
               <a:buNone/>
             </a:pPr>
             <a:r>
-              <a:rPr lang="en-US" sz="1050" b="1" dirty="0">
+              <a:rPr lang="en-US" sz="1600" b="1" dirty="0">
                 <a:solidFill>
                   <a:srgbClr val="1E2A33"/>
                 </a:solidFill>
@@ -17544,7 +17661,7 @@
               </a:rPr>
               <a:t>Sintaxis</a:t>
             </a:r>
-            <a:endParaRPr lang="en-US" sz="1050" dirty="0"/>
+            <a:endParaRPr lang="en-US" sz="1600" dirty="0"/>
           </a:p>
         </p:txBody>
       </p:sp>
@@ -17576,7 +17693,7 @@
           <a:bodyPr/>
           <a:lstStyle/>
           <a:p>
-            <a:endParaRPr lang="es-AR"/>
+            <a:endParaRPr lang="es-AR" sz="1600"/>
           </a:p>
         </p:txBody>
       </p:sp>
@@ -17605,7 +17722,7 @@
               <a:buNone/>
             </a:pPr>
             <a:r>
-              <a:rPr lang="en-US" sz="1050" dirty="0">
+              <a:rPr lang="en-US" sz="1600" dirty="0">
                 <a:solidFill>
                   <a:srgbClr val="1E2A33"/>
                 </a:solidFill>
@@ -17615,7 +17732,7 @@
               </a:rPr>
               <a:t>Templates HTML + directivas</a:t>
             </a:r>
-            <a:endParaRPr lang="en-US" sz="1050" dirty="0"/>
+            <a:endParaRPr lang="en-US" sz="1600" dirty="0"/>
           </a:p>
         </p:txBody>
       </p:sp>
@@ -17647,7 +17764,7 @@
           <a:bodyPr/>
           <a:lstStyle/>
           <a:p>
-            <a:endParaRPr lang="es-AR"/>
+            <a:endParaRPr lang="es-AR" sz="1600"/>
           </a:p>
         </p:txBody>
       </p:sp>
@@ -17676,7 +17793,7 @@
               <a:buNone/>
             </a:pPr>
             <a:r>
-              <a:rPr lang="en-US" sz="1050" dirty="0">
+              <a:rPr lang="en-US" sz="1600" dirty="0">
                 <a:solidFill>
                   <a:srgbClr val="1E2A33"/>
                 </a:solidFill>
@@ -17686,7 +17803,7 @@
               </a:rPr>
               <a:t>JSX (HTML dentro de JS)</a:t>
             </a:r>
-            <a:endParaRPr lang="en-US" sz="1050" dirty="0"/>
+            <a:endParaRPr lang="en-US" sz="1600" dirty="0"/>
           </a:p>
         </p:txBody>
       </p:sp>
@@ -17718,7 +17835,7 @@
           <a:bodyPr/>
           <a:lstStyle/>
           <a:p>
-            <a:endParaRPr lang="es-AR"/>
+            <a:endParaRPr lang="es-AR" sz="1600"/>
           </a:p>
         </p:txBody>
       </p:sp>
@@ -17747,7 +17864,7 @@
               <a:buNone/>
             </a:pPr>
             <a:r>
-              <a:rPr lang="en-US" sz="1050" b="1" dirty="0">
+              <a:rPr lang="en-US" sz="1600" b="1" dirty="0">
                 <a:solidFill>
                   <a:srgbClr val="1E2A33"/>
                 </a:solidFill>
@@ -17757,7 +17874,7 @@
               </a:rPr>
               <a:t>Reactividad</a:t>
             </a:r>
-            <a:endParaRPr lang="en-US" sz="1050" dirty="0"/>
+            <a:endParaRPr lang="en-US" sz="1600" dirty="0"/>
           </a:p>
         </p:txBody>
       </p:sp>
@@ -17789,7 +17906,7 @@
           <a:bodyPr/>
           <a:lstStyle/>
           <a:p>
-            <a:endParaRPr lang="es-AR"/>
+            <a:endParaRPr lang="es-AR" sz="1600"/>
           </a:p>
         </p:txBody>
       </p:sp>
@@ -17818,7 +17935,7 @@
               <a:buNone/>
             </a:pPr>
             <a:r>
-              <a:rPr lang="en-US" sz="1050" dirty="0">
+              <a:rPr lang="en-US" sz="1600" dirty="0">
                 <a:solidFill>
                   <a:srgbClr val="1E2A33"/>
                 </a:solidFill>
@@ -17828,7 +17945,7 @@
               </a:rPr>
               <a:t>Proxies automáticos (ref/reactive)</a:t>
             </a:r>
-            <a:endParaRPr lang="en-US" sz="1050" dirty="0"/>
+            <a:endParaRPr lang="en-US" sz="1600" dirty="0"/>
           </a:p>
         </p:txBody>
       </p:sp>
@@ -17860,7 +17977,7 @@
           <a:bodyPr/>
           <a:lstStyle/>
           <a:p>
-            <a:endParaRPr lang="es-AR"/>
+            <a:endParaRPr lang="es-AR" sz="1600"/>
           </a:p>
         </p:txBody>
       </p:sp>
@@ -17889,7 +18006,7 @@
               <a:buNone/>
             </a:pPr>
             <a:r>
-              <a:rPr lang="en-US" sz="1050" dirty="0">
+              <a:rPr lang="en-US" sz="1600" dirty="0">
                 <a:solidFill>
                   <a:srgbClr val="1E2A33"/>
                 </a:solidFill>
@@ -17899,7 +18016,7 @@
               </a:rPr>
               <a:t>Hooks explícitos (useState)</a:t>
             </a:r>
-            <a:endParaRPr lang="en-US" sz="1050" dirty="0"/>
+            <a:endParaRPr lang="en-US" sz="1600" dirty="0"/>
           </a:p>
         </p:txBody>
       </p:sp>
@@ -17931,7 +18048,7 @@
           <a:bodyPr/>
           <a:lstStyle/>
           <a:p>
-            <a:endParaRPr lang="es-AR"/>
+            <a:endParaRPr lang="es-AR" sz="1600"/>
           </a:p>
         </p:txBody>
       </p:sp>
@@ -17960,7 +18077,7 @@
               <a:buNone/>
             </a:pPr>
             <a:r>
-              <a:rPr lang="en-US" sz="1050" b="1" dirty="0">
+              <a:rPr lang="en-US" sz="1600" b="1" dirty="0">
                 <a:solidFill>
                   <a:srgbClr val="1E2A33"/>
                 </a:solidFill>
@@ -17970,7 +18087,7 @@
               </a:rPr>
               <a:t>Curva de aprendizaje</a:t>
             </a:r>
-            <a:endParaRPr lang="en-US" sz="1050" dirty="0"/>
+            <a:endParaRPr lang="en-US" sz="1600" dirty="0"/>
           </a:p>
         </p:txBody>
       </p:sp>
@@ -18002,7 +18119,7 @@
           <a:bodyPr/>
           <a:lstStyle/>
           <a:p>
-            <a:endParaRPr lang="es-AR"/>
+            <a:endParaRPr lang="es-AR" sz="1600"/>
           </a:p>
         </p:txBody>
       </p:sp>
@@ -18031,7 +18148,7 @@
               <a:buNone/>
             </a:pPr>
             <a:r>
-              <a:rPr lang="en-US" sz="1050" dirty="0">
+              <a:rPr lang="en-US" sz="1600" dirty="0">
                 <a:solidFill>
                   <a:srgbClr val="1E2A33"/>
                 </a:solidFill>
@@ -18041,7 +18158,7 @@
               </a:rPr>
               <a:t>Más suave</a:t>
             </a:r>
-            <a:endParaRPr lang="en-US" sz="1050" dirty="0"/>
+            <a:endParaRPr lang="en-US" sz="1600" dirty="0"/>
           </a:p>
         </p:txBody>
       </p:sp>
@@ -18073,7 +18190,7 @@
           <a:bodyPr/>
           <a:lstStyle/>
           <a:p>
-            <a:endParaRPr lang="es-AR"/>
+            <a:endParaRPr lang="es-AR" sz="1600"/>
           </a:p>
         </p:txBody>
       </p:sp>
@@ -18102,7 +18219,7 @@
               <a:buNone/>
             </a:pPr>
             <a:r>
-              <a:rPr lang="en-US" sz="1050" dirty="0">
+              <a:rPr lang="en-US" sz="1600" dirty="0">
                 <a:solidFill>
                   <a:srgbClr val="1E2A33"/>
                 </a:solidFill>
@@ -18112,7 +18229,7 @@
               </a:rPr>
               <a:t>Más pronunciada</a:t>
             </a:r>
-            <a:endParaRPr lang="en-US" sz="1050" dirty="0"/>
+            <a:endParaRPr lang="en-US" sz="1600" dirty="0"/>
           </a:p>
         </p:txBody>
       </p:sp>
@@ -18144,7 +18261,7 @@
           <a:bodyPr/>
           <a:lstStyle/>
           <a:p>
-            <a:endParaRPr lang="es-AR"/>
+            <a:endParaRPr lang="es-AR" sz="1600"/>
           </a:p>
         </p:txBody>
       </p:sp>
@@ -18173,7 +18290,7 @@
               <a:buNone/>
             </a:pPr>
             <a:r>
-              <a:rPr lang="en-US" sz="1050" b="1" dirty="0">
+              <a:rPr lang="en-US" sz="1600" b="1" dirty="0">
                 <a:solidFill>
                   <a:srgbClr val="1E2A33"/>
                 </a:solidFill>
@@ -18183,7 +18300,7 @@
               </a:rPr>
               <a:t>Ecosistema</a:t>
             </a:r>
-            <a:endParaRPr lang="en-US" sz="1050" dirty="0"/>
+            <a:endParaRPr lang="en-US" sz="1600" dirty="0"/>
           </a:p>
         </p:txBody>
       </p:sp>
@@ -18215,7 +18332,7 @@
           <a:bodyPr/>
           <a:lstStyle/>
           <a:p>
-            <a:endParaRPr lang="es-AR"/>
+            <a:endParaRPr lang="es-AR" sz="1600"/>
           </a:p>
         </p:txBody>
       </p:sp>
@@ -18244,7 +18361,7 @@
               <a:buNone/>
             </a:pPr>
             <a:r>
-              <a:rPr lang="en-US" sz="1050" dirty="0">
+              <a:rPr lang="en-US" sz="1600" dirty="0">
                 <a:solidFill>
                   <a:srgbClr val="1E2A33"/>
                 </a:solidFill>
@@ -18254,7 +18371,7 @@
               </a:rPr>
               <a:t>Oficial y cohesivo (Router, Pinia, Nuxt)</a:t>
             </a:r>
-            <a:endParaRPr lang="en-US" sz="1050" dirty="0"/>
+            <a:endParaRPr lang="en-US" sz="1600" dirty="0"/>
           </a:p>
         </p:txBody>
       </p:sp>
@@ -18286,7 +18403,7 @@
           <a:bodyPr/>
           <a:lstStyle/>
           <a:p>
-            <a:endParaRPr lang="es-AR"/>
+            <a:endParaRPr lang="es-AR" sz="1600"/>
           </a:p>
         </p:txBody>
       </p:sp>
@@ -18315,7 +18432,7 @@
               <a:buNone/>
             </a:pPr>
             <a:r>
-              <a:rPr lang="en-US" sz="1050" dirty="0">
+              <a:rPr lang="en-US" sz="1600" dirty="0">
                 <a:solidFill>
                   <a:srgbClr val="1E2A33"/>
                 </a:solidFill>
@@ -18325,7 +18442,7 @@
               </a:rPr>
               <a:t>Vasto pero fragmentado (terceros)</a:t>
             </a:r>
-            <a:endParaRPr lang="en-US" sz="1050" dirty="0"/>
+            <a:endParaRPr lang="en-US" sz="1600" dirty="0"/>
           </a:p>
         </p:txBody>
       </p:sp>
@@ -18357,7 +18474,7 @@
           <a:bodyPr/>
           <a:lstStyle/>
           <a:p>
-            <a:endParaRPr lang="es-AR"/>
+            <a:endParaRPr lang="es-AR" sz="1600"/>
           </a:p>
         </p:txBody>
       </p:sp>
@@ -18386,7 +18503,7 @@
               <a:buNone/>
             </a:pPr>
             <a:r>
-              <a:rPr lang="en-US" sz="1050" b="1" dirty="0">
+              <a:rPr lang="en-US" sz="1600" b="1" dirty="0">
                 <a:solidFill>
                   <a:srgbClr val="1E2A33"/>
                 </a:solidFill>
@@ -18396,7 +18513,7 @@
               </a:rPr>
               <a:t>Rendimiento</a:t>
             </a:r>
-            <a:endParaRPr lang="en-US" sz="1050" dirty="0"/>
+            <a:endParaRPr lang="en-US" sz="1600" dirty="0"/>
           </a:p>
         </p:txBody>
       </p:sp>
@@ -18428,7 +18545,7 @@
           <a:bodyPr/>
           <a:lstStyle/>
           <a:p>
-            <a:endParaRPr lang="es-AR"/>
+            <a:endParaRPr lang="es-AR" sz="1600"/>
           </a:p>
         </p:txBody>
       </p:sp>
@@ -18457,7 +18574,7 @@
               <a:buNone/>
             </a:pPr>
             <a:r>
-              <a:rPr lang="en-US" sz="1050" dirty="0">
+              <a:rPr lang="en-US" sz="1600" dirty="0">
                 <a:solidFill>
                   <a:srgbClr val="1E2A33"/>
                 </a:solidFill>
@@ -18467,7 +18584,7 @@
               </a:rPr>
               <a:t>Excelente; Vapor Mode sin VDOM (3.6)</a:t>
             </a:r>
-            <a:endParaRPr lang="en-US" sz="1050" dirty="0"/>
+            <a:endParaRPr lang="en-US" sz="1600" dirty="0"/>
           </a:p>
         </p:txBody>
       </p:sp>
@@ -18499,7 +18616,7 @@
           <a:bodyPr/>
           <a:lstStyle/>
           <a:p>
-            <a:endParaRPr lang="es-AR"/>
+            <a:endParaRPr lang="es-AR" sz="1600"/>
           </a:p>
         </p:txBody>
       </p:sp>
@@ -18528,7 +18645,7 @@
               <a:buNone/>
             </a:pPr>
             <a:r>
-              <a:rPr lang="en-US" sz="1050" dirty="0">
+              <a:rPr lang="en-US" sz="1600" dirty="0">
                 <a:solidFill>
                   <a:srgbClr val="1E2A33"/>
                 </a:solidFill>
@@ -18538,7 +18655,7 @@
               </a:rPr>
               <a:t>Excelente; Compiler de React 19</a:t>
             </a:r>
-            <a:endParaRPr lang="en-US" sz="1050" dirty="0"/>
+            <a:endParaRPr lang="en-US" sz="1600" dirty="0"/>
           </a:p>
         </p:txBody>
       </p:sp>
@@ -18570,7 +18687,7 @@
           <a:bodyPr/>
           <a:lstStyle/>
           <a:p>
-            <a:endParaRPr lang="es-AR"/>
+            <a:endParaRPr lang="es-AR" sz="1600"/>
           </a:p>
         </p:txBody>
       </p:sp>
@@ -18599,7 +18716,7 @@
               <a:buNone/>
             </a:pPr>
             <a:r>
-              <a:rPr lang="en-US" sz="1050" b="1" dirty="0">
+              <a:rPr lang="en-US" sz="1600" b="1" dirty="0">
                 <a:solidFill>
                   <a:srgbClr val="1E2A33"/>
                 </a:solidFill>
@@ -18609,7 +18726,7 @@
               </a:rPr>
               <a:t>Tooling con IA</a:t>
             </a:r>
-            <a:endParaRPr lang="en-US" sz="1050" dirty="0"/>
+            <a:endParaRPr lang="en-US" sz="1600" dirty="0"/>
           </a:p>
         </p:txBody>
       </p:sp>
@@ -18641,7 +18758,7 @@
           <a:bodyPr/>
           <a:lstStyle/>
           <a:p>
-            <a:endParaRPr lang="es-AR"/>
+            <a:endParaRPr lang="es-AR" sz="1600"/>
           </a:p>
         </p:txBody>
       </p:sp>
@@ -18670,7 +18787,7 @@
               <a:buNone/>
             </a:pPr>
             <a:r>
-              <a:rPr lang="en-US" sz="1050" dirty="0">
+              <a:rPr lang="en-US" sz="1600" dirty="0">
                 <a:solidFill>
                   <a:srgbClr val="1E2A33"/>
                 </a:solidFill>
@@ -18680,7 +18797,7 @@
               </a:rPr>
               <a:t>Limitado aún</a:t>
             </a:r>
-            <a:endParaRPr lang="en-US" sz="1050" dirty="0"/>
+            <a:endParaRPr lang="en-US" sz="1600" dirty="0"/>
           </a:p>
         </p:txBody>
       </p:sp>
@@ -18712,7 +18829,7 @@
           <a:bodyPr/>
           <a:lstStyle/>
           <a:p>
-            <a:endParaRPr lang="es-AR"/>
+            <a:endParaRPr lang="es-AR" sz="1600"/>
           </a:p>
         </p:txBody>
       </p:sp>
@@ -18741,7 +18858,7 @@
               <a:buNone/>
             </a:pPr>
             <a:r>
-              <a:rPr lang="en-US" sz="1050" dirty="0">
+              <a:rPr lang="en-US" sz="1600" dirty="0">
                 <a:solidFill>
                   <a:srgbClr val="1E2A33"/>
                 </a:solidFill>
@@ -18751,7 +18868,7 @@
               </a:rPr>
               <a:t>Ecosistema maduro (Vercel AI SDK, etc.)</a:t>
             </a:r>
-            <a:endParaRPr lang="en-US" sz="1050" dirty="0"/>
+            <a:endParaRPr lang="en-US" sz="1600" dirty="0"/>
           </a:p>
         </p:txBody>
       </p:sp>
@@ -18783,7 +18900,7 @@
           <a:bodyPr/>
           <a:lstStyle/>
           <a:p>
-            <a:endParaRPr lang="es-AR"/>
+            <a:endParaRPr lang="es-AR" sz="1600"/>
           </a:p>
         </p:txBody>
       </p:sp>
@@ -18812,7 +18929,7 @@
               <a:buNone/>
             </a:pPr>
             <a:r>
-              <a:rPr lang="en-US" sz="1050" b="1" dirty="0">
+              <a:rPr lang="en-US" sz="1600" b="1" dirty="0">
                 <a:solidFill>
                   <a:srgbClr val="1E2A33"/>
                 </a:solidFill>
@@ -18822,7 +18939,7 @@
               </a:rPr>
               <a:t>Bundle size</a:t>
             </a:r>
-            <a:endParaRPr lang="en-US" sz="1050" dirty="0"/>
+            <a:endParaRPr lang="en-US" sz="1600" dirty="0"/>
           </a:p>
         </p:txBody>
       </p:sp>
@@ -18854,7 +18971,7 @@
           <a:bodyPr/>
           <a:lstStyle/>
           <a:p>
-            <a:endParaRPr lang="es-AR"/>
+            <a:endParaRPr lang="es-AR" sz="1600"/>
           </a:p>
         </p:txBody>
       </p:sp>
@@ -18883,7 +19000,7 @@
               <a:buNone/>
             </a:pPr>
             <a:r>
-              <a:rPr lang="en-US" sz="1050" dirty="0">
+              <a:rPr lang="en-US" sz="1600" dirty="0">
                 <a:solidFill>
                   <a:srgbClr val="1E2A33"/>
                 </a:solidFill>
@@ -18893,7 +19010,7 @@
               </a:rPr>
               <a:t>Más liviano por defecto</a:t>
             </a:r>
-            <a:endParaRPr lang="en-US" sz="1050" dirty="0"/>
+            <a:endParaRPr lang="en-US" sz="1600" dirty="0"/>
           </a:p>
         </p:txBody>
       </p:sp>
@@ -18925,7 +19042,7 @@
           <a:bodyPr/>
           <a:lstStyle/>
           <a:p>
-            <a:endParaRPr lang="es-AR"/>
+            <a:endParaRPr lang="es-AR" sz="1600"/>
           </a:p>
         </p:txBody>
       </p:sp>
@@ -18954,7 +19071,7 @@
               <a:buNone/>
             </a:pPr>
             <a:r>
-              <a:rPr lang="en-US" sz="1050" dirty="0">
+              <a:rPr lang="en-US" sz="1600" dirty="0">
                 <a:solidFill>
                   <a:srgbClr val="1E2A33"/>
                 </a:solidFill>
@@ -18964,7 +19081,7 @@
               </a:rPr>
               <a:t>Mayor, mitigado con tree-shaking</a:t>
             </a:r>
-            <a:endParaRPr lang="en-US" sz="1050" dirty="0"/>
+            <a:endParaRPr lang="en-US" sz="1600" dirty="0"/>
           </a:p>
         </p:txBody>
       </p:sp>
@@ -19126,7 +19243,7 @@
         </p:nvSpPr>
         <p:spPr>
           <a:xfrm>
-            <a:off x="548640" y="658368"/>
+            <a:off x="548640" y="685800"/>
             <a:ext cx="11064240" cy="777240"/>
           </a:xfrm>
           <a:prstGeom prst="rect">
@@ -19235,7 +19352,7 @@
               <a:buNone/>
             </a:pPr>
             <a:r>
-              <a:rPr lang="en-US" sz="1700" b="1" dirty="0">
+              <a:rPr lang="en-US" sz="2400" b="1" dirty="0">
                 <a:solidFill>
                   <a:srgbClr val="2E8B63"/>
                 </a:solidFill>
@@ -19245,7 +19362,7 @@
               </a:rPr>
               <a:t>Vue.js</a:t>
             </a:r>
-            <a:endParaRPr lang="en-US" sz="1700" dirty="0"/>
+            <a:endParaRPr lang="en-US" sz="2400" dirty="0"/>
           </a:p>
         </p:txBody>
       </p:sp>
@@ -19278,7 +19395,7 @@
               <a:buChar char="•"/>
             </a:pPr>
             <a:r>
-              <a:rPr lang="en-US" sz="1250" dirty="0">
+              <a:rPr lang="en-US" dirty="0">
                 <a:solidFill>
                   <a:srgbClr val="1E2A33"/>
                 </a:solidFill>
@@ -19288,7 +19405,7 @@
               </a:rPr>
               <a:t>Sintaxis cercana a HTML/CSS/JS estándar</a:t>
             </a:r>
-            <a:endParaRPr lang="en-US" sz="1250" dirty="0"/>
+            <a:endParaRPr lang="en-US" dirty="0"/>
           </a:p>
           <a:p>
             <a:pPr marL="342900" indent="-342900">
@@ -19299,7 +19416,7 @@
               <a:buChar char="•"/>
             </a:pPr>
             <a:r>
-              <a:rPr lang="en-US" sz="1250" dirty="0">
+              <a:rPr lang="en-US" dirty="0">
                 <a:solidFill>
                   <a:srgbClr val="1E2A33"/>
                 </a:solidFill>
@@ -19309,7 +19426,7 @@
               </a:rPr>
               <a:t>Convenciones oficiales reducen decisiones</a:t>
             </a:r>
-            <a:endParaRPr lang="en-US" sz="1250" dirty="0"/>
+            <a:endParaRPr lang="en-US" dirty="0"/>
           </a:p>
           <a:p>
             <a:pPr marL="342900" indent="-342900">
@@ -19320,7 +19437,7 @@
               <a:buChar char="•"/>
             </a:pPr>
             <a:r>
-              <a:rPr lang="en-US" sz="1250" dirty="0">
+              <a:rPr lang="en-US" dirty="0">
                 <a:solidFill>
                   <a:srgbClr val="1E2A33"/>
                 </a:solidFill>
@@ -19330,7 +19447,7 @@
               </a:rPr>
               <a:t>Documentación in-house extensa y guiada</a:t>
             </a:r>
-            <a:endParaRPr lang="en-US" sz="1250" dirty="0"/>
+            <a:endParaRPr lang="en-US" dirty="0"/>
           </a:p>
           <a:p>
             <a:pPr marL="342900" indent="-342900">
@@ -19341,7 +19458,7 @@
               <a:buChar char="•"/>
             </a:pPr>
             <a:r>
-              <a:rPr lang="en-US" sz="1250" dirty="0">
+              <a:rPr lang="en-US" dirty="0">
                 <a:solidFill>
                   <a:srgbClr val="1E2A33"/>
                 </a:solidFill>
@@ -19351,7 +19468,7 @@
               </a:rPr>
               <a:t>SFC separa claramente lógica, marcado y estilos</a:t>
             </a:r>
-            <a:endParaRPr lang="en-US" sz="1250" dirty="0"/>
+            <a:endParaRPr lang="en-US" dirty="0"/>
           </a:p>
         </p:txBody>
       </p:sp>
@@ -19433,7 +19550,7 @@
               <a:buNone/>
             </a:pPr>
             <a:r>
-              <a:rPr lang="en-US" sz="1700" b="1" dirty="0">
+              <a:rPr lang="en-US" sz="2400" b="1" dirty="0">
                 <a:solidFill>
                   <a:srgbClr val="1AA6C9"/>
                 </a:solidFill>
@@ -19443,7 +19560,7 @@
               </a:rPr>
               <a:t>React</a:t>
             </a:r>
-            <a:endParaRPr lang="en-US" sz="1700" dirty="0"/>
+            <a:endParaRPr lang="en-US" sz="2400" dirty="0"/>
           </a:p>
         </p:txBody>
       </p:sp>
@@ -19476,7 +19593,7 @@
               <a:buChar char="•"/>
             </a:pPr>
             <a:r>
-              <a:rPr lang="en-US" sz="1250" dirty="0">
+              <a:rPr lang="en-US" dirty="0">
                 <a:solidFill>
                   <a:srgbClr val="1E2A33"/>
                 </a:solidFill>
@@ -19486,7 +19603,7 @@
               </a:rPr>
               <a:t>Requiere entender JSX desde el día 1</a:t>
             </a:r>
-            <a:endParaRPr lang="en-US" sz="1250" dirty="0"/>
+            <a:endParaRPr lang="en-US" dirty="0"/>
           </a:p>
           <a:p>
             <a:pPr marL="342900" indent="-342900">
@@ -19497,7 +19614,7 @@
               <a:buChar char="•"/>
             </a:pPr>
             <a:r>
-              <a:rPr lang="en-US" sz="1250" dirty="0">
+              <a:rPr lang="en-US" dirty="0">
                 <a:solidFill>
                   <a:srgbClr val="1E2A33"/>
                 </a:solidFill>
@@ -19507,7 +19624,7 @@
               </a:rPr>
               <a:t>Hooks piden entender closures y dependencias</a:t>
             </a:r>
-            <a:endParaRPr lang="en-US" sz="1250" dirty="0"/>
+            <a:endParaRPr lang="en-US" dirty="0"/>
           </a:p>
           <a:p>
             <a:pPr marL="342900" indent="-342900">
@@ -19518,7 +19635,7 @@
               <a:buChar char="•"/>
             </a:pPr>
             <a:r>
-              <a:rPr lang="en-US" sz="1250" dirty="0">
+              <a:rPr lang="en-US" dirty="0">
                 <a:solidFill>
                   <a:srgbClr val="1E2A33"/>
                 </a:solidFill>
@@ -19528,7 +19645,7 @@
               </a:rPr>
               <a:t>Mayor flexibilidad, pero más decisiones a tomar</a:t>
             </a:r>
-            <a:endParaRPr lang="en-US" sz="1250" dirty="0"/>
+            <a:endParaRPr lang="en-US" dirty="0"/>
           </a:p>
           <a:p>
             <a:pPr marL="342900" indent="-342900">
@@ -19539,7 +19656,7 @@
               <a:buChar char="•"/>
             </a:pPr>
             <a:r>
-              <a:rPr lang="en-US" sz="1250" dirty="0">
+              <a:rPr lang="en-US" dirty="0">
                 <a:solidFill>
                   <a:srgbClr val="1E2A33"/>
                 </a:solidFill>
@@ -19549,7 +19666,7 @@
               </a:rPr>
               <a:t>Curva más empinada, techo más alto a largo plazo</a:t>
             </a:r>
-            <a:endParaRPr lang="en-US" sz="1250" dirty="0"/>
+            <a:endParaRPr lang="en-US" dirty="0"/>
           </a:p>
         </p:txBody>
       </p:sp>
@@ -19767,7 +19884,7 @@
               <a:buNone/>
             </a:pPr>
             <a:r>
-              <a:rPr lang="en-US" sz="1200" i="1" dirty="0">
+              <a:rPr lang="en-US" sz="2000" i="1" dirty="0">
                 <a:solidFill>
                   <a:srgbClr val="5B6B73"/>
                 </a:solidFill>
@@ -19777,7 +19894,7 @@
               </a:rPr>
               <a:t>Descargas semanales en npm (orden de magnitud aproximado, 2026)</a:t>
             </a:r>
-            <a:endParaRPr lang="en-US" sz="1200" dirty="0"/>
+            <a:endParaRPr lang="en-US" sz="2000" dirty="0"/>
           </a:p>
         </p:txBody>
       </p:sp>
@@ -19785,11 +19902,17 @@
         <p:nvGraphicFramePr>
           <p:cNvPr id="5" name="Chart 0"/>
           <p:cNvGraphicFramePr/>
-          <p:nvPr/>
+          <p:nvPr>
+            <p:extLst>
+              <p:ext uri="{D42A27DB-BD31-4B8C-83A1-F6EECF244321}">
+                <p14:modId xmlns:p14="http://schemas.microsoft.com/office/powerpoint/2010/main" val="2604284718"/>
+              </p:ext>
+            </p:extLst>
+          </p:nvPr>
         </p:nvGraphicFramePr>
         <p:xfrm>
           <a:off x="548640" y="1920240"/>
-          <a:ext cx="5394960" cy="4114800"/>
+          <a:ext cx="5731844" cy="4279392"/>
         </p:xfrm>
         <a:graphic>
           <a:graphicData uri="http://schemas.openxmlformats.org/drawingml/2006/chart">
@@ -19861,7 +19984,7 @@
               <a:buNone/>
             </a:pPr>
             <a:r>
-              <a:rPr lang="en-US" sz="1150" dirty="0">
+              <a:rPr lang="en-US" sz="2000" dirty="0">
                 <a:solidFill>
                   <a:srgbClr val="5B6B73"/>
                 </a:solidFill>
@@ -19871,7 +19994,7 @@
               </a:rPr>
               <a:t>Relación de descargas npm a favor de React</a:t>
             </a:r>
-            <a:endParaRPr lang="en-US" sz="1150" dirty="0"/>
+            <a:endParaRPr lang="en-US" sz="2000" dirty="0"/>
           </a:p>
         </p:txBody>
       </p:sp>
@@ -19900,7 +20023,7 @@
               <a:buNone/>
             </a:pPr>
             <a:r>
-              <a:rPr lang="en-US" sz="2200" b="1" dirty="0">
+              <a:rPr lang="en-US" sz="2000" b="1" dirty="0">
                 <a:solidFill>
                   <a:srgbClr val="2E8B63"/>
                 </a:solidFill>
@@ -19910,7 +20033,7 @@
               </a:rPr>
               <a:t>150.000+</a:t>
             </a:r>
-            <a:endParaRPr lang="en-US" sz="2200" dirty="0"/>
+            <a:endParaRPr lang="en-US" sz="2000" dirty="0"/>
           </a:p>
         </p:txBody>
       </p:sp>
@@ -19939,7 +20062,7 @@
               <a:buNone/>
             </a:pPr>
             <a:r>
-              <a:rPr lang="en-US" sz="1150" dirty="0">
+              <a:rPr lang="en-US" sz="2000" dirty="0">
                 <a:solidFill>
                   <a:srgbClr val="5B6B73"/>
                 </a:solidFill>
@@ -19949,7 +20072,7 @@
               </a:rPr>
               <a:t>Puestos de trabajo activos que piden React</a:t>
             </a:r>
-            <a:endParaRPr lang="en-US" sz="1150" dirty="0"/>
+            <a:endParaRPr lang="en-US" sz="2000" dirty="0"/>
           </a:p>
         </p:txBody>
       </p:sp>
@@ -19978,7 +20101,7 @@
               <a:buNone/>
             </a:pPr>
             <a:r>
-              <a:rPr lang="en-US" sz="2200" b="1" dirty="0">
+              <a:rPr lang="en-US" sz="2000" b="1" dirty="0">
                 <a:solidFill>
                   <a:srgbClr val="2E8B63"/>
                 </a:solidFill>
@@ -19988,7 +20111,7 @@
               </a:rPr>
               <a:t>44,7% / 17,6%</a:t>
             </a:r>
-            <a:endParaRPr lang="en-US" sz="2200" dirty="0"/>
+            <a:endParaRPr lang="en-US" sz="2000" dirty="0"/>
           </a:p>
         </p:txBody>
       </p:sp>
@@ -20017,7 +20140,7 @@
               <a:buNone/>
             </a:pPr>
             <a:r>
-              <a:rPr lang="en-US" sz="1150" dirty="0">
+              <a:rPr lang="en-US" sz="2000" dirty="0">
                 <a:solidFill>
                   <a:srgbClr val="5B6B73"/>
                 </a:solidFill>
@@ -20027,7 +20150,7 @@
               </a:rPr>
               <a:t>Uso reportado: React vs Vue (SO 2025)</a:t>
             </a:r>
-            <a:endParaRPr lang="en-US" sz="1150" dirty="0"/>
+            <a:endParaRPr lang="en-US" sz="2000" dirty="0"/>
           </a:p>
         </p:txBody>
       </p:sp>
@@ -20228,7 +20351,7 @@
         </p:nvSpPr>
         <p:spPr>
           <a:xfrm>
-            <a:off x="548640" y="1600200"/>
+            <a:off x="548640" y="1554480"/>
             <a:ext cx="6492240" cy="1371600"/>
           </a:xfrm>
           <a:prstGeom prst="rect">
@@ -20335,7 +20458,7 @@
               <a:buNone/>
             </a:pPr>
             <a:r>
-              <a:rPr lang="en-US" sz="1450" b="1" dirty="0">
+              <a:rPr lang="en-US" sz="2000" b="1" dirty="0">
                 <a:solidFill>
                   <a:srgbClr val="1E2A33"/>
                 </a:solidFill>
@@ -20345,7 +20468,7 @@
               </a:rPr>
               <a:t>¿Qué comparamos?</a:t>
             </a:r>
-            <a:endParaRPr lang="en-US" sz="1450" dirty="0"/>
+            <a:endParaRPr lang="en-US" sz="2000" dirty="0"/>
           </a:p>
         </p:txBody>
       </p:sp>
@@ -20374,6 +20497,17 @@
               <a:buNone/>
             </a:pPr>
             <a:r>
+              <a:rPr lang="en-US" dirty="0">
+                <a:solidFill>
+                  <a:srgbClr val="5B6B73"/>
+                </a:solidFill>
+                <a:latin typeface="Calibri" pitchFamily="34" charset="0"/>
+                <a:ea typeface="Calibri" pitchFamily="34" charset="-122"/>
+                <a:cs typeface="Calibri" pitchFamily="34" charset="-120"/>
+              </a:rPr>
+              <a:t>Curva de aprendizaje, arquitectura, rendimiento, ecosistema y adopción real en la industria</a:t>
+            </a:r>
+            <a:r>
               <a:rPr lang="en-US" sz="1250" dirty="0">
                 <a:solidFill>
                   <a:srgbClr val="5B6B73"/>
@@ -20382,7 +20516,7 @@
                 <a:ea typeface="Calibri" pitchFamily="34" charset="-122"/>
                 <a:cs typeface="Calibri" pitchFamily="34" charset="-120"/>
               </a:rPr>
-              <a:t>Curva de aprendizaje, arquitectura, rendimiento, ecosistema y adopción real en la industria.</a:t>
+              <a:t>.</a:t>
             </a:r>
             <a:endParaRPr lang="en-US" sz="1250" dirty="0"/>
           </a:p>
@@ -20464,7 +20598,7 @@
               <a:buNone/>
             </a:pPr>
             <a:r>
-              <a:rPr lang="en-US" sz="1450" b="1" dirty="0">
+              <a:rPr lang="en-US" sz="2000" b="1" dirty="0">
                 <a:solidFill>
                   <a:srgbClr val="1E2A33"/>
                 </a:solidFill>
@@ -20474,7 +20608,7 @@
               </a:rPr>
               <a:t>¿Para qué?</a:t>
             </a:r>
-            <a:endParaRPr lang="en-US" sz="1450" dirty="0"/>
+            <a:endParaRPr lang="en-US" sz="2000" dirty="0"/>
           </a:p>
         </p:txBody>
       </p:sp>
@@ -20503,7 +20637,7 @@
               <a:buNone/>
             </a:pPr>
             <a:r>
-              <a:rPr lang="en-US" sz="1250" dirty="0">
+              <a:rPr lang="en-US" dirty="0">
                 <a:solidFill>
                   <a:srgbClr val="5B6B73"/>
                 </a:solidFill>
@@ -20513,7 +20647,7 @@
               </a:rPr>
               <a:t>Dar evidencia concreta —no solo teórica— antes de invertir tiempo en adoptar una tecnología.</a:t>
             </a:r>
-            <a:endParaRPr lang="en-US" sz="1250" dirty="0"/>
+            <a:endParaRPr lang="en-US" dirty="0"/>
           </a:p>
         </p:txBody>
       </p:sp>
@@ -20593,7 +20727,7 @@
               <a:buNone/>
             </a:pPr>
             <a:r>
-              <a:rPr lang="en-US" sz="1450" b="1" dirty="0">
+              <a:rPr lang="en-US" sz="2000" b="1" dirty="0">
                 <a:solidFill>
                   <a:srgbClr val="1E2A33"/>
                 </a:solidFill>
@@ -20603,7 +20737,7 @@
               </a:rPr>
               <a:t>¿Cómo?</a:t>
             </a:r>
-            <a:endParaRPr lang="en-US" sz="1450" dirty="0"/>
+            <a:endParaRPr lang="en-US" sz="2000" dirty="0"/>
           </a:p>
         </p:txBody>
       </p:sp>
@@ -20632,6 +20766,17 @@
               <a:buNone/>
             </a:pPr>
             <a:r>
+              <a:rPr lang="en-US" dirty="0">
+                <a:solidFill>
+                  <a:srgbClr val="5B6B73"/>
+                </a:solidFill>
+                <a:latin typeface="Calibri" pitchFamily="34" charset="0"/>
+                <a:ea typeface="Calibri" pitchFamily="34" charset="-122"/>
+                <a:cs typeface="Calibri" pitchFamily="34" charset="-120"/>
+              </a:rPr>
+              <a:t>Investigación conjunta con el grupo de React + implementación de un proyecto equivalente en ambas</a:t>
+            </a:r>
+            <a:r>
               <a:rPr lang="en-US" sz="1250" dirty="0">
                 <a:solidFill>
                   <a:srgbClr val="5B6B73"/>
@@ -20640,7 +20785,7 @@
                 <a:ea typeface="Calibri" pitchFamily="34" charset="-122"/>
                 <a:cs typeface="Calibri" pitchFamily="34" charset="-120"/>
               </a:rPr>
-              <a:t>Investigación conjunta con el grupo de React + implementación de un proyecto equivalente en ambas.</a:t>
+              <a:t>.</a:t>
             </a:r>
             <a:endParaRPr lang="en-US" sz="1250" dirty="0"/>
           </a:p>
@@ -20878,7 +21023,7 @@
         </p:nvSpPr>
         <p:spPr>
           <a:xfrm>
-            <a:off x="548640" y="365760"/>
+            <a:off x="548640" y="310896"/>
             <a:ext cx="10058400" cy="320040"/>
           </a:xfrm>
           <a:prstGeom prst="rect">
@@ -20956,7 +21101,7 @@
         </p:nvSpPr>
         <p:spPr>
           <a:xfrm>
-            <a:off x="548640" y="1600200"/>
+            <a:off x="548640" y="1563464"/>
             <a:ext cx="5349240" cy="365760"/>
           </a:xfrm>
           <a:prstGeom prst="rect">
@@ -20973,7 +21118,7 @@
               <a:buNone/>
             </a:pPr>
             <a:r>
-              <a:rPr lang="en-US" sz="1600" b="1" dirty="0">
+              <a:rPr lang="en-US" sz="2400" b="1" dirty="0">
                 <a:solidFill>
                   <a:srgbClr val="2E8B63"/>
                 </a:solidFill>
@@ -20983,7 +21128,7 @@
               </a:rPr>
               <a:t>Vue.js</a:t>
             </a:r>
-            <a:endParaRPr lang="en-US" sz="1600" dirty="0"/>
+            <a:endParaRPr lang="en-US" sz="2400" dirty="0"/>
           </a:p>
         </p:txBody>
       </p:sp>
@@ -21012,7 +21157,7 @@
               <a:buNone/>
             </a:pPr>
             <a:r>
-              <a:rPr lang="en-US" sz="1600" b="1" dirty="0">
+              <a:rPr lang="en-US" sz="2400" b="1" dirty="0">
                 <a:solidFill>
                   <a:srgbClr val="1AA6C9"/>
                 </a:solidFill>
@@ -21022,7 +21167,7 @@
               </a:rPr>
               <a:t>React</a:t>
             </a:r>
-            <a:endParaRPr lang="en-US" sz="1600" dirty="0"/>
+            <a:endParaRPr lang="en-US" sz="2400" dirty="0"/>
           </a:p>
         </p:txBody>
       </p:sp>
@@ -21104,7 +21249,7 @@
               <a:buNone/>
             </a:pPr>
             <a:r>
-              <a:rPr lang="en-US" sz="1300" b="1" dirty="0">
+              <a:rPr lang="en-US" sz="2000" b="1" dirty="0">
                 <a:solidFill>
                   <a:srgbClr val="1E2A33"/>
                 </a:solidFill>
@@ -21114,7 +21259,7 @@
               </a:rPr>
               <a:t>Alibaba</a:t>
             </a:r>
-            <a:endParaRPr lang="en-US" sz="1300" dirty="0"/>
+            <a:endParaRPr lang="en-US" sz="2000" dirty="0"/>
           </a:p>
         </p:txBody>
       </p:sp>
@@ -21143,7 +21288,7 @@
               <a:buNone/>
             </a:pPr>
             <a:r>
-              <a:rPr lang="en-US" sz="1050" dirty="0">
+              <a:rPr lang="en-US" sz="1600" dirty="0">
                 <a:solidFill>
                   <a:srgbClr val="5B6B73"/>
                 </a:solidFill>
@@ -21153,7 +21298,7 @@
               </a:rPr>
               <a:t>Ecosistema e-commerce</a:t>
             </a:r>
-            <a:endParaRPr lang="en-US" sz="1050" dirty="0"/>
+            <a:endParaRPr lang="en-US" sz="1600" dirty="0"/>
           </a:p>
         </p:txBody>
       </p:sp>
@@ -21235,7 +21380,7 @@
               <a:buNone/>
             </a:pPr>
             <a:r>
-              <a:rPr lang="en-US" sz="1300" b="1" dirty="0">
+              <a:rPr lang="en-US" sz="2000" b="1" dirty="0">
                 <a:solidFill>
                   <a:srgbClr val="1E2A33"/>
                 </a:solidFill>
@@ -21245,7 +21390,7 @@
               </a:rPr>
               <a:t>GitLab</a:t>
             </a:r>
-            <a:endParaRPr lang="en-US" sz="1300" dirty="0"/>
+            <a:endParaRPr lang="en-US" sz="2000" dirty="0"/>
           </a:p>
         </p:txBody>
       </p:sp>
@@ -21274,7 +21419,7 @@
               <a:buNone/>
             </a:pPr>
             <a:r>
-              <a:rPr lang="en-US" sz="1050" dirty="0">
+              <a:rPr lang="en-US" dirty="0">
                 <a:solidFill>
                   <a:srgbClr val="5B6B73"/>
                 </a:solidFill>
@@ -21284,7 +21429,7 @@
               </a:rPr>
               <a:t>Plataforma DevOps</a:t>
             </a:r>
-            <a:endParaRPr lang="en-US" sz="1050" dirty="0"/>
+            <a:endParaRPr lang="en-US" dirty="0"/>
           </a:p>
         </p:txBody>
       </p:sp>
@@ -21366,7 +21511,7 @@
               <a:buNone/>
             </a:pPr>
             <a:r>
-              <a:rPr lang="en-US" sz="1300" b="1" dirty="0">
+              <a:rPr lang="en-US" sz="2000" b="1" dirty="0">
                 <a:solidFill>
                   <a:srgbClr val="1E2A33"/>
                 </a:solidFill>
@@ -21376,7 +21521,7 @@
               </a:rPr>
               <a:t>Nintendo (sitios EU)</a:t>
             </a:r>
-            <a:endParaRPr lang="en-US" sz="1300" dirty="0"/>
+            <a:endParaRPr lang="en-US" sz="2000" dirty="0"/>
           </a:p>
         </p:txBody>
       </p:sp>
@@ -21405,7 +21550,7 @@
               <a:buNone/>
             </a:pPr>
             <a:r>
-              <a:rPr lang="en-US" sz="1050" dirty="0">
+              <a:rPr lang="en-US" dirty="0">
                 <a:solidFill>
                   <a:srgbClr val="5B6B73"/>
                 </a:solidFill>
@@ -21415,7 +21560,7 @@
               </a:rPr>
               <a:t>Portales de la marca</a:t>
             </a:r>
-            <a:endParaRPr lang="en-US" sz="1050" dirty="0"/>
+            <a:endParaRPr lang="en-US" dirty="0"/>
           </a:p>
         </p:txBody>
       </p:sp>
@@ -21497,7 +21642,7 @@
               <a:buNone/>
             </a:pPr>
             <a:r>
-              <a:rPr lang="en-US" sz="1300" b="1" dirty="0">
+              <a:rPr lang="en-US" sz="2000" b="1" dirty="0">
                 <a:solidFill>
                   <a:srgbClr val="1E2A33"/>
                 </a:solidFill>
@@ -21507,7 +21652,7 @@
               </a:rPr>
               <a:t>Netflix</a:t>
             </a:r>
-            <a:endParaRPr lang="en-US" sz="1300" dirty="0"/>
+            <a:endParaRPr lang="en-US" sz="2000" dirty="0"/>
           </a:p>
         </p:txBody>
       </p:sp>
@@ -21536,7 +21681,7 @@
               <a:buNone/>
             </a:pPr>
             <a:r>
-              <a:rPr lang="en-US" sz="1050" dirty="0">
+              <a:rPr lang="en-US" sz="1600" dirty="0">
                 <a:solidFill>
                   <a:srgbClr val="5B6B73"/>
                 </a:solidFill>
@@ -21546,7 +21691,7 @@
               </a:rPr>
               <a:t>Interfaz de streaming</a:t>
             </a:r>
-            <a:endParaRPr lang="en-US" sz="1050" dirty="0"/>
+            <a:endParaRPr lang="en-US" sz="1600" dirty="0"/>
           </a:p>
         </p:txBody>
       </p:sp>
@@ -21628,7 +21773,7 @@
               <a:buNone/>
             </a:pPr>
             <a:r>
-              <a:rPr lang="en-US" sz="1300" b="1" dirty="0">
+              <a:rPr lang="en-US" sz="2000" b="1" dirty="0">
                 <a:solidFill>
                   <a:srgbClr val="1E2A33"/>
                 </a:solidFill>
@@ -21638,7 +21783,7 @@
               </a:rPr>
               <a:t>Airbnb</a:t>
             </a:r>
-            <a:endParaRPr lang="en-US" sz="1300" dirty="0"/>
+            <a:endParaRPr lang="en-US" sz="2000" dirty="0"/>
           </a:p>
         </p:txBody>
       </p:sp>
@@ -21667,7 +21812,7 @@
               <a:buNone/>
             </a:pPr>
             <a:r>
-              <a:rPr lang="en-US" sz="1050" dirty="0">
+              <a:rPr lang="en-US" dirty="0">
                 <a:solidFill>
                   <a:srgbClr val="5B6B73"/>
                 </a:solidFill>
@@ -21677,7 +21822,7 @@
               </a:rPr>
               <a:t>Plataforma web</a:t>
             </a:r>
-            <a:endParaRPr lang="en-US" sz="1050" dirty="0"/>
+            <a:endParaRPr lang="en-US" dirty="0"/>
           </a:p>
         </p:txBody>
       </p:sp>
@@ -21759,7 +21904,7 @@
               <a:buNone/>
             </a:pPr>
             <a:r>
-              <a:rPr lang="en-US" sz="1300" b="1" dirty="0">
+              <a:rPr lang="en-US" sz="2000" b="1" dirty="0">
                 <a:solidFill>
                   <a:srgbClr val="1E2A33"/>
                 </a:solidFill>
@@ -21769,7 +21914,7 @@
               </a:rPr>
               <a:t>Meta / Instagram</a:t>
             </a:r>
-            <a:endParaRPr lang="en-US" sz="1300" dirty="0"/>
+            <a:endParaRPr lang="en-US" sz="2000" dirty="0"/>
           </a:p>
         </p:txBody>
       </p:sp>
@@ -21798,7 +21943,7 @@
               <a:buNone/>
             </a:pPr>
             <a:r>
-              <a:rPr lang="en-US" sz="1050" dirty="0">
+              <a:rPr lang="en-US" dirty="0">
                 <a:solidFill>
                   <a:srgbClr val="5B6B73"/>
                 </a:solidFill>
@@ -21808,7 +21953,7 @@
               </a:rPr>
               <a:t>Creador de React</a:t>
             </a:r>
-            <a:endParaRPr lang="en-US" sz="1050" dirty="0"/>
+            <a:endParaRPr lang="en-US" dirty="0"/>
           </a:p>
         </p:txBody>
       </p:sp>
@@ -21837,7 +21982,7 @@
               <a:buNone/>
             </a:pPr>
             <a:r>
-              <a:rPr lang="en-US" sz="1150" i="1" dirty="0">
+              <a:rPr lang="en-US" sz="1600" i="1" dirty="0">
                 <a:solidFill>
                   <a:srgbClr val="5B6B73"/>
                 </a:solidFill>
@@ -21847,7 +21992,7 @@
               </a:rPr>
               <a:t>React domina la adopción corporativa global (Fortune 500); Vue tiene fuerte tracción en Asia y presencia creciente en Europa.</a:t>
             </a:r>
-            <a:endParaRPr lang="en-US" sz="1150" dirty="0"/>
+            <a:endParaRPr lang="en-US" sz="1600" dirty="0"/>
           </a:p>
         </p:txBody>
       </p:sp>
@@ -22120,7 +22265,7 @@
               <a:buChar char="•"/>
             </a:pPr>
             <a:r>
-              <a:rPr lang="en-US" sz="1400" dirty="0">
+              <a:rPr lang="en-US" dirty="0">
                 <a:solidFill>
                   <a:srgbClr val="1E2A33"/>
                 </a:solidFill>
@@ -22130,7 +22275,7 @@
               </a:rPr>
               <a:t>React concentra la mayor cantidad de búsquedas laborales activas — mayor demanda, pero también más competencia entre postulantes.</a:t>
             </a:r>
-            <a:endParaRPr lang="en-US" sz="1400" dirty="0"/>
+            <a:endParaRPr lang="en-US" dirty="0"/>
           </a:p>
           <a:p>
             <a:pPr marL="342900" indent="-342900">
@@ -22141,7 +22286,7 @@
               <a:buChar char="•"/>
             </a:pPr>
             <a:r>
-              <a:rPr lang="en-US" sz="1400" dirty="0">
+              <a:rPr lang="en-US" dirty="0">
                 <a:solidFill>
                   <a:srgbClr val="1E2A33"/>
                 </a:solidFill>
@@ -22151,7 +22296,7 @@
               </a:rPr>
               <a:t>Vue es muy solicitado en mercados específicos (agencias, admin dashboards, empresas con base en Asia y Europa).</a:t>
             </a:r>
-            <a:endParaRPr lang="en-US" sz="1400" dirty="0"/>
+            <a:endParaRPr lang="en-US" dirty="0"/>
           </a:p>
           <a:p>
             <a:pPr marL="342900" indent="-342900">
@@ -22162,7 +22307,7 @@
               <a:buChar char="•"/>
             </a:pPr>
             <a:r>
-              <a:rPr lang="en-US" sz="1400" dirty="0">
+              <a:rPr lang="en-US" dirty="0">
                 <a:solidFill>
                   <a:srgbClr val="1E2A33"/>
                 </a:solidFill>
@@ -22172,7 +22317,7 @@
               </a:rPr>
               <a:t>Conocer ambos con Composition API / Hooks reduce la distancia de aprendizaje entre uno y otro — son cada vez más similares conceptualmente.</a:t>
             </a:r>
-            <a:endParaRPr lang="en-US" sz="1400" dirty="0"/>
+            <a:endParaRPr lang="en-US" dirty="0"/>
           </a:p>
         </p:txBody>
       </p:sp>
@@ -22230,7 +22375,7 @@
               <a:buNone/>
             </a:pPr>
             <a:r>
-              <a:rPr lang="en-US" sz="1200" i="1" dirty="0">
+              <a:rPr lang="en-US" sz="1600" i="1" dirty="0">
                 <a:solidFill>
                   <a:srgbClr val="1E2A33"/>
                 </a:solidFill>
@@ -22240,7 +22385,7 @@
               </a:rPr>
               <a:t>Para un/a desarrollador/a que recién empieza: Vue baja la barrera de entrada. Para maximizar oportunidades laborales inmediatas: React sigue siendo la apuesta más segura hoy.</a:t>
             </a:r>
-            <a:endParaRPr lang="en-US" sz="1200" dirty="0"/>
+            <a:endParaRPr lang="en-US" sz="1600" dirty="0"/>
           </a:p>
         </p:txBody>
       </p:sp>
@@ -22487,7 +22632,7 @@
               <a:buNone/>
             </a:pPr>
             <a:r>
-              <a:rPr lang="en-US" sz="1500" b="1" dirty="0">
+              <a:rPr lang="en-US" sz="2000" b="1" dirty="0">
                 <a:solidFill>
                   <a:srgbClr val="2E8B63"/>
                 </a:solidFill>
@@ -22497,7 +22642,7 @@
               </a:rPr>
               <a:t>A favor</a:t>
             </a:r>
-            <a:endParaRPr lang="en-US" sz="1500" dirty="0"/>
+            <a:endParaRPr lang="en-US" sz="2000" dirty="0"/>
           </a:p>
         </p:txBody>
       </p:sp>
@@ -22517,7 +22662,7 @@
         </p:blipFill>
         <p:spPr>
           <a:xfrm>
-            <a:off x="868680" y="2331720"/>
+            <a:off x="868680" y="2404872"/>
             <a:ext cx="292608" cy="292608"/>
           </a:xfrm>
           <a:prstGeom prst="rect">
@@ -22550,7 +22695,7 @@
               <a:buNone/>
             </a:pPr>
             <a:r>
-              <a:rPr lang="en-US" sz="1200" dirty="0">
+              <a:rPr lang="en-US" dirty="0">
                 <a:solidFill>
                   <a:srgbClr val="1E2A33"/>
                 </a:solidFill>
@@ -22560,7 +22705,7 @@
               </a:rPr>
               <a:t>Curva de aprendizaje suave</a:t>
             </a:r>
-            <a:endParaRPr lang="en-US" sz="1200" dirty="0"/>
+            <a:endParaRPr lang="en-US" dirty="0"/>
           </a:p>
         </p:txBody>
       </p:sp>
@@ -22613,7 +22758,7 @@
               <a:buNone/>
             </a:pPr>
             <a:r>
-              <a:rPr lang="en-US" sz="1200" dirty="0">
+              <a:rPr lang="en-US" dirty="0">
                 <a:solidFill>
                   <a:srgbClr val="1E2A33"/>
                 </a:solidFill>
@@ -22623,7 +22768,7 @@
               </a:rPr>
               <a:t>Ecosistema oficial cohesivo (Router, Pinia, Nuxt, Vite)</a:t>
             </a:r>
-            <a:endParaRPr lang="en-US" sz="1200" dirty="0"/>
+            <a:endParaRPr lang="en-US" dirty="0"/>
           </a:p>
         </p:txBody>
       </p:sp>
@@ -22643,7 +22788,7 @@
         </p:blipFill>
         <p:spPr>
           <a:xfrm>
-            <a:off x="868680" y="3648456"/>
+            <a:off x="868680" y="3712464"/>
             <a:ext cx="292608" cy="292608"/>
           </a:xfrm>
           <a:prstGeom prst="rect">
@@ -22676,7 +22821,7 @@
               <a:buNone/>
             </a:pPr>
             <a:r>
-              <a:rPr lang="en-US" sz="1200" dirty="0">
+              <a:rPr lang="en-US" dirty="0">
                 <a:solidFill>
                   <a:srgbClr val="1E2A33"/>
                 </a:solidFill>
@@ -22686,7 +22831,7 @@
               </a:rPr>
               <a:t>Excelente documentación</a:t>
             </a:r>
-            <a:endParaRPr lang="en-US" sz="1200" dirty="0"/>
+            <a:endParaRPr lang="en-US" dirty="0"/>
           </a:p>
         </p:txBody>
       </p:sp>
@@ -22722,7 +22867,7 @@
         </p:nvSpPr>
         <p:spPr>
           <a:xfrm>
-            <a:off x="1325880" y="4279392"/>
+            <a:off x="1325880" y="4238886"/>
             <a:ext cx="4343400" cy="457200"/>
           </a:xfrm>
           <a:prstGeom prst="rect">
@@ -22739,7 +22884,7 @@
               <a:buNone/>
             </a:pPr>
             <a:r>
-              <a:rPr lang="en-US" sz="1200" dirty="0">
+              <a:rPr lang="en-US" dirty="0">
                 <a:solidFill>
                   <a:srgbClr val="1E2A33"/>
                 </a:solidFill>
@@ -22749,7 +22894,7 @@
               </a:rPr>
               <a:t>Rendimiento de punta con Vapor Mode (3.6)</a:t>
             </a:r>
-            <a:endParaRPr lang="en-US" sz="1200" dirty="0"/>
+            <a:endParaRPr lang="en-US" dirty="0"/>
           </a:p>
         </p:txBody>
       </p:sp>
@@ -22785,7 +22930,7 @@
         </p:nvSpPr>
         <p:spPr>
           <a:xfrm>
-            <a:off x="1325880" y="4937760"/>
+            <a:off x="1325880" y="4873752"/>
             <a:ext cx="4343400" cy="457200"/>
           </a:xfrm>
           <a:prstGeom prst="rect">
@@ -22802,7 +22947,7 @@
               <a:buNone/>
             </a:pPr>
             <a:r>
-              <a:rPr lang="en-US" sz="1200" dirty="0">
+              <a:rPr lang="en-US" dirty="0">
                 <a:solidFill>
                   <a:srgbClr val="1E2A33"/>
                 </a:solidFill>
@@ -22812,7 +22957,7 @@
               </a:rPr>
               <a:t>Bundle liviano por defecto</a:t>
             </a:r>
-            <a:endParaRPr lang="en-US" sz="1200" dirty="0"/>
+            <a:endParaRPr lang="en-US" dirty="0"/>
           </a:p>
         </p:txBody>
       </p:sp>
@@ -22870,7 +23015,7 @@
               <a:buNone/>
             </a:pPr>
             <a:r>
-              <a:rPr lang="en-US" sz="1500" b="1" dirty="0">
+              <a:rPr lang="en-US" sz="2000" b="1" dirty="0">
                 <a:solidFill>
                   <a:srgbClr val="D64545"/>
                 </a:solidFill>
@@ -22880,7 +23025,7 @@
               </a:rPr>
               <a:t>En contra</a:t>
             </a:r>
-            <a:endParaRPr lang="en-US" sz="1500" dirty="0"/>
+            <a:endParaRPr lang="en-US" sz="2000" dirty="0"/>
           </a:p>
         </p:txBody>
       </p:sp>
@@ -22933,7 +23078,7 @@
               <a:buNone/>
             </a:pPr>
             <a:r>
-              <a:rPr lang="en-US" sz="1200" dirty="0">
+              <a:rPr lang="en-US" dirty="0">
                 <a:solidFill>
                   <a:srgbClr val="1E2A33"/>
                 </a:solidFill>
@@ -22943,7 +23088,7 @@
               </a:rPr>
               <a:t>Comunidad y mercado laboral más chicos que React</a:t>
             </a:r>
-            <a:endParaRPr lang="en-US" sz="1200" dirty="0"/>
+            <a:endParaRPr lang="en-US" dirty="0"/>
           </a:p>
         </p:txBody>
       </p:sp>
@@ -22963,7 +23108,7 @@
         </p:blipFill>
         <p:spPr>
           <a:xfrm>
-            <a:off x="6583680" y="3081528"/>
+            <a:off x="6583680" y="3157247"/>
             <a:ext cx="292608" cy="292608"/>
           </a:xfrm>
           <a:prstGeom prst="rect">
@@ -22996,7 +23141,7 @@
               <a:buNone/>
             </a:pPr>
             <a:r>
-              <a:rPr lang="en-US" sz="1200" dirty="0">
+              <a:rPr lang="en-US" dirty="0">
                 <a:solidFill>
                   <a:srgbClr val="1E2A33"/>
                 </a:solidFill>
@@ -23006,7 +23151,7 @@
               </a:rPr>
               <a:t>Menos librerías de terceros e integraciones de IA</a:t>
             </a:r>
-            <a:endParaRPr lang="en-US" sz="1200" dirty="0"/>
+            <a:endParaRPr lang="en-US" dirty="0"/>
           </a:p>
         </p:txBody>
       </p:sp>
@@ -23026,7 +23171,7 @@
         </p:blipFill>
         <p:spPr>
           <a:xfrm>
-            <a:off x="6583680" y="3831336"/>
+            <a:off x="6583680" y="3892296"/>
             <a:ext cx="292608" cy="292608"/>
           </a:xfrm>
           <a:prstGeom prst="rect">
@@ -23042,7 +23187,7 @@
         </p:nvSpPr>
         <p:spPr>
           <a:xfrm>
-            <a:off x="7040880" y="3803904"/>
+            <a:off x="7040880" y="3730752"/>
             <a:ext cx="4343400" cy="548640"/>
           </a:xfrm>
           <a:prstGeom prst="rect">
@@ -23059,7 +23204,7 @@
               <a:buNone/>
             </a:pPr>
             <a:r>
-              <a:rPr lang="en-US" sz="1200" dirty="0">
+              <a:rPr lang="en-US" dirty="0">
                 <a:solidFill>
                   <a:srgbClr val="1E2A33"/>
                 </a:solidFill>
@@ -23069,7 +23214,7 @@
               </a:rPr>
               <a:t>Vapor Mode aún en beta durante 2026</a:t>
             </a:r>
-            <a:endParaRPr lang="en-US" sz="1200" dirty="0"/>
+            <a:endParaRPr lang="en-US" dirty="0"/>
           </a:p>
         </p:txBody>
       </p:sp>
@@ -23122,7 +23267,7 @@
               <a:buNone/>
             </a:pPr>
             <a:r>
-              <a:rPr lang="en-US" sz="1200" dirty="0">
+              <a:rPr lang="en-US" dirty="0">
                 <a:solidFill>
                   <a:srgbClr val="1E2A33"/>
                 </a:solidFill>
@@ -23132,7 +23277,7 @@
               </a:rPr>
               <a:t>Menor presencia en grandes empresas occidentales</a:t>
             </a:r>
-            <a:endParaRPr lang="en-US" sz="1200" dirty="0"/>
+            <a:endParaRPr lang="en-US" dirty="0"/>
           </a:p>
         </p:txBody>
       </p:sp>
@@ -23372,7 +23517,7 @@
         </p:nvSpPr>
         <p:spPr>
           <a:xfrm>
-            <a:off x="548640" y="1536192"/>
+            <a:off x="548640" y="1378017"/>
             <a:ext cx="11064240" cy="731520"/>
           </a:xfrm>
           <a:prstGeom prst="rect">
@@ -23392,7 +23537,7 @@
               <a:buNone/>
             </a:pPr>
             <a:r>
-              <a:rPr lang="en-US" sz="1300" b="1" dirty="0">
+              <a:rPr lang="en-US" sz="1600" b="1" dirty="0">
                 <a:solidFill>
                   <a:srgbClr val="2E8B63"/>
                 </a:solidFill>
@@ -23403,7 +23548,7 @@
               <a:t>Buscador de tecnologías</a:t>
             </a:r>
             <a:r>
-              <a:rPr lang="en-US" sz="1300" dirty="0">
+              <a:rPr lang="en-US" sz="1600" dirty="0">
                 <a:solidFill>
                   <a:srgbClr val="1E2A33"/>
                 </a:solidFill>
@@ -23413,7 +23558,7 @@
               </a:rPr>
               <a:t>: un subprograma corto, pensado para mostrar una faceta de la reactividad de Vue — un filtro en vivo que combina texto libre y categoría sobre un catálogo de herramientas del ecosistema Vue/React. Sirve para ilustrar un computed() con más de una dependencia reactiva a la vez, y componentes chicos comunicados por props y eventos.</a:t>
             </a:r>
-            <a:endParaRPr lang="en-US" sz="1300" dirty="0"/>
+            <a:endParaRPr lang="en-US" sz="1600" dirty="0"/>
           </a:p>
         </p:txBody>
       </p:sp>
@@ -23425,7 +23570,7 @@
         </p:nvSpPr>
         <p:spPr>
           <a:xfrm>
-            <a:off x="548640" y="2331720"/>
+            <a:off x="576072" y="2331720"/>
             <a:ext cx="5120640" cy="256032"/>
           </a:xfrm>
           <a:prstGeom prst="rect">
@@ -23442,7 +23587,7 @@
               <a:buNone/>
             </a:pPr>
             <a:r>
-              <a:rPr lang="en-US" sz="1100" b="1" kern="0" spc="200" dirty="0">
+              <a:rPr lang="en-US" sz="1600" b="1" kern="0" spc="200" dirty="0">
                 <a:solidFill>
                   <a:srgbClr val="2E8B63"/>
                 </a:solidFill>
@@ -23452,7 +23597,7 @@
               </a:rPr>
               <a:t>LA APP EN VIVO</a:t>
             </a:r>
-            <a:endParaRPr lang="en-US" sz="1100" dirty="0"/>
+            <a:endParaRPr lang="en-US" sz="1600" dirty="0"/>
           </a:p>
         </p:txBody>
       </p:sp>
@@ -24407,7 +24552,7 @@
               <a:buNone/>
             </a:pPr>
             <a:r>
-              <a:rPr lang="en-US" sz="1100" b="1" kern="0" spc="200" dirty="0">
+              <a:rPr lang="en-US" sz="1600" b="1" kern="0" spc="200" dirty="0">
                 <a:solidFill>
                   <a:srgbClr val="2E8B63"/>
                 </a:solidFill>
@@ -24417,7 +24562,7 @@
               </a:rPr>
               <a:t>COMPUTED() — EXTRACTO</a:t>
             </a:r>
-            <a:endParaRPr lang="en-US" sz="1100" dirty="0"/>
+            <a:endParaRPr lang="en-US" sz="1600" dirty="0"/>
           </a:p>
         </p:txBody>
       </p:sp>
@@ -24765,7 +24910,7 @@
               <a:buNone/>
             </a:pPr>
             <a:r>
-              <a:rPr lang="en-US" sz="1100" b="1" dirty="0">
+              <a:rPr lang="en-US" sz="1600" b="1" dirty="0">
                 <a:solidFill>
                   <a:srgbClr val="2E8B63"/>
                 </a:solidFill>
@@ -24776,7 +24921,7 @@
               <a:t>Ilustra: </a:t>
             </a:r>
             <a:r>
-              <a:rPr lang="en-US" sz="1100" dirty="0">
+              <a:rPr lang="en-US" sz="1600" dirty="0">
                 <a:solidFill>
                   <a:srgbClr val="1E2A33"/>
                 </a:solidFill>
@@ -24787,7 +24932,7 @@
               <a:t>computed con dos dependencias reactivas a la vez, componentes chicos por props/eventos y v-for. Código completo en </a:t>
             </a:r>
             <a:r>
-              <a:rPr lang="en-US" sz="1100" b="1" dirty="0">
+              <a:rPr lang="en-US" sz="1600" b="1" dirty="0">
                 <a:solidFill>
                   <a:srgbClr val="2E8B63"/>
                 </a:solidFill>
@@ -24798,7 +24943,7 @@
               <a:t>demo/buscador_filtro.html</a:t>
             </a:r>
             <a:r>
-              <a:rPr lang="en-US" sz="1100" dirty="0">
+              <a:rPr lang="en-US" sz="1600" dirty="0">
                 <a:solidFill>
                   <a:srgbClr val="1E2A33"/>
                 </a:solidFill>
@@ -24808,7 +24953,7 @@
               </a:rPr>
               <a:t> del repositorio.</a:t>
             </a:r>
-            <a:endParaRPr lang="en-US" sz="1100" dirty="0"/>
+            <a:endParaRPr lang="en-US" sz="1600" dirty="0"/>
           </a:p>
         </p:txBody>
       </p:sp>
@@ -25038,7 +25183,7 @@
               <a:buNone/>
             </a:pPr>
             <a:r>
-              <a:rPr lang="en-US" sz="1400" b="1" dirty="0">
+              <a:rPr lang="en-US" b="1" dirty="0">
                 <a:solidFill>
                   <a:srgbClr val="FFFFFF"/>
                 </a:solidFill>
@@ -25048,7 +25193,7 @@
               </a:rPr>
               <a:t>Para aprender frontend por primera vez</a:t>
             </a:r>
-            <a:endParaRPr lang="en-US" sz="1400" dirty="0"/>
+            <a:endParaRPr lang="en-US" dirty="0"/>
           </a:p>
         </p:txBody>
       </p:sp>
@@ -25077,7 +25222,7 @@
               <a:buNone/>
             </a:pPr>
             <a:r>
-              <a:rPr lang="en-US" sz="1200" dirty="0">
+              <a:rPr lang="en-US" sz="1600" dirty="0">
                 <a:solidFill>
                   <a:srgbClr val="C9D6D3"/>
                 </a:solidFill>
@@ -25087,7 +25232,7 @@
               </a:rPr>
               <a:t>Vue ofrece la curva más suave y una documentación excepcional.</a:t>
             </a:r>
-            <a:endParaRPr lang="en-US" sz="1200" dirty="0"/>
+            <a:endParaRPr lang="en-US" sz="1600" dirty="0"/>
           </a:p>
         </p:txBody>
       </p:sp>
@@ -25167,7 +25312,7 @@
               <a:buNone/>
             </a:pPr>
             <a:r>
-              <a:rPr lang="en-US" sz="1400" b="1" dirty="0">
+              <a:rPr lang="en-US" b="1" dirty="0">
                 <a:solidFill>
                   <a:srgbClr val="FFFFFF"/>
                 </a:solidFill>
@@ -25177,7 +25322,7 @@
               </a:rPr>
               <a:t>Para proyectos pequeños o medianos, con equipos chicos</a:t>
             </a:r>
-            <a:endParaRPr lang="en-US" sz="1400" dirty="0"/>
+            <a:endParaRPr lang="en-US" dirty="0"/>
           </a:p>
         </p:txBody>
       </p:sp>
@@ -25206,7 +25351,7 @@
               <a:buNone/>
             </a:pPr>
             <a:r>
-              <a:rPr lang="en-US" sz="1200" dirty="0">
+              <a:rPr lang="en-US" sz="1600" dirty="0">
                 <a:solidFill>
                   <a:srgbClr val="C9D6D3"/>
                 </a:solidFill>
@@ -25216,7 +25361,7 @@
               </a:rPr>
               <a:t>El ecosistema oficial de Vue reduce decisiones y tiempo de configuración.</a:t>
             </a:r>
-            <a:endParaRPr lang="en-US" sz="1200" dirty="0"/>
+            <a:endParaRPr lang="en-US" sz="1600" dirty="0"/>
           </a:p>
         </p:txBody>
       </p:sp>
@@ -25296,7 +25441,7 @@
               <a:buNone/>
             </a:pPr>
             <a:r>
-              <a:rPr lang="en-US" sz="1400" b="1" dirty="0">
+              <a:rPr lang="en-US" b="1" dirty="0">
                 <a:solidFill>
                   <a:srgbClr val="FFFFFF"/>
                 </a:solidFill>
@@ -25306,7 +25451,7 @@
               </a:rPr>
               <a:t>Para maximizar empleabilidad inmediata</a:t>
             </a:r>
-            <a:endParaRPr lang="en-US" sz="1400" dirty="0"/>
+            <a:endParaRPr lang="en-US" dirty="0"/>
           </a:p>
         </p:txBody>
       </p:sp>
@@ -25335,7 +25480,7 @@
               <a:buNone/>
             </a:pPr>
             <a:r>
-              <a:rPr lang="en-US" sz="1200" dirty="0">
+              <a:rPr lang="en-US" sz="1600" dirty="0">
                 <a:solidFill>
                   <a:srgbClr val="C9D6D3"/>
                 </a:solidFill>
@@ -25345,7 +25490,7 @@
               </a:rPr>
               <a:t>React sigue siendo la opción con más demanda laboral y comunidad.</a:t>
             </a:r>
-            <a:endParaRPr lang="en-US" sz="1200" dirty="0"/>
+            <a:endParaRPr lang="en-US" sz="1600" dirty="0"/>
           </a:p>
         </p:txBody>
       </p:sp>
@@ -25425,7 +25570,7 @@
               <a:buNone/>
             </a:pPr>
             <a:r>
-              <a:rPr lang="en-US" sz="1400" b="1" dirty="0">
+              <a:rPr lang="en-US" b="1" dirty="0">
                 <a:solidFill>
                   <a:srgbClr val="FFFFFF"/>
                 </a:solidFill>
@@ -25435,7 +25580,7 @@
               </a:rPr>
               <a:t>Para apps que priorizan rendimiento de punta</a:t>
             </a:r>
-            <a:endParaRPr lang="en-US" sz="1400" dirty="0"/>
+            <a:endParaRPr lang="en-US" dirty="0"/>
           </a:p>
         </p:txBody>
       </p:sp>
@@ -25464,7 +25609,7 @@
               <a:buNone/>
             </a:pPr>
             <a:r>
-              <a:rPr lang="en-US" sz="1200" dirty="0">
+              <a:rPr lang="en-US" sz="1600" dirty="0">
                 <a:solidFill>
                   <a:srgbClr val="C9D6D3"/>
                 </a:solidFill>
@@ -25474,7 +25619,7 @@
               </a:rPr>
               <a:t>Ambos son competitivos; Vue 3.6 con Vapor Mode cierra la brecha frente a frameworks sin VDOM.</a:t>
             </a:r>
-            <a:endParaRPr lang="en-US" sz="1200" dirty="0"/>
+            <a:endParaRPr lang="en-US" sz="1600" dirty="0"/>
           </a:p>
         </p:txBody>
       </p:sp>
@@ -25537,7 +25682,7 @@
               <a:buNone/>
             </a:pPr>
             <a:r>
-              <a:rPr lang="en-US" sz="1250" i="1" dirty="0">
+              <a:rPr lang="en-US" i="1" dirty="0">
                 <a:solidFill>
                   <a:srgbClr val="42B883"/>
                 </a:solidFill>
@@ -25547,7 +25692,7 @@
               </a:rPr>
               <a:t>No hay un "ganador" absoluto: la elección correcta depende del equipo, el proyecto y el horizonte de tiempo — que es, precisamente, lo que una PoC ayuda a decidir con evidencia.</a:t>
             </a:r>
-            <a:endParaRPr lang="en-US" sz="1250" dirty="0"/>
+            <a:endParaRPr lang="en-US" dirty="0"/>
           </a:p>
         </p:txBody>
       </p:sp>
@@ -25843,7 +25988,7 @@
               <a:buNone/>
             </a:pPr>
             <a:r>
-              <a:rPr lang="en-US" sz="1800" dirty="0">
+              <a:rPr lang="en-US" sz="2400" dirty="0">
                 <a:solidFill>
                   <a:srgbClr val="42B883"/>
                 </a:solidFill>
@@ -25853,7 +25998,7 @@
               </a:rPr>
               <a:t>Espacio de preguntas</a:t>
             </a:r>
-            <a:endParaRPr lang="en-US" sz="1800" dirty="0"/>
+            <a:endParaRPr lang="en-US" sz="2400" dirty="0"/>
           </a:p>
         </p:txBody>
       </p:sp>
@@ -26032,7 +26177,7 @@
               <a:buNone/>
             </a:pPr>
             <a:r>
-              <a:rPr lang="en-US" sz="1500" dirty="0">
+              <a:rPr lang="en-US" dirty="0">
                 <a:solidFill>
                   <a:srgbClr val="1E2A33"/>
                 </a:solidFill>
@@ -26042,7 +26187,7 @@
               </a:rPr>
               <a:t>Un conjunto de herramientas, convenciones y patrones que estructuran cómo se construye la interfaz de una aplicación web: manejo de estado, actualización del DOM, ruteo y organización en componentes.</a:t>
             </a:r>
-            <a:endParaRPr lang="en-US" sz="1500" dirty="0"/>
+            <a:endParaRPr lang="en-US" dirty="0"/>
           </a:p>
         </p:txBody>
       </p:sp>
@@ -26071,7 +26216,7 @@
               <a:buNone/>
             </a:pPr>
             <a:r>
-              <a:rPr lang="en-US" sz="1350" b="1" dirty="0">
+              <a:rPr lang="en-US" sz="2000" b="1" dirty="0">
                 <a:solidFill>
                   <a:srgbClr val="2E8B63"/>
                 </a:solidFill>
@@ -26081,7 +26226,7 @@
               </a:rPr>
               <a:t>¿Qué problema resuelven?</a:t>
             </a:r>
-            <a:endParaRPr lang="en-US" sz="1350" dirty="0"/>
+            <a:endParaRPr lang="en-US" sz="2000" dirty="0"/>
           </a:p>
         </p:txBody>
       </p:sp>
@@ -26093,8 +26238,8 @@
         </p:nvSpPr>
         <p:spPr>
           <a:xfrm>
-            <a:off x="548640" y="3840480"/>
-            <a:ext cx="5394960" cy="2194560"/>
+            <a:off x="548639" y="3840480"/>
+            <a:ext cx="5771949" cy="2194560"/>
           </a:xfrm>
           <a:prstGeom prst="rect">
             <a:avLst/>
@@ -26114,7 +26259,7 @@
               <a:buChar char="•"/>
             </a:pPr>
             <a:r>
-              <a:rPr lang="en-US" sz="1250" dirty="0">
+              <a:rPr lang="en-US" dirty="0">
                 <a:solidFill>
                   <a:srgbClr val="1E2A33"/>
                 </a:solidFill>
@@ -26124,7 +26269,7 @@
               </a:rPr>
               <a:t>Sincronizar el estado de la aplicación con lo que ve el usuario, a mano, es propenso a errores.</a:t>
             </a:r>
-            <a:endParaRPr lang="en-US" sz="1250" dirty="0"/>
+            <a:endParaRPr lang="en-US" dirty="0"/>
           </a:p>
           <a:p>
             <a:pPr marL="342900" indent="-342900">
@@ -26135,7 +26280,7 @@
               <a:buChar char="•"/>
             </a:pPr>
             <a:r>
-              <a:rPr lang="en-US" sz="1250" dirty="0">
+              <a:rPr lang="en-US" dirty="0">
                 <a:solidFill>
                   <a:srgbClr val="1E2A33"/>
                 </a:solidFill>
@@ -26145,7 +26290,7 @@
               </a:rPr>
               <a:t>Reutilizar UI (componentes) sin repetir código ni perder consistencia.</a:t>
             </a:r>
-            <a:endParaRPr lang="en-US" sz="1250" dirty="0"/>
+            <a:endParaRPr lang="en-US" dirty="0"/>
           </a:p>
           <a:p>
             <a:pPr marL="342900" indent="-342900">
@@ -26156,7 +26301,7 @@
               <a:buChar char="•"/>
             </a:pPr>
             <a:r>
-              <a:rPr lang="en-US" sz="1250" dirty="0">
+              <a:rPr lang="en-US" dirty="0">
                 <a:solidFill>
                   <a:srgbClr val="1E2A33"/>
                 </a:solidFill>
@@ -26166,7 +26311,7 @@
               </a:rPr>
               <a:t>Escalar una app de una página a cientos de vistas sin perder mantenibilidad.</a:t>
             </a:r>
-            <a:endParaRPr lang="en-US" sz="1250" dirty="0"/>
+            <a:endParaRPr lang="en-US" dirty="0"/>
           </a:p>
         </p:txBody>
       </p:sp>
@@ -26500,7 +26645,7 @@
               <a:buNone/>
             </a:pPr>
             <a:r>
-              <a:rPr lang="en-US" sz="1300" dirty="0">
+              <a:rPr lang="en-US" dirty="0">
                 <a:solidFill>
                   <a:srgbClr val="D7E4E1"/>
                 </a:solidFill>
@@ -26510,7 +26655,7 @@
               </a:rPr>
               <a:t>En esta PoC nos enfocamos en frameworks de componentes reactivos para SPA: Vue.js y React, los dos con mayor tracción actual.</a:t>
             </a:r>
-            <a:endParaRPr lang="en-US" sz="1300" dirty="0"/>
+            <a:endParaRPr lang="en-US" dirty="0"/>
           </a:p>
         </p:txBody>
       </p:sp>
@@ -26817,52 +26962,13 @@
       </p:sp>
       <p:sp>
         <p:nvSpPr>
-          <p:cNvPr id="7" name="Text 4"/>
-          <p:cNvSpPr txBox="1"/>
-          <p:nvPr/>
-        </p:nvSpPr>
-        <p:spPr>
-          <a:xfrm>
-            <a:off x="8458200" y="2194560"/>
-            <a:ext cx="2926080" cy="320040"/>
-          </a:xfrm>
-          <a:prstGeom prst="rect">
-            <a:avLst/>
-          </a:prstGeom>
-          <a:noFill/>
-          <a:ln/>
-        </p:spPr>
-        <p:txBody>
-          <a:bodyPr wrap="square" lIns="0" tIns="0" rIns="0" bIns="0" rtlCol="0" anchor="ctr"/>
-          <a:lstStyle/>
-          <a:p>
-            <a:pPr marL="0" indent="0">
-              <a:buNone/>
-            </a:pPr>
-            <a:r>
-              <a:rPr lang="en-US" sz="1300" b="1" dirty="0">
-                <a:solidFill>
-                  <a:srgbClr val="42B883"/>
-                </a:solidFill>
-                <a:latin typeface="Calibri" pitchFamily="34" charset="0"/>
-                <a:ea typeface="Calibri" pitchFamily="34" charset="-122"/>
-                <a:cs typeface="Calibri" pitchFamily="34" charset="-120"/>
-              </a:rPr>
-              <a:t>Lectura rápida</a:t>
-            </a:r>
-            <a:endParaRPr lang="en-US" sz="1300" dirty="0"/>
-          </a:p>
-        </p:txBody>
-      </p:sp>
-      <p:sp>
-        <p:nvSpPr>
           <p:cNvPr id="8" name="Text 5"/>
           <p:cNvSpPr txBox="1"/>
           <p:nvPr/>
         </p:nvSpPr>
         <p:spPr>
           <a:xfrm>
-            <a:off x="8458200" y="2606040"/>
+            <a:off x="8549640" y="2263140"/>
             <a:ext cx="2971800" cy="3383280"/>
           </a:xfrm>
           <a:prstGeom prst="rect">
@@ -26883,7 +26989,7 @@
               <a:buChar char="•"/>
             </a:pPr>
             <a:r>
-              <a:rPr lang="en-US" sz="1150" dirty="0">
+              <a:rPr lang="en-US" dirty="0">
                 <a:solidFill>
                   <a:srgbClr val="D7E4E1"/>
                 </a:solidFill>
@@ -26893,7 +26999,7 @@
               </a:rPr>
               <a:t>React lidera con amplio margen (44,7%).</a:t>
             </a:r>
-            <a:endParaRPr lang="en-US" sz="1150" dirty="0"/>
+            <a:endParaRPr lang="en-US" dirty="0"/>
           </a:p>
           <a:p>
             <a:pPr marL="342900" indent="-342900">
@@ -26904,7 +27010,7 @@
               <a:buChar char="•"/>
             </a:pPr>
             <a:r>
-              <a:rPr lang="en-US" sz="1150" dirty="0">
+              <a:rPr lang="en-US" dirty="0">
                 <a:solidFill>
                   <a:srgbClr val="D7E4E1"/>
                 </a:solidFill>
@@ -26914,7 +27020,7 @@
               </a:rPr>
               <a:t>Angular y Vue están prácticamente empatados en 2º lugar (~18%).</a:t>
             </a:r>
-            <a:endParaRPr lang="en-US" sz="1150" dirty="0"/>
+            <a:endParaRPr lang="en-US" dirty="0"/>
           </a:p>
           <a:p>
             <a:pPr marL="342900" indent="-342900">
@@ -26925,7 +27031,7 @@
               <a:buChar char="•"/>
             </a:pPr>
             <a:r>
-              <a:rPr lang="en-US" sz="1150" dirty="0">
+              <a:rPr lang="en-US" dirty="0">
                 <a:solidFill>
                   <a:srgbClr val="D7E4E1"/>
                 </a:solidFill>
@@ -26935,7 +27041,7 @@
               </a:rPr>
               <a:t>Svelte crece pero aún es minoritario (7,2%).</a:t>
             </a:r>
-            <a:endParaRPr lang="en-US" sz="1150" dirty="0"/>
+            <a:endParaRPr lang="en-US" dirty="0"/>
           </a:p>
           <a:p>
             <a:pPr marL="342900" indent="-342900">
@@ -26946,7 +27052,7 @@
               <a:buChar char="•"/>
             </a:pPr>
             <a:r>
-              <a:rPr lang="en-US" sz="1150" dirty="0">
+              <a:rPr lang="en-US" dirty="0">
                 <a:solidFill>
                   <a:srgbClr val="D7E4E1"/>
                 </a:solidFill>
@@ -26956,7 +27062,7 @@
               </a:rPr>
               <a:t>Vue mantiene una base sólida y estable año a año.</a:t>
             </a:r>
-            <a:endParaRPr lang="en-US" sz="1150" dirty="0"/>
+            <a:endParaRPr lang="en-US" dirty="0"/>
           </a:p>
         </p:txBody>
       </p:sp>
@@ -27303,7 +27409,7 @@
               <a:buNone/>
             </a:pPr>
             <a:r>
-              <a:rPr lang="en-US" sz="1050" dirty="0">
+              <a:rPr lang="en-US" sz="1600" dirty="0">
                 <a:solidFill>
                   <a:srgbClr val="5B6B73"/>
                 </a:solidFill>
@@ -27313,7 +27419,7 @@
               </a:rPr>
               <a:t>Evan You (ex-Google, trabajó en AngularJS) publica Vue.js 0.6.</a:t>
             </a:r>
-            <a:endParaRPr lang="en-US" sz="1050" dirty="0"/>
+            <a:endParaRPr lang="en-US" sz="1600" dirty="0"/>
           </a:p>
         </p:txBody>
       </p:sp>
@@ -27413,7 +27519,7 @@
               <a:buNone/>
             </a:pPr>
             <a:r>
-              <a:rPr lang="en-US" sz="1050" dirty="0">
+              <a:rPr lang="en-US" sz="1600" dirty="0">
                 <a:solidFill>
                   <a:srgbClr val="5B6B73"/>
                 </a:solidFill>
@@ -27423,7 +27529,7 @@
               </a:rPr>
               <a:t>Vue 2: Virtual DOM, mejor rendimiento, ecosistema oficial (Router, Vuex).</a:t>
             </a:r>
-            <a:endParaRPr lang="en-US" sz="1050" dirty="0"/>
+            <a:endParaRPr lang="en-US" sz="1600" dirty="0"/>
           </a:p>
         </p:txBody>
       </p:sp>
@@ -27523,6 +27629,17 @@
               <a:buNone/>
             </a:pPr>
             <a:r>
+              <a:rPr lang="en-US" sz="1600" dirty="0">
+                <a:solidFill>
+                  <a:srgbClr val="5B6B73"/>
+                </a:solidFill>
+                <a:latin typeface="Calibri" pitchFamily="34" charset="0"/>
+                <a:ea typeface="Calibri" pitchFamily="34" charset="-122"/>
+                <a:cs typeface="Calibri" pitchFamily="34" charset="-120"/>
+              </a:rPr>
+              <a:t>Vue 3: reescritura en TypeScript, Composition API, mejor tree-shaking</a:t>
+            </a:r>
+            <a:r>
               <a:rPr lang="en-US" sz="1050" dirty="0">
                 <a:solidFill>
                   <a:srgbClr val="5B6B73"/>
@@ -27531,7 +27648,7 @@
                 <a:ea typeface="Calibri" pitchFamily="34" charset="-122"/>
                 <a:cs typeface="Calibri" pitchFamily="34" charset="-120"/>
               </a:rPr>
-              <a:t>Vue 3: reescritura en TypeScript, Composition API, mejor tree-shaking.</a:t>
+              <a:t>.</a:t>
             </a:r>
             <a:endParaRPr lang="en-US" sz="1050" dirty="0"/>
           </a:p>
@@ -27633,7 +27750,7 @@
               <a:buNone/>
             </a:pPr>
             <a:r>
-              <a:rPr lang="en-US" sz="1050" dirty="0">
+              <a:rPr lang="en-US" sz="1600" dirty="0">
                 <a:solidFill>
                   <a:srgbClr val="5B6B73"/>
                 </a:solidFill>
@@ -27643,7 +27760,7 @@
               </a:rPr>
               <a:t>Fin del soporte de Vue 2 (EOL, 31 de diciembre).</a:t>
             </a:r>
-            <a:endParaRPr lang="en-US" sz="1050" dirty="0"/>
+            <a:endParaRPr lang="en-US" sz="1600" dirty="0"/>
           </a:p>
         </p:txBody>
       </p:sp>
@@ -27743,7 +27860,7 @@
               <a:buNone/>
             </a:pPr>
             <a:r>
-              <a:rPr lang="en-US" sz="1050" dirty="0">
+              <a:rPr lang="en-US" sz="1600" dirty="0">
                 <a:solidFill>
                   <a:srgbClr val="5B6B73"/>
                 </a:solidFill>
@@ -27753,7 +27870,7 @@
               </a:rPr>
               <a:t>Vue 3.6: Vapor Mode y motor de reactividad "Alien Signals".</a:t>
             </a:r>
-            <a:endParaRPr lang="en-US" sz="1050" dirty="0"/>
+            <a:endParaRPr lang="en-US" sz="1600" dirty="0"/>
           </a:p>
         </p:txBody>
       </p:sp>
@@ -27971,7 +28088,7 @@
               <a:buNone/>
             </a:pPr>
             <a:r>
-              <a:rPr lang="en-US" sz="1550" dirty="0">
+              <a:rPr lang="en-US" sz="2000" dirty="0">
                 <a:solidFill>
                   <a:srgbClr val="1E2A33"/>
                 </a:solidFill>
@@ -27981,7 +28098,7 @@
               </a:rPr>
               <a:t>Vue está diseñado para adoptarse de forma incremental: podés empezar agregándolo a una sola página HTML y crecer hasta una aplicación completa, sin cambiar de herramienta en el camino.</a:t>
             </a:r>
-            <a:endParaRPr lang="en-US" sz="1550" dirty="0"/>
+            <a:endParaRPr lang="en-US" sz="2000" dirty="0"/>
           </a:p>
         </p:txBody>
       </p:sp>
@@ -28095,7 +28212,7 @@
               <a:buNone/>
             </a:pPr>
             <a:r>
-              <a:rPr lang="en-US" sz="1250" b="1" dirty="0">
+              <a:rPr lang="en-US" sz="1600" b="1" dirty="0">
                 <a:solidFill>
                   <a:srgbClr val="1E2A33"/>
                 </a:solidFill>
@@ -28105,7 +28222,7 @@
               </a:rPr>
               <a:t>Mejorar HTML estático</a:t>
             </a:r>
-            <a:endParaRPr lang="en-US" sz="1250" dirty="0"/>
+            <a:endParaRPr lang="en-US" sz="1600" dirty="0"/>
           </a:p>
         </p:txBody>
       </p:sp>
@@ -28134,7 +28251,7 @@
               <a:buNone/>
             </a:pPr>
             <a:r>
-              <a:rPr lang="en-US" sz="1050" dirty="0">
+              <a:rPr lang="en-US" dirty="0">
                 <a:solidFill>
                   <a:srgbClr val="5B6B73"/>
                 </a:solidFill>
@@ -28144,7 +28261,7 @@
               </a:rPr>
               <a:t>Sin build step, con un &lt;script&gt; — como una versión moderna de jQuery.</a:t>
             </a:r>
-            <a:endParaRPr lang="en-US" sz="1050" dirty="0"/>
+            <a:endParaRPr lang="en-US" dirty="0"/>
           </a:p>
         </p:txBody>
       </p:sp>
@@ -28258,7 +28375,7 @@
               <a:buNone/>
             </a:pPr>
             <a:r>
-              <a:rPr lang="en-US" sz="1250" b="1" dirty="0">
+              <a:rPr lang="en-US" sz="1600" b="1" dirty="0">
                 <a:solidFill>
                   <a:srgbClr val="1E2A33"/>
                 </a:solidFill>
@@ -28268,7 +28385,7 @@
               </a:rPr>
               <a:t>Web Components</a:t>
             </a:r>
-            <a:endParaRPr lang="en-US" sz="1250" dirty="0"/>
+            <a:endParaRPr lang="en-US" sz="1600" dirty="0"/>
           </a:p>
         </p:txBody>
       </p:sp>
@@ -28297,7 +28414,7 @@
               <a:buNone/>
             </a:pPr>
             <a:r>
-              <a:rPr lang="en-US" sz="1050" dirty="0">
+              <a:rPr lang="en-US" dirty="0">
                 <a:solidFill>
                   <a:srgbClr val="5B6B73"/>
                 </a:solidFill>
@@ -28307,7 +28424,7 @@
               </a:rPr>
               <a:t>Embeber widgets Vue dentro de cualquier stack existente.</a:t>
             </a:r>
-            <a:endParaRPr lang="en-US" sz="1050" dirty="0"/>
+            <a:endParaRPr lang="en-US" dirty="0"/>
           </a:p>
         </p:txBody>
       </p:sp>
@@ -28421,7 +28538,7 @@
               <a:buNone/>
             </a:pPr>
             <a:r>
-              <a:rPr lang="en-US" sz="1250" b="1" dirty="0">
+              <a:rPr lang="en-US" sz="1600" b="1" dirty="0">
                 <a:solidFill>
                   <a:srgbClr val="1E2A33"/>
                 </a:solidFill>
@@ -28431,7 +28548,7 @@
               </a:rPr>
               <a:t>SPA completa</a:t>
             </a:r>
-            <a:endParaRPr lang="en-US" sz="1250" dirty="0"/>
+            <a:endParaRPr lang="en-US" sz="1600" dirty="0"/>
           </a:p>
         </p:txBody>
       </p:sp>
@@ -28460,6 +28577,17 @@
               <a:buNone/>
             </a:pPr>
             <a:r>
+              <a:rPr lang="en-US" dirty="0">
+                <a:solidFill>
+                  <a:srgbClr val="5B6B73"/>
+                </a:solidFill>
+                <a:latin typeface="Calibri" pitchFamily="34" charset="0"/>
+                <a:ea typeface="Calibri" pitchFamily="34" charset="-122"/>
+                <a:cs typeface="Calibri" pitchFamily="34" charset="-120"/>
+              </a:rPr>
+              <a:t>Con Vue Router + Pinia para aplicaciones de una sola página</a:t>
+            </a:r>
+            <a:r>
               <a:rPr lang="en-US" sz="1050" dirty="0">
                 <a:solidFill>
                   <a:srgbClr val="5B6B73"/>
@@ -28468,7 +28596,7 @@
                 <a:ea typeface="Calibri" pitchFamily="34" charset="-122"/>
                 <a:cs typeface="Calibri" pitchFamily="34" charset="-120"/>
               </a:rPr>
-              <a:t>Con Vue Router + Pinia para aplicaciones de una sola página.</a:t>
+              <a:t>.</a:t>
             </a:r>
             <a:endParaRPr lang="en-US" sz="1050" dirty="0"/>
           </a:p>
@@ -28584,7 +28712,7 @@
               <a:buNone/>
             </a:pPr>
             <a:r>
-              <a:rPr lang="en-US" sz="1250" b="1" dirty="0">
+              <a:rPr lang="en-US" sz="1600" b="1" dirty="0">
                 <a:solidFill>
                   <a:srgbClr val="1E2A33"/>
                 </a:solidFill>
@@ -28594,7 +28722,7 @@
               </a:rPr>
               <a:t>SSR / SSG con Nuxt</a:t>
             </a:r>
-            <a:endParaRPr lang="en-US" sz="1250" dirty="0"/>
+            <a:endParaRPr lang="en-US" sz="1600" dirty="0"/>
           </a:p>
         </p:txBody>
       </p:sp>
@@ -28623,7 +28751,7 @@
               <a:buNone/>
             </a:pPr>
             <a:r>
-              <a:rPr lang="en-US" sz="1050" dirty="0">
+              <a:rPr lang="en-US" dirty="0">
                 <a:solidFill>
                   <a:srgbClr val="5B6B73"/>
                 </a:solidFill>
@@ -28633,7 +28761,7 @@
               </a:rPr>
               <a:t>Renderizado en servidor o sitios estáticos, full-stack.</a:t>
             </a:r>
-            <a:endParaRPr lang="en-US" sz="1050" dirty="0"/>
+            <a:endParaRPr lang="en-US" dirty="0"/>
           </a:p>
         </p:txBody>
       </p:sp>
@@ -28923,7 +29051,7 @@
               <a:buNone/>
             </a:pPr>
             <a:r>
-              <a:rPr lang="en-US" sz="1500" dirty="0">
+              <a:rPr lang="en-US" sz="2000" dirty="0">
                 <a:solidFill>
                   <a:srgbClr val="1E2A33"/>
                 </a:solidFill>
@@ -28933,7 +29061,7 @@
               </a:rPr>
               <a:t>Dos ideas fundamentales sostienen todo el framework:</a:t>
             </a:r>
-            <a:endParaRPr lang="en-US" sz="1500" dirty="0"/>
+            <a:endParaRPr lang="en-US" sz="2000" dirty="0"/>
           </a:p>
         </p:txBody>
       </p:sp>
@@ -29025,7 +29153,7 @@
         </p:nvSpPr>
         <p:spPr>
           <a:xfrm>
-            <a:off x="1783080" y="2331720"/>
+            <a:off x="1783080" y="2314202"/>
             <a:ext cx="3931920" cy="365760"/>
           </a:xfrm>
           <a:prstGeom prst="rect">
@@ -29042,7 +29170,7 @@
               <a:buNone/>
             </a:pPr>
             <a:r>
-              <a:rPr lang="en-US" sz="1450" b="1" dirty="0">
+              <a:rPr lang="en-US" sz="2000" b="1" dirty="0">
                 <a:solidFill>
                   <a:srgbClr val="1E2A33"/>
                 </a:solidFill>
@@ -29052,7 +29180,7 @@
               </a:rPr>
               <a:t>Renderizado declarativo</a:t>
             </a:r>
-            <a:endParaRPr lang="en-US" sz="1450" dirty="0"/>
+            <a:endParaRPr lang="en-US" sz="2000" dirty="0"/>
           </a:p>
         </p:txBody>
       </p:sp>
@@ -29081,7 +29209,7 @@
               <a:buNone/>
             </a:pPr>
             <a:r>
-              <a:rPr lang="en-US" sz="1150" dirty="0">
+              <a:rPr lang="en-US" dirty="0">
                 <a:solidFill>
                   <a:srgbClr val="5B6B73"/>
                 </a:solidFill>
@@ -29091,7 +29219,7 @@
               </a:rPr>
               <a:t>El template describe el HTML resultante en función del estado — vos declarás el "qué", Vue resuelve el "cómo".</a:t>
             </a:r>
-            <a:endParaRPr lang="en-US" sz="1150" dirty="0"/>
+            <a:endParaRPr lang="en-US" dirty="0"/>
           </a:p>
         </p:txBody>
       </p:sp>
@@ -29200,7 +29328,7 @@
               <a:buNone/>
             </a:pPr>
             <a:r>
-              <a:rPr lang="en-US" sz="1450" b="1" dirty="0">
+              <a:rPr lang="en-US" sz="2000" b="1" dirty="0">
                 <a:solidFill>
                   <a:srgbClr val="1E2A33"/>
                 </a:solidFill>
@@ -29210,7 +29338,7 @@
               </a:rPr>
               <a:t>Reactividad</a:t>
             </a:r>
-            <a:endParaRPr lang="en-US" sz="1450" dirty="0"/>
+            <a:endParaRPr lang="en-US" sz="2000" dirty="0"/>
           </a:p>
         </p:txBody>
       </p:sp>
@@ -29239,7 +29367,7 @@
               <a:buNone/>
             </a:pPr>
             <a:r>
-              <a:rPr lang="en-US" sz="1150" dirty="0">
+              <a:rPr lang="en-US" dirty="0">
                 <a:solidFill>
                   <a:srgbClr val="5B6B73"/>
                 </a:solidFill>
@@ -29249,7 +29377,7 @@
               </a:rPr>
               <a:t>Vue rastrea automáticamente qué variables de estado usa cada parte de la interfaz y actualiza el DOM solo donde cambió algo.</a:t>
             </a:r>
-            <a:endParaRPr lang="en-US" sz="1150" dirty="0"/>
+            <a:endParaRPr lang="en-US" dirty="0"/>
           </a:p>
         </p:txBody>
       </p:sp>
@@ -29290,8 +29418,8 @@
         </p:nvSpPr>
         <p:spPr>
           <a:xfrm>
-            <a:off x="822960" y="4389120"/>
-            <a:ext cx="6035040" cy="1737360"/>
+            <a:off x="845820" y="4311396"/>
+            <a:ext cx="6299735" cy="1828800"/>
           </a:xfrm>
           <a:prstGeom prst="rect">
             <a:avLst/>
@@ -29437,8 +29565,8 @@
         </p:nvSpPr>
         <p:spPr>
           <a:xfrm>
-            <a:off x="6583680" y="4389120"/>
-            <a:ext cx="4297680" cy="1737360"/>
+            <a:off x="6949440" y="4251960"/>
+            <a:ext cx="4568792" cy="1947672"/>
           </a:xfrm>
           <a:prstGeom prst="rect">
             <a:avLst/>
@@ -29750,7 +29878,7 @@
               <a:buNone/>
             </a:pPr>
             <a:r>
-              <a:rPr lang="en-US" sz="1450" dirty="0">
+              <a:rPr lang="en-US" dirty="0">
                 <a:solidFill>
                   <a:srgbClr val="1E2A33"/>
                 </a:solidFill>
@@ -29760,7 +29888,7 @@
               </a:rPr>
               <a:t>Definimos dos grupos de características para comparar Vue y React de forma objetiva:</a:t>
             </a:r>
-            <a:endParaRPr lang="en-US" sz="1450" dirty="0"/>
+            <a:endParaRPr lang="en-US" dirty="0"/>
           </a:p>
         </p:txBody>
       </p:sp>
@@ -29869,7 +29997,7 @@
               <a:buNone/>
             </a:pPr>
             <a:r>
-              <a:rPr lang="en-US" sz="1500" b="1" dirty="0">
+              <a:rPr lang="en-US" sz="2000" b="1" dirty="0">
                 <a:solidFill>
                   <a:srgbClr val="1E2A33"/>
                 </a:solidFill>
@@ -29879,7 +30007,7 @@
               </a:rPr>
               <a:t>Características técnicas</a:t>
             </a:r>
-            <a:endParaRPr lang="en-US" sz="1500" dirty="0"/>
+            <a:endParaRPr lang="en-US" sz="2000" dirty="0"/>
           </a:p>
         </p:txBody>
       </p:sp>
@@ -29912,7 +30040,7 @@
               <a:buChar char="•"/>
             </a:pPr>
             <a:r>
-              <a:rPr lang="en-US" sz="1250" dirty="0">
+              <a:rPr lang="en-US" dirty="0">
                 <a:solidFill>
                   <a:srgbClr val="1E2A33"/>
                 </a:solidFill>
@@ -29922,7 +30050,7 @@
               </a:rPr>
               <a:t>Rendimiento y tamaño de bundle</a:t>
             </a:r>
-            <a:endParaRPr lang="en-US" sz="1250" dirty="0"/>
+            <a:endParaRPr lang="en-US" dirty="0"/>
           </a:p>
           <a:p>
             <a:pPr marL="342900" indent="-342900">
@@ -29933,7 +30061,7 @@
               <a:buChar char="•"/>
             </a:pPr>
             <a:r>
-              <a:rPr lang="en-US" sz="1250" dirty="0">
+              <a:rPr lang="en-US" dirty="0">
                 <a:solidFill>
                   <a:srgbClr val="1E2A33"/>
                 </a:solidFill>
@@ -29943,7 +30071,7 @@
               </a:rPr>
               <a:t>Modelo de reactividad y arquitectura</a:t>
             </a:r>
-            <a:endParaRPr lang="en-US" sz="1250" dirty="0"/>
+            <a:endParaRPr lang="en-US" dirty="0"/>
           </a:p>
           <a:p>
             <a:pPr marL="342900" indent="-342900">
@@ -29954,7 +30082,7 @@
               <a:buChar char="•"/>
             </a:pPr>
             <a:r>
-              <a:rPr lang="en-US" sz="1250" dirty="0">
+              <a:rPr lang="en-US" dirty="0">
                 <a:solidFill>
                   <a:srgbClr val="1E2A33"/>
                 </a:solidFill>
@@ -29964,7 +30092,7 @@
               </a:rPr>
               <a:t>Sintaxis y curva de aprendizaje</a:t>
             </a:r>
-            <a:endParaRPr lang="en-US" sz="1250" dirty="0"/>
+            <a:endParaRPr lang="en-US" dirty="0"/>
           </a:p>
           <a:p>
             <a:pPr marL="342900" indent="-342900">
@@ -29975,7 +30103,7 @@
               <a:buChar char="•"/>
             </a:pPr>
             <a:r>
-              <a:rPr lang="en-US" sz="1250" dirty="0">
+              <a:rPr lang="en-US" dirty="0">
                 <a:solidFill>
                   <a:srgbClr val="1E2A33"/>
                 </a:solidFill>
@@ -29985,7 +30113,7 @@
               </a:rPr>
               <a:t>Soporte de TypeScript</a:t>
             </a:r>
-            <a:endParaRPr lang="en-US" sz="1250" dirty="0"/>
+            <a:endParaRPr lang="en-US" dirty="0"/>
           </a:p>
           <a:p>
             <a:pPr marL="342900" indent="-342900">
@@ -29996,7 +30124,7 @@
               <a:buChar char="•"/>
             </a:pPr>
             <a:r>
-              <a:rPr lang="en-US" sz="1250" dirty="0">
+              <a:rPr lang="en-US" dirty="0">
                 <a:solidFill>
                   <a:srgbClr val="1E2A33"/>
                 </a:solidFill>
@@ -30006,7 +30134,7 @@
               </a:rPr>
               <a:t>Herramientas de build y tooling</a:t>
             </a:r>
-            <a:endParaRPr lang="en-US" sz="1250" dirty="0"/>
+            <a:endParaRPr lang="en-US" dirty="0"/>
           </a:p>
         </p:txBody>
       </p:sp>
@@ -30115,7 +30243,7 @@
               <a:buNone/>
             </a:pPr>
             <a:r>
-              <a:rPr lang="en-US" sz="1500" b="1" dirty="0">
+              <a:rPr lang="en-US" sz="2000" b="1" dirty="0">
                 <a:solidFill>
                   <a:srgbClr val="1E2A33"/>
                 </a:solidFill>
@@ -30125,7 +30253,7 @@
               </a:rPr>
               <a:t>Proceso de desarrollo</a:t>
             </a:r>
-            <a:endParaRPr lang="en-US" sz="1500" dirty="0"/>
+            <a:endParaRPr lang="en-US" sz="2000" dirty="0"/>
           </a:p>
         </p:txBody>
       </p:sp>
@@ -30158,7 +30286,7 @@
               <a:buChar char="•"/>
             </a:pPr>
             <a:r>
-              <a:rPr lang="en-US" sz="1250" dirty="0">
+              <a:rPr lang="en-US" dirty="0">
                 <a:solidFill>
                   <a:srgbClr val="1E2A33"/>
                 </a:solidFill>
@@ -30168,7 +30296,7 @@
               </a:rPr>
               <a:t>Documentación oficial disponible</a:t>
             </a:r>
-            <a:endParaRPr lang="en-US" sz="1250" dirty="0"/>
+            <a:endParaRPr lang="en-US" dirty="0"/>
           </a:p>
           <a:p>
             <a:pPr marL="342900" indent="-342900">
@@ -30179,7 +30307,7 @@
               <a:buChar char="•"/>
             </a:pPr>
             <a:r>
-              <a:rPr lang="en-US" sz="1250" dirty="0">
+              <a:rPr lang="en-US" dirty="0">
                 <a:solidFill>
                   <a:srgbClr val="1E2A33"/>
                 </a:solidFill>
@@ -30189,7 +30317,7 @@
               </a:rPr>
               <a:t>Tamaño y actividad de la comunidad</a:t>
             </a:r>
-            <a:endParaRPr lang="en-US" sz="1250" dirty="0"/>
+            <a:endParaRPr lang="en-US" dirty="0"/>
           </a:p>
           <a:p>
             <a:pPr marL="342900" indent="-342900">
@@ -30200,7 +30328,7 @@
               <a:buChar char="•"/>
             </a:pPr>
             <a:r>
-              <a:rPr lang="en-US" sz="1250" dirty="0">
+              <a:rPr lang="en-US" dirty="0">
                 <a:solidFill>
                   <a:srgbClr val="1E2A33"/>
                 </a:solidFill>
@@ -30210,7 +30338,7 @@
               </a:rPr>
               <a:t>Oferta y demanda de desarrolladores</a:t>
             </a:r>
-            <a:endParaRPr lang="en-US" sz="1250" dirty="0"/>
+            <a:endParaRPr lang="en-US" dirty="0"/>
           </a:p>
           <a:p>
             <a:pPr marL="342900" indent="-342900">
@@ -30221,7 +30349,7 @@
               <a:buChar char="•"/>
             </a:pPr>
             <a:r>
-              <a:rPr lang="en-US" sz="1250" dirty="0">
+              <a:rPr lang="en-US" dirty="0">
                 <a:solidFill>
                   <a:srgbClr val="1E2A33"/>
                 </a:solidFill>
@@ -30231,7 +30359,7 @@
               </a:rPr>
               <a:t>Soporte y frecuencia de actualizaciones</a:t>
             </a:r>
-            <a:endParaRPr lang="en-US" sz="1250" dirty="0"/>
+            <a:endParaRPr lang="en-US" dirty="0"/>
           </a:p>
           <a:p>
             <a:pPr marL="342900" indent="-342900">
@@ -30242,7 +30370,7 @@
               <a:buChar char="•"/>
             </a:pPr>
             <a:r>
-              <a:rPr lang="en-US" sz="1250" dirty="0">
+              <a:rPr lang="en-US" dirty="0">
                 <a:solidFill>
                   <a:srgbClr val="1E2A33"/>
                 </a:solidFill>
@@ -30252,7 +30380,7 @@
               </a:rPr>
               <a:t>Adopción real por empresas</a:t>
             </a:r>
-            <a:endParaRPr lang="en-US" sz="1250" dirty="0"/>
+            <a:endParaRPr lang="en-US" dirty="0"/>
           </a:p>
         </p:txBody>
       </p:sp>
